--- a/docs/slides/TV1_BaiGiang_ChuanGoc_C4_Chuan_Moi.pptx
+++ b/docs/slides/TV1_BaiGiang_ChuanGoc_C4_Chuan_Moi.pptx
@@ -16,14 +16,6 @@
     <p:sldId id="264" r:id="rId15"/>
     <p:sldId id="265" r:id="rId16"/>
     <p:sldId id="266" r:id="rId17"/>
-    <p:sldId id="267" r:id="rId18"/>
-    <p:sldId id="268" r:id="rId19"/>
-    <p:sldId id="269" r:id="rId20"/>
-    <p:sldId id="270" r:id="rId21"/>
-    <p:sldId id="271" r:id="rId22"/>
-    <p:sldId id="272" r:id="rId23"/>
-    <p:sldId id="273" r:id="rId24"/>
-    <p:sldId id="274" r:id="rId25"/>
   </p:sldIdLst>
   <p:sldSz cx="9144000" cy="6858000" type="screen4x3"/>
   <p:notesSz cx="6858000" cy="9144000"/>
@@ -3280,8 +3272,8 @@
         </p:nvSpPr>
         <p:spPr>
           <a:xfrm>
-            <a:off x="182880" y="182880"/>
-            <a:ext cx="731520" cy="548640"/>
+            <a:off x="164592" y="6217920"/>
+            <a:ext cx="484632" cy="484632"/>
           </a:xfrm>
           <a:prstGeom prst="rect">
             <a:avLst/>
@@ -3289,12 +3281,12 @@
           <a:noFill/>
         </p:spPr>
         <p:txBody>
-          <a:bodyPr wrap="square">
+          <a:bodyPr wrap="none" lIns="0" rIns="0" tIns="73152" bIns="0">
             <a:spAutoFit/>
           </a:bodyPr>
           <a:lstStyle/>
           <a:p>
-            <a:pPr>
+            <a:pPr algn="ctr">
               <a:defRPr sz="1800" b="1">
                 <a:solidFill>
                   <a:srgbClr val="FFFFFF"/>
@@ -3317,7 +3309,7 @@
         <p:spPr>
           <a:xfrm>
             <a:off x="960120" y="6217920"/>
-            <a:ext cx="6858000" cy="457200"/>
+            <a:ext cx="5669280" cy="457200"/>
           </a:xfrm>
           <a:prstGeom prst="rect">
             <a:avLst/>
@@ -3325,13 +3317,13 @@
           <a:noFill/>
         </p:spPr>
         <p:txBody>
-          <a:bodyPr wrap="square">
+          <a:bodyPr wrap="none" lIns="0" tIns="73152">
             <a:spAutoFit/>
           </a:bodyPr>
           <a:lstStyle/>
           <a:p>
             <a:pPr>
-              <a:defRPr sz="1400" b="1">
+              <a:defRPr sz="1600" b="1">
                 <a:solidFill>
                   <a:srgbClr val="1C1C1C"/>
                 </a:solidFill>
@@ -3339,7 +3331,7 @@
               </a:defRPr>
             </a:pPr>
             <a:r>
-              <a:t>Mẫu Thiết kế Kiến trúc — Mô hình Bộ phản ứng (Reactor Pattern)</a:t>
+              <a:t>Mô phỏng trực quan — 4 Mô hình Tính toán</a:t>
             </a:r>
           </a:p>
         </p:txBody>
@@ -3361,13 +3353,13 @@
           <a:noFill/>
         </p:spPr>
         <p:txBody>
-          <a:bodyPr wrap="square" tIns="0" bIns="0">
+          <a:bodyPr wrap="none">
             <a:spAutoFit/>
           </a:bodyPr>
           <a:lstStyle/>
           <a:p>
             <a:pPr>
-              <a:defRPr sz="1850" b="1">
+              <a:defRPr sz="2100" b="1">
                 <a:solidFill>
                   <a:srgbClr val="1C1C1C"/>
                 </a:solidFill>
@@ -3375,21 +3367,54 @@
               </a:defRPr>
             </a:pPr>
             <a:r>
-              <a:t>Mẫu Thiết kế Reactor: Kiến trúc Xương sống của Vòng lặp Sự kiện</a:t>
-            </a:r>
-          </a:p>
-        </p:txBody>
-      </p:sp>
-      <p:sp>
-        <p:nvSpPr>
-          <p:cNvPr id="6" name="TextBox 5"/>
+              <a:t>➢ Mô phỏng trực quan: So sánh 4 mô hình tính toán</a:t>
+            </a:r>
+          </a:p>
+        </p:txBody>
+      </p:sp>
+      <p:pic>
+        <p:nvPicPr>
+          <p:cNvPr id="6" name="video_giai_thich_4_mo_hinh.mp4">
+            <a:hlinkClick r:id="" action="ppaction://media"/>
+          </p:cNvPr>
+          <p:cNvPicPr>
+            <a:picLocks noChangeAspect="1"/>
+          </p:cNvPicPr>
+          <p:nvPr>
+            <a:videoFile r:link="rId4"/>
+            <p:extLst>
+              <p:ext uri="{DAA4B4D4-6D71-4841-9C94-3DE7FCFB9230}">
+                <p14:media xmlns:p14="http://schemas.microsoft.com/office/powerpoint/2010/main" r:embed="rId3"/>
+              </p:ext>
+            </p:extLst>
+          </p:nvPr>
+        </p:nvPicPr>
+        <p:blipFill>
+          <a:blip r:embed="rId5"/>
+          <a:stretch>
+            <a:fillRect/>
+          </a:stretch>
+        </p:blipFill>
+        <p:spPr>
+          <a:xfrm>
+            <a:off x="365760" y="1783080"/>
+            <a:ext cx="5120640" cy="2926080"/>
+          </a:xfrm>
+          <a:prstGeom prst="rect">
+            <a:avLst/>
+          </a:prstGeom>
+        </p:spPr>
+      </p:pic>
+      <p:sp>
+        <p:nvSpPr>
+          <p:cNvPr id="7" name="TextBox 6"/>
           <p:cNvSpPr txBox="1"/>
           <p:nvPr/>
         </p:nvSpPr>
         <p:spPr>
           <a:xfrm>
-            <a:off x="365760" y="1828800"/>
-            <a:ext cx="4846320" cy="4114800"/>
+            <a:off x="5623560" y="1783080"/>
+            <a:ext cx="3154680" cy="3017520"/>
           </a:xfrm>
           <a:prstGeom prst="rect">
             <a:avLst/>
@@ -3406,23 +3431,23 @@
               <a:spcAft>
                 <a:spcPts val="600"/>
               </a:spcAft>
-              <a:defRPr sz="1300" b="1">
-                <a:solidFill>
-                  <a:srgbClr val="1C1C1C"/>
+              <a:defRPr sz="1400" b="1">
+                <a:solidFill>
+                  <a:srgbClr val="E04B3B"/>
                 </a:solidFill>
                 <a:latin typeface="Arial"/>
               </a:defRPr>
             </a:pPr>
             <a:r>
-              <a:t>• Định nghĩa chuẩn kiến trúc: Bộ phản ứng là mẫu thiết kế phục vụ việc tiếp nhận, phân tách và điều phối đồng thời các yêu cầu dịch vụ từ nhiều luồng dữ liệu vào.</a:t>
+              <a:t>Bản chất 4 mô hình qua mô phỏng:</a:t>
             </a:r>
           </a:p>
           <a:p>
             <a:pPr>
               <a:spcAft>
-                <a:spcPts val="800"/>
+                <a:spcPts val="500"/>
               </a:spcAft>
-              <a:defRPr sz="1250">
+              <a:defRPr sz="1150">
                 <a:solidFill>
                   <a:srgbClr val="1C1C1C"/>
                 </a:solidFill>
@@ -3430,15 +3455,15 @@
               </a:defRPr>
             </a:pPr>
             <a:r>
-              <a:t>• Bốn thành phần cốt lõi: Bộ định danh tài nguyên (Handles), Bộ phân kênh sự kiện đồng bộ, Bộ khởi tạo điều phối trung tâm và Các bộ xử lý sự kiện.</a:t>
+              <a:t>• Tuần tự: Tác vụ sau phải chờ tác vụ trước, vi xử lý bị nghẽn (Blocking), mất 6.0 giây.</a:t>
             </a:r>
           </a:p>
           <a:p>
             <a:pPr>
               <a:spcAft>
-                <a:spcPts val="800"/>
+                <a:spcPts val="500"/>
               </a:spcAft>
-              <a:defRPr sz="1250">
+              <a:defRPr sz="1150">
                 <a:solidFill>
                   <a:srgbClr val="1C1C1C"/>
                 </a:solidFill>
@@ -3446,15 +3471,15 @@
               </a:defRPr>
             </a:pPr>
             <a:r>
-              <a:t>• Ưu điểm kiến trúc: Quản lý hàng vạn kết nối đồng thời trên một luồng duy nhất mà không tốn chi phí khóa đồng bộ.</a:t>
+              <a:t>• Đồng thời: 1 CPU chia sẻ thời gian (Time-slicing), chuyển đổi linh hoạt giữa các tác vụ.</a:t>
             </a:r>
           </a:p>
           <a:p>
             <a:pPr>
               <a:spcAft>
-                <a:spcPts val="800"/>
+                <a:spcPts val="500"/>
               </a:spcAft>
-              <a:defRPr sz="1250">
+              <a:defRPr sz="1150">
                 <a:solidFill>
                   <a:srgbClr val="1C1C1C"/>
                 </a:solidFill>
@@ -3462,40 +3487,90 @@
               </a:defRPr>
             </a:pPr>
             <a:r>
-              <a:t>• Cơ sở thực thi: Đây chính là nguyên lý vận hành nền tảng của vòng lặp sự kiện trong thư viện asyncio của Python.</a:t>
-            </a:r>
-          </a:p>
-        </p:txBody>
-      </p:sp>
-      <p:pic>
-        <p:nvPicPr>
-          <p:cNvPr id="7" name="Picture 6" descr="JavaScript_Event_Loop.png"/>
-          <p:cNvPicPr>
-            <a:picLocks noChangeAspect="1"/>
-          </p:cNvPicPr>
+              <a:t>• Song song: 3 Core độc lập chạy cùng lúc, hoàn thành sớm gấp 3 lần (chỉ 2.0 giây).</a:t>
+            </a:r>
+          </a:p>
+          <a:p>
+            <a:pPr>
+              <a:spcAft>
+                <a:spcPts val="500"/>
+              </a:spcAft>
+              <a:defRPr sz="1150">
+                <a:solidFill>
+                  <a:srgbClr val="1C1C1C"/>
+                </a:solidFill>
+                <a:latin typeface="Arial"/>
+              </a:defRPr>
+            </a:pPr>
+            <a:r>
+              <a:t>• Bất đồng bộ: 1 Luồng + Event Loop, giải phóng CPU khi chờ I/O, hoàn thành nhanh (2.4 giây).</a:t>
+            </a:r>
+          </a:p>
+        </p:txBody>
+      </p:sp>
+      <p:sp>
+        <p:nvSpPr>
+          <p:cNvPr id="8" name="TextBox 7"/>
+          <p:cNvSpPr txBox="1"/>
           <p:nvPr/>
-        </p:nvPicPr>
-        <p:blipFill>
-          <a:blip r:embed="rId3"/>
-          <a:stretch>
-            <a:fillRect/>
-          </a:stretch>
-        </p:blipFill>
-        <p:spPr>
-          <a:xfrm>
-            <a:off x="5394960" y="1828800"/>
-            <a:ext cx="3474720" cy="3840480"/>
+        </p:nvSpPr>
+        <p:spPr>
+          <a:xfrm>
+            <a:off x="365760" y="4800600"/>
+            <a:ext cx="8412480" cy="1188720"/>
           </a:xfrm>
           <a:prstGeom prst="rect">
             <a:avLst/>
           </a:prstGeom>
-        </p:spPr>
-      </p:pic>
+          <a:noFill/>
+        </p:spPr>
+        <p:txBody>
+          <a:bodyPr wrap="square">
+            <a:spAutoFit/>
+          </a:bodyPr>
+          <a:lstStyle/>
+          <a:p>
+            <a:pPr>
+              <a:defRPr sz="1200" b="1">
+                <a:solidFill>
+                  <a:srgbClr val="1C1C1C"/>
+                </a:solidFill>
+                <a:latin typeface="Arial"/>
+              </a:defRPr>
+            </a:pPr>
+            <a:r>
+              <a:t>• Giá trị cốt lõi: Mô phỏng trực quan giúp người học nắm vững bản chất kỹ thuật và sự khác biệt về tốc độ thực thi giữa các mô hình trước khi bước sang thực hành lập trình trong Python.</a:t>
+            </a:r>
+          </a:p>
+        </p:txBody>
+      </p:sp>
     </p:spTree>
   </p:cSld>
   <p:clrMapOvr>
     <a:masterClrMapping/>
   </p:clrMapOvr>
+  <p:timing>
+    <p:tnLst>
+      <p:par>
+        <p:cTn id="1" dur="indefinite" restart="never" nodeType="tmRoot">
+          <p:childTnLst>
+            <p:video>
+              <p:cMediaNode vol="80000">
+                <p:cTn id="2" fill="hold" display="0">
+                  <p:stCondLst>
+                    <p:cond delay="indefinite"/>
+                  </p:stCondLst>
+                </p:cTn>
+                <p:tgtEl>
+                  <p:spTgt spid="6"/>
+                </p:tgtEl>
+              </p:cMediaNode>
+            </p:video>
+          </p:childTnLst>
+        </p:cTn>
+      </p:par>
+    </p:tnLst>
+  </p:timing>
 </p:sld>
 </file>
 
@@ -3541,8 +3616,8 @@
         </p:nvSpPr>
         <p:spPr>
           <a:xfrm>
-            <a:off x="182880" y="182880"/>
-            <a:ext cx="731520" cy="548640"/>
+            <a:off x="164592" y="6217920"/>
+            <a:ext cx="484632" cy="484632"/>
           </a:xfrm>
           <a:prstGeom prst="rect">
             <a:avLst/>
@@ -3550,12 +3625,12 @@
           <a:noFill/>
         </p:spPr>
         <p:txBody>
-          <a:bodyPr wrap="square">
+          <a:bodyPr wrap="none" lIns="0" rIns="0" tIns="73152" bIns="0">
             <a:spAutoFit/>
           </a:bodyPr>
           <a:lstStyle/>
           <a:p>
-            <a:pPr>
+            <a:pPr algn="ctr">
               <a:defRPr sz="1800" b="1">
                 <a:solidFill>
                   <a:srgbClr val="FFFFFF"/>
@@ -3578,7 +3653,7 @@
         <p:spPr>
           <a:xfrm>
             <a:off x="960120" y="6217920"/>
-            <a:ext cx="6858000" cy="457200"/>
+            <a:ext cx="5669280" cy="457200"/>
           </a:xfrm>
           <a:prstGeom prst="rect">
             <a:avLst/>
@@ -3586,13 +3661,13 @@
           <a:noFill/>
         </p:spPr>
         <p:txBody>
-          <a:bodyPr wrap="square">
+          <a:bodyPr wrap="none" lIns="0" tIns="73152">
             <a:spAutoFit/>
           </a:bodyPr>
           <a:lstStyle/>
           <a:p>
             <a:pPr>
-              <a:defRPr sz="1400" b="1">
+              <a:defRPr sz="1600" b="1">
                 <a:solidFill>
                   <a:srgbClr val="1C1C1C"/>
                 </a:solidFill>
@@ -3600,7 +3675,7 @@
               </a:defRPr>
             </a:pPr>
             <a:r>
-              <a:t>Chuẩn Ngôn ngữ Python — Đặc tả Hàm Đồng quy Tự nhiên (PEP 492)</a:t>
+              <a:t>Tổng kết Nền tảng &amp; Ma trận Đối chiếu</a:t>
             </a:r>
           </a:p>
         </p:txBody>
@@ -3622,13 +3697,13 @@
           <a:noFill/>
         </p:spPr>
         <p:txBody>
-          <a:bodyPr wrap="square" tIns="0" bIns="0">
+          <a:bodyPr wrap="none">
             <a:spAutoFit/>
           </a:bodyPr>
           <a:lstStyle/>
           <a:p>
             <a:pPr>
-              <a:defRPr sz="1850" b="1">
+              <a:defRPr sz="2100" b="1">
                 <a:solidFill>
                   <a:srgbClr val="1C1C1C"/>
                 </a:solidFill>
@@ -3636,1621 +3711,7 @@
               </a:defRPr>
             </a:pPr>
             <a:r>
-              <a:t>Đặc tả Chuẩn PEP 492: Hàm Đồng quy Tự nhiên và Cú pháp Async/Await</a:t>
-            </a:r>
-          </a:p>
-        </p:txBody>
-      </p:sp>
-      <p:sp>
-        <p:nvSpPr>
-          <p:cNvPr id="6" name="TextBox 5"/>
-          <p:cNvSpPr txBox="1"/>
-          <p:nvPr/>
-        </p:nvSpPr>
-        <p:spPr>
-          <a:xfrm>
-            <a:off x="365760" y="1828800"/>
-            <a:ext cx="4846320" cy="4114800"/>
-          </a:xfrm>
-          <a:prstGeom prst="rect">
-            <a:avLst/>
-          </a:prstGeom>
-          <a:noFill/>
-        </p:spPr>
-        <p:txBody>
-          <a:bodyPr wrap="square">
-            <a:spAutoFit/>
-          </a:bodyPr>
-          <a:lstStyle/>
-          <a:p>
-            <a:pPr>
-              <a:spcAft>
-                <a:spcPts val="600"/>
-              </a:spcAft>
-              <a:defRPr sz="1300" b="1">
-                <a:solidFill>
-                  <a:srgbClr val="1C1C1C"/>
-                </a:solidFill>
-                <a:latin typeface="Arial"/>
-              </a:defRPr>
-            </a:pPr>
-            <a:r>
-              <a:t>• Chuẩn hóa ngôn ngữ: Kể từ phiên bản 3.5, Python chính thức nâng cấp hàm đồng quy thành một khái niệm độc lập ở tầng cú pháp.</a:t>
-            </a:r>
-          </a:p>
-          <a:p>
-            <a:pPr>
-              <a:spcAft>
-                <a:spcPts val="800"/>
-              </a:spcAft>
-              <a:defRPr sz="1250">
-                <a:solidFill>
-                  <a:srgbClr val="1C1C1C"/>
-                </a:solidFill>
-                <a:latin typeface="Arial"/>
-              </a:defRPr>
-            </a:pPr>
-            <a:r>
-              <a:t>• Lập lịch hợp tác tự nguyện: Tác vụ chủ động tạm dừng tại vị trí khai báo await để nhường quyền kiểm soát vi xử lý cho vòng lặp.</a:t>
-            </a:r>
-          </a:p>
-          <a:p>
-            <a:pPr>
-              <a:spcAft>
-                <a:spcPts val="800"/>
-              </a:spcAft>
-              <a:defRPr sz="1250">
-                <a:solidFill>
-                  <a:srgbClr val="1C1C1C"/>
-                </a:solidFill>
-                <a:latin typeface="Arial"/>
-              </a:defRPr>
-            </a:pPr>
-            <a:r>
-              <a:t>• Cấu trúc siêu nhẹ: Hàng vạn hàm đồng quy có thể cùng chia sẻ một luồng duy nhất; mỗi hàm chỉ tiêu tốn khoảng vài kilobyte bộ nhớ.</a:t>
-            </a:r>
-          </a:p>
-          <a:p>
-            <a:pPr>
-              <a:spcAft>
-                <a:spcPts val="800"/>
-              </a:spcAft>
-              <a:defRPr sz="1250">
-                <a:solidFill>
-                  <a:srgbClr val="1C1C1C"/>
-                </a:solidFill>
-                <a:latin typeface="Arial"/>
-              </a:defRPr>
-            </a:pPr>
-            <a:r>
-              <a:t>• Bảo toàn trạng thái không gian người dùng: Khung ngăn xếp thực thi được lưu trữ trực tiếp trong bộ nhớ ứng dụng, cho phép phục hồi trạng thái tức thì.</a:t>
-            </a:r>
-          </a:p>
-        </p:txBody>
-      </p:sp>
-      <p:pic>
-        <p:nvPicPr>
-          <p:cNvPr id="7" name="Picture 6" descr="Coroutines.png"/>
-          <p:cNvPicPr>
-            <a:picLocks noChangeAspect="1"/>
-          </p:cNvPicPr>
-          <p:nvPr/>
-        </p:nvPicPr>
-        <p:blipFill>
-          <a:blip r:embed="rId3"/>
-          <a:stretch>
-            <a:fillRect/>
-          </a:stretch>
-        </p:blipFill>
-        <p:spPr>
-          <a:xfrm>
-            <a:off x="5394960" y="2011680"/>
-            <a:ext cx="3474720" cy="3474720"/>
-          </a:xfrm>
-          <a:prstGeom prst="rect">
-            <a:avLst/>
-          </a:prstGeom>
-        </p:spPr>
-      </p:pic>
-    </p:spTree>
-  </p:cSld>
-  <p:clrMapOvr>
-    <a:masterClrMapping/>
-  </p:clrMapOvr>
-</p:sld>
-</file>
-
-<file path=ppt/slides/slide12.xml><?xml version="1.0" encoding="utf-8"?>
-<p:sld xmlns:a="http://schemas.openxmlformats.org/drawingml/2006/main" xmlns:p="http://schemas.openxmlformats.org/presentationml/2006/main" xmlns:r="http://schemas.openxmlformats.org/officeDocument/2006/relationships">
-  <p:cSld>
-    <p:spTree>
-      <p:nvGrpSpPr>
-        <p:cNvPr id="1" name=""/>
-        <p:cNvGrpSpPr/>
-        <p:nvPr/>
-      </p:nvGrpSpPr>
-      <p:grpSpPr/>
-      <p:pic>
-        <p:nvPicPr>
-          <p:cNvPr id="2" name="Picture 1" descr="master_template_clean.png"/>
-          <p:cNvPicPr>
-            <a:picLocks noChangeAspect="1"/>
-          </p:cNvPicPr>
-          <p:nvPr/>
-        </p:nvPicPr>
-        <p:blipFill>
-          <a:blip r:embed="rId2"/>
-          <a:stretch>
-            <a:fillRect/>
-          </a:stretch>
-        </p:blipFill>
-        <p:spPr>
-          <a:xfrm>
-            <a:off x="0" y="0"/>
-            <a:ext cx="9144000" cy="6858000"/>
-          </a:xfrm>
-          <a:prstGeom prst="rect">
-            <a:avLst/>
-          </a:prstGeom>
-        </p:spPr>
-      </p:pic>
-      <p:sp>
-        <p:nvSpPr>
-          <p:cNvPr id="3" name="TextBox 2"/>
-          <p:cNvSpPr txBox="1"/>
-          <p:nvPr/>
-        </p:nvSpPr>
-        <p:spPr>
-          <a:xfrm>
-            <a:off x="182880" y="182880"/>
-            <a:ext cx="731520" cy="548640"/>
-          </a:xfrm>
-          <a:prstGeom prst="rect">
-            <a:avLst/>
-          </a:prstGeom>
-          <a:noFill/>
-        </p:spPr>
-        <p:txBody>
-          <a:bodyPr wrap="square">
-            <a:spAutoFit/>
-          </a:bodyPr>
-          <a:lstStyle/>
-          <a:p>
-            <a:pPr>
-              <a:defRPr sz="1800" b="1">
-                <a:solidFill>
-                  <a:srgbClr val="FFFFFF"/>
-                </a:solidFill>
-                <a:latin typeface="Arial"/>
-              </a:defRPr>
-            </a:pPr>
-            <a:r>
-              <a:t>12</a:t>
-            </a:r>
-          </a:p>
-        </p:txBody>
-      </p:sp>
-      <p:sp>
-        <p:nvSpPr>
-          <p:cNvPr id="4" name="TextBox 3"/>
-          <p:cNvSpPr txBox="1"/>
-          <p:nvPr/>
-        </p:nvSpPr>
-        <p:spPr>
-          <a:xfrm>
-            <a:off x="960120" y="6217920"/>
-            <a:ext cx="6858000" cy="457200"/>
-          </a:xfrm>
-          <a:prstGeom prst="rect">
-            <a:avLst/>
-          </a:prstGeom>
-          <a:noFill/>
-        </p:spPr>
-        <p:txBody>
-          <a:bodyPr wrap="square">
-            <a:spAutoFit/>
-          </a:bodyPr>
-          <a:lstStyle/>
-          <a:p>
-            <a:pPr>
-              <a:defRPr sz="1400" b="1">
-                <a:solidFill>
-                  <a:srgbClr val="1C1C1C"/>
-                </a:solidFill>
-                <a:latin typeface="Arial"/>
-              </a:defRPr>
-            </a:pPr>
-            <a:r>
-              <a:t>Lý thuyết Đồng thời — Hiện tượng Tranh chấp và Miền găng</a:t>
-            </a:r>
-          </a:p>
-        </p:txBody>
-      </p:sp>
-      <p:sp>
-        <p:nvSpPr>
-          <p:cNvPr id="5" name="TextBox 4"/>
-          <p:cNvSpPr txBox="1"/>
-          <p:nvPr/>
-        </p:nvSpPr>
-        <p:spPr>
-          <a:xfrm>
-            <a:off x="365760" y="1234440"/>
-            <a:ext cx="8412480" cy="502920"/>
-          </a:xfrm>
-          <a:prstGeom prst="rect">
-            <a:avLst/>
-          </a:prstGeom>
-          <a:noFill/>
-        </p:spPr>
-        <p:txBody>
-          <a:bodyPr wrap="square" tIns="0" bIns="0">
-            <a:spAutoFit/>
-          </a:bodyPr>
-          <a:lstStyle/>
-          <a:p>
-            <a:pPr>
-              <a:defRPr sz="1850" b="1">
-                <a:solidFill>
-                  <a:srgbClr val="1C1C1C"/>
-                </a:solidFill>
-                <a:latin typeface="Arial"/>
-              </a:defRPr>
-            </a:pPr>
-            <a:r>
-              <a:t>Hiện tượng Tranh chấp Dữ liệu và Các Hiểm họa Bộ nhớ Chia sẻ</a:t>
-            </a:r>
-          </a:p>
-        </p:txBody>
-      </p:sp>
-      <p:sp>
-        <p:nvSpPr>
-          <p:cNvPr id="6" name="TextBox 5"/>
-          <p:cNvSpPr txBox="1"/>
-          <p:nvPr/>
-        </p:nvSpPr>
-        <p:spPr>
-          <a:xfrm>
-            <a:off x="365760" y="1828800"/>
-            <a:ext cx="4846320" cy="4114800"/>
-          </a:xfrm>
-          <a:prstGeom prst="rect">
-            <a:avLst/>
-          </a:prstGeom>
-          <a:noFill/>
-        </p:spPr>
-        <p:txBody>
-          <a:bodyPr wrap="square">
-            <a:spAutoFit/>
-          </a:bodyPr>
-          <a:lstStyle/>
-          <a:p>
-            <a:pPr>
-              <a:spcAft>
-                <a:spcPts val="600"/>
-              </a:spcAft>
-              <a:defRPr sz="1300" b="1">
-                <a:solidFill>
-                  <a:srgbClr val="1C1C1C"/>
-                </a:solidFill>
-                <a:latin typeface="Arial"/>
-              </a:defRPr>
-            </a:pPr>
-            <a:r>
-              <a:t>• Định nghĩa hiện tượng tranh chấp: Xảy ra khi kết quả của chương trình phụ thuộc vào thứ tự thực thi ngẫu nhiên giữa các luồng.</a:t>
-            </a:r>
-          </a:p>
-          <a:p>
-            <a:pPr>
-              <a:spcAft>
-                <a:spcPts val="800"/>
-              </a:spcAft>
-              <a:defRPr sz="1250">
-                <a:solidFill>
-                  <a:srgbClr val="1C1C1C"/>
-                </a:solidFill>
-                <a:latin typeface="Arial"/>
-              </a:defRPr>
-            </a:pPr>
-            <a:r>
-              <a:t>• Xung đột truy cập dữ liệu: Xuất hiện khi nhiều luồng cùng thao tác trên một ô nhớ dùng chung và có ít nhất một thao tác ghi mà không có đồng bộ.</a:t>
-            </a:r>
-          </a:p>
-          <a:p>
-            <a:pPr>
-              <a:spcAft>
-                <a:spcPts val="800"/>
-              </a:spcAft>
-              <a:defRPr sz="1250">
-                <a:solidFill>
-                  <a:srgbClr val="1C1C1C"/>
-                </a:solidFill>
-                <a:latin typeface="Arial"/>
-              </a:defRPr>
-            </a:pPr>
-            <a:r>
-              <a:t>• Lỗi bất định phụ thuộc thời gian: Các sai lệch logic chỉ xuất hiện ngẫu nhiên khi hệ thống chịu tải cao và biến mất khi kích hoạt chế độ gỡ lỗi.</a:t>
-            </a:r>
-          </a:p>
-          <a:p>
-            <a:pPr>
-              <a:spcAft>
-                <a:spcPts val="800"/>
-              </a:spcAft>
-              <a:defRPr sz="1250">
-                <a:solidFill>
-                  <a:srgbClr val="1C1C1C"/>
-                </a:solidFill>
-                <a:latin typeface="Arial"/>
-              </a:defRPr>
-            </a:pPr>
-            <a:r>
-              <a:t>• Nguyên lý an toàn bộ nhớ: Hạn chế chia sẻ trạng thái bộ nhớ biến đổi; ưu tiên truyền thông điệp thông qua hàng đợi an toàn.</a:t>
-            </a:r>
-          </a:p>
-        </p:txBody>
-      </p:sp>
-      <p:pic>
-        <p:nvPicPr>
-          <p:cNvPr id="7" name="Picture 6" descr="Fork_join.png"/>
-          <p:cNvPicPr>
-            <a:picLocks noChangeAspect="1"/>
-          </p:cNvPicPr>
-          <p:nvPr/>
-        </p:nvPicPr>
-        <p:blipFill>
-          <a:blip r:embed="rId3"/>
-          <a:stretch>
-            <a:fillRect/>
-          </a:stretch>
-        </p:blipFill>
-        <p:spPr>
-          <a:xfrm>
-            <a:off x="5394960" y="2103120"/>
-            <a:ext cx="3474720" cy="3200400"/>
-          </a:xfrm>
-          <a:prstGeom prst="rect">
-            <a:avLst/>
-          </a:prstGeom>
-        </p:spPr>
-      </p:pic>
-    </p:spTree>
-  </p:cSld>
-  <p:clrMapOvr>
-    <a:masterClrMapping/>
-  </p:clrMapOvr>
-</p:sld>
-</file>
-
-<file path=ppt/slides/slide13.xml><?xml version="1.0" encoding="utf-8"?>
-<p:sld xmlns:a="http://schemas.openxmlformats.org/drawingml/2006/main" xmlns:p="http://schemas.openxmlformats.org/presentationml/2006/main" xmlns:r="http://schemas.openxmlformats.org/officeDocument/2006/relationships">
-  <p:cSld>
-    <p:spTree>
-      <p:nvGrpSpPr>
-        <p:cNvPr id="1" name=""/>
-        <p:cNvGrpSpPr/>
-        <p:nvPr/>
-      </p:nvGrpSpPr>
-      <p:grpSpPr/>
-      <p:pic>
-        <p:nvPicPr>
-          <p:cNvPr id="2" name="Picture 1" descr="master_template_clean.png"/>
-          <p:cNvPicPr>
-            <a:picLocks noChangeAspect="1"/>
-          </p:cNvPicPr>
-          <p:nvPr/>
-        </p:nvPicPr>
-        <p:blipFill>
-          <a:blip r:embed="rId2"/>
-          <a:stretch>
-            <a:fillRect/>
-          </a:stretch>
-        </p:blipFill>
-        <p:spPr>
-          <a:xfrm>
-            <a:off x="0" y="0"/>
-            <a:ext cx="9144000" cy="6858000"/>
-          </a:xfrm>
-          <a:prstGeom prst="rect">
-            <a:avLst/>
-          </a:prstGeom>
-        </p:spPr>
-      </p:pic>
-      <p:sp>
-        <p:nvSpPr>
-          <p:cNvPr id="3" name="TextBox 2"/>
-          <p:cNvSpPr txBox="1"/>
-          <p:nvPr/>
-        </p:nvSpPr>
-        <p:spPr>
-          <a:xfrm>
-            <a:off x="182880" y="182880"/>
-            <a:ext cx="731520" cy="548640"/>
-          </a:xfrm>
-          <a:prstGeom prst="rect">
-            <a:avLst/>
-          </a:prstGeom>
-          <a:noFill/>
-        </p:spPr>
-        <p:txBody>
-          <a:bodyPr wrap="square">
-            <a:spAutoFit/>
-          </a:bodyPr>
-          <a:lstStyle/>
-          <a:p>
-            <a:pPr>
-              <a:defRPr sz="1800" b="1">
-                <a:solidFill>
-                  <a:srgbClr val="FFFFFF"/>
-                </a:solidFill>
-                <a:latin typeface="Arial"/>
-              </a:defRPr>
-            </a:pPr>
-            <a:r>
-              <a:t>13</a:t>
-            </a:r>
-          </a:p>
-        </p:txBody>
-      </p:sp>
-      <p:sp>
-        <p:nvSpPr>
-          <p:cNvPr id="4" name="TextBox 3"/>
-          <p:cNvSpPr txBox="1"/>
-          <p:nvPr/>
-        </p:nvSpPr>
-        <p:spPr>
-          <a:xfrm>
-            <a:off x="960120" y="6217920"/>
-            <a:ext cx="6858000" cy="457200"/>
-          </a:xfrm>
-          <a:prstGeom prst="rect">
-            <a:avLst/>
-          </a:prstGeom>
-          <a:noFill/>
-        </p:spPr>
-        <p:txBody>
-          <a:bodyPr wrap="square">
-            <a:spAutoFit/>
-          </a:bodyPr>
-          <a:lstStyle/>
-          <a:p>
-            <a:pPr>
-              <a:defRPr sz="1400" b="1">
-                <a:solidFill>
-                  <a:srgbClr val="1C1C1C"/>
-                </a:solidFill>
-                <a:latin typeface="Arial"/>
-              </a:defRPr>
-            </a:pPr>
-            <a:r>
-              <a:t>Lý thuyết Tối ưu — Định luật Amdahl và Giới hạn Tăng tốc Song song</a:t>
-            </a:r>
-          </a:p>
-        </p:txBody>
-      </p:sp>
-      <p:sp>
-        <p:nvSpPr>
-          <p:cNvPr id="5" name="TextBox 4"/>
-          <p:cNvSpPr txBox="1"/>
-          <p:nvPr/>
-        </p:nvSpPr>
-        <p:spPr>
-          <a:xfrm>
-            <a:off x="365760" y="1234440"/>
-            <a:ext cx="8412480" cy="502920"/>
-          </a:xfrm>
-          <a:prstGeom prst="rect">
-            <a:avLst/>
-          </a:prstGeom>
-          <a:noFill/>
-        </p:spPr>
-        <p:txBody>
-          <a:bodyPr wrap="square" tIns="0" bIns="0">
-            <a:spAutoFit/>
-          </a:bodyPr>
-          <a:lstStyle/>
-          <a:p>
-            <a:pPr>
-              <a:defRPr sz="1850" b="1">
-                <a:solidFill>
-                  <a:srgbClr val="1C1C1C"/>
-                </a:solidFill>
-                <a:latin typeface="Arial"/>
-              </a:defRPr>
-            </a:pPr>
-            <a:r>
-              <a:t>Định luật Amdahl và Giới hạn Lý thuyết của Tăng tốc Song song</a:t>
-            </a:r>
-          </a:p>
-        </p:txBody>
-      </p:sp>
-      <p:sp>
-        <p:nvSpPr>
-          <p:cNvPr id="6" name="TextBox 5"/>
-          <p:cNvSpPr txBox="1"/>
-          <p:nvPr/>
-        </p:nvSpPr>
-        <p:spPr>
-          <a:xfrm>
-            <a:off x="365760" y="1828800"/>
-            <a:ext cx="4846320" cy="4114800"/>
-          </a:xfrm>
-          <a:prstGeom prst="rect">
-            <a:avLst/>
-          </a:prstGeom>
-          <a:noFill/>
-        </p:spPr>
-        <p:txBody>
-          <a:bodyPr wrap="square">
-            <a:spAutoFit/>
-          </a:bodyPr>
-          <a:lstStyle/>
-          <a:p>
-            <a:pPr>
-              <a:spcAft>
-                <a:spcPts val="600"/>
-              </a:spcAft>
-              <a:defRPr sz="1300" b="1">
-                <a:solidFill>
-                  <a:srgbClr val="1C1C1C"/>
-                </a:solidFill>
-                <a:latin typeface="Arial"/>
-              </a:defRPr>
-            </a:pPr>
-            <a:r>
-              <a:t>• Nội dung định luật: Hệ số tăng tốc tối đa của một chương trình song song bị giới hạn nghiêm ngặt bởi tỷ lệ phần mã bắt buộc phải chạy tuần tự.</a:t>
-            </a:r>
-          </a:p>
-          <a:p>
-            <a:pPr>
-              <a:spcAft>
-                <a:spcPts val="800"/>
-              </a:spcAft>
-              <a:defRPr sz="1250">
-                <a:solidFill>
-                  <a:srgbClr val="1C1C1C"/>
-                </a:solidFill>
-                <a:latin typeface="Arial"/>
-              </a:defRPr>
-            </a:pPr>
-            <a:r>
-              <a:t>• Công thức tính hệ số tăng tốc: S(N) = 1 / [ (1 - P) + (P / N) ], trong đó P là tỷ lệ mã có thể song song hóa, N là số bộ vi xử lý.</a:t>
-            </a:r>
-          </a:p>
-          <a:p>
-            <a:pPr>
-              <a:spcAft>
-                <a:spcPts val="800"/>
-              </a:spcAft>
-              <a:defRPr sz="1250">
-                <a:solidFill>
-                  <a:srgbClr val="1C1C1C"/>
-                </a:solidFill>
-                <a:latin typeface="Arial"/>
-              </a:defRPr>
-            </a:pPr>
-            <a:r>
-              <a:t>• Giới hạn trần tiệm cận: Khi số lượng bộ vi xử lý N tăng tới vô cực, hệ số tăng tốc tối đa chỉ đạt mức 1 / (1 - P).</a:t>
-            </a:r>
-          </a:p>
-          <a:p>
-            <a:pPr>
-              <a:spcAft>
-                <a:spcPts val="800"/>
-              </a:spcAft>
-              <a:defRPr sz="1250">
-                <a:solidFill>
-                  <a:srgbClr val="1C1C1C"/>
-                </a:solidFill>
-                <a:latin typeface="Arial"/>
-              </a:defRPr>
-            </a:pPr>
-            <a:r>
-              <a:t>• Hệ quả kỹ thuật: Nếu chỉ 10% khối lượng công việc mang tính tuần tự, hệ số tăng tốc tối đa sẽ không bao giờ vượt quá 10 lần, dù trang bị 1.000 vi xử lý.</a:t>
-            </a:r>
-          </a:p>
-        </p:txBody>
-      </p:sp>
-      <p:pic>
-        <p:nvPicPr>
-          <p:cNvPr id="7" name="Picture 6" descr="AmdahlsLaw.png"/>
-          <p:cNvPicPr>
-            <a:picLocks noChangeAspect="1"/>
-          </p:cNvPicPr>
-          <p:nvPr/>
-        </p:nvPicPr>
-        <p:blipFill>
-          <a:blip r:embed="rId3"/>
-          <a:stretch>
-            <a:fillRect/>
-          </a:stretch>
-        </p:blipFill>
-        <p:spPr>
-          <a:xfrm>
-            <a:off x="5394960" y="1828800"/>
-            <a:ext cx="3474720" cy="3931920"/>
-          </a:xfrm>
-          <a:prstGeom prst="rect">
-            <a:avLst/>
-          </a:prstGeom>
-        </p:spPr>
-      </p:pic>
-    </p:spTree>
-  </p:cSld>
-  <p:clrMapOvr>
-    <a:masterClrMapping/>
-  </p:clrMapOvr>
-</p:sld>
-</file>
-
-<file path=ppt/slides/slide14.xml><?xml version="1.0" encoding="utf-8"?>
-<p:sld xmlns:a="http://schemas.openxmlformats.org/drawingml/2006/main" xmlns:p="http://schemas.openxmlformats.org/presentationml/2006/main" xmlns:r="http://schemas.openxmlformats.org/officeDocument/2006/relationships">
-  <p:cSld>
-    <p:spTree>
-      <p:nvGrpSpPr>
-        <p:cNvPr id="1" name=""/>
-        <p:cNvGrpSpPr/>
-        <p:nvPr/>
-      </p:nvGrpSpPr>
-      <p:grpSpPr/>
-      <p:pic>
-        <p:nvPicPr>
-          <p:cNvPr id="2" name="Picture 1" descr="master_template_clean.png"/>
-          <p:cNvPicPr>
-            <a:picLocks noChangeAspect="1"/>
-          </p:cNvPicPr>
-          <p:nvPr/>
-        </p:nvPicPr>
-        <p:blipFill>
-          <a:blip r:embed="rId2"/>
-          <a:stretch>
-            <a:fillRect/>
-          </a:stretch>
-        </p:blipFill>
-        <p:spPr>
-          <a:xfrm>
-            <a:off x="0" y="0"/>
-            <a:ext cx="9144000" cy="6858000"/>
-          </a:xfrm>
-          <a:prstGeom prst="rect">
-            <a:avLst/>
-          </a:prstGeom>
-        </p:spPr>
-      </p:pic>
-      <p:sp>
-        <p:nvSpPr>
-          <p:cNvPr id="3" name="TextBox 2"/>
-          <p:cNvSpPr txBox="1"/>
-          <p:nvPr/>
-        </p:nvSpPr>
-        <p:spPr>
-          <a:xfrm>
-            <a:off x="182880" y="182880"/>
-            <a:ext cx="731520" cy="548640"/>
-          </a:xfrm>
-          <a:prstGeom prst="rect">
-            <a:avLst/>
-          </a:prstGeom>
-          <a:noFill/>
-        </p:spPr>
-        <p:txBody>
-          <a:bodyPr wrap="square">
-            <a:spAutoFit/>
-          </a:bodyPr>
-          <a:lstStyle/>
-          <a:p>
-            <a:pPr>
-              <a:defRPr sz="1800" b="1">
-                <a:solidFill>
-                  <a:srgbClr val="FFFFFF"/>
-                </a:solidFill>
-                <a:latin typeface="Arial"/>
-              </a:defRPr>
-            </a:pPr>
-            <a:r>
-              <a:t>14</a:t>
-            </a:r>
-          </a:p>
-        </p:txBody>
-      </p:sp>
-      <p:sp>
-        <p:nvSpPr>
-          <p:cNvPr id="4" name="TextBox 3"/>
-          <p:cNvSpPr txBox="1"/>
-          <p:nvPr/>
-        </p:nvSpPr>
-        <p:spPr>
-          <a:xfrm>
-            <a:off x="960120" y="6217920"/>
-            <a:ext cx="6858000" cy="457200"/>
-          </a:xfrm>
-          <a:prstGeom prst="rect">
-            <a:avLst/>
-          </a:prstGeom>
-          <a:noFill/>
-        </p:spPr>
-        <p:txBody>
-          <a:bodyPr wrap="square">
-            <a:spAutoFit/>
-          </a:bodyPr>
-          <a:lstStyle/>
-          <a:p>
-            <a:pPr>
-              <a:defRPr sz="1400" b="1">
-                <a:solidFill>
-                  <a:srgbClr val="1C1C1C"/>
-                </a:solidFill>
-                <a:latin typeface="Arial"/>
-              </a:defRPr>
-            </a:pPr>
-            <a:r>
-              <a:t>Kiến trúc Phần cứng — Phân cấp Bộ nhớ và Hiện tượng Chia sẻ Sai</a:t>
-            </a:r>
-          </a:p>
-        </p:txBody>
-      </p:sp>
-      <p:sp>
-        <p:nvSpPr>
-          <p:cNvPr id="5" name="TextBox 4"/>
-          <p:cNvSpPr txBox="1"/>
-          <p:nvPr/>
-        </p:nvSpPr>
-        <p:spPr>
-          <a:xfrm>
-            <a:off x="365760" y="1234440"/>
-            <a:ext cx="8412480" cy="502920"/>
-          </a:xfrm>
-          <a:prstGeom prst="rect">
-            <a:avLst/>
-          </a:prstGeom>
-          <a:noFill/>
-        </p:spPr>
-        <p:txBody>
-          <a:bodyPr wrap="square" tIns="0" bIns="0">
-            <a:spAutoFit/>
-          </a:bodyPr>
-          <a:lstStyle/>
-          <a:p>
-            <a:pPr>
-              <a:defRPr sz="1850" b="1">
-                <a:solidFill>
-                  <a:srgbClr val="1C1C1C"/>
-                </a:solidFill>
-                <a:latin typeface="Arial"/>
-              </a:defRPr>
-            </a:pPr>
-            <a:r>
-              <a:t>Cấu trúc Phân cấp Bộ nhớ và Hiện tượng Chia sẻ Sai trên Hệ Đa nhân</a:t>
-            </a:r>
-          </a:p>
-        </p:txBody>
-      </p:sp>
-      <p:sp>
-        <p:nvSpPr>
-          <p:cNvPr id="6" name="TextBox 5"/>
-          <p:cNvSpPr txBox="1"/>
-          <p:nvPr/>
-        </p:nvSpPr>
-        <p:spPr>
-          <a:xfrm>
-            <a:off x="365760" y="1783080"/>
-            <a:ext cx="8412480" cy="1463040"/>
-          </a:xfrm>
-          <a:prstGeom prst="rect">
-            <a:avLst/>
-          </a:prstGeom>
-          <a:noFill/>
-        </p:spPr>
-        <p:txBody>
-          <a:bodyPr wrap="square">
-            <a:spAutoFit/>
-          </a:bodyPr>
-          <a:lstStyle/>
-          <a:p>
-            <a:pPr>
-              <a:spcAft>
-                <a:spcPts val="400"/>
-              </a:spcAft>
-              <a:defRPr sz="1300" b="1">
-                <a:solidFill>
-                  <a:srgbClr val="1C1C1C"/>
-                </a:solidFill>
-                <a:latin typeface="Arial"/>
-              </a:defRPr>
-            </a:pPr>
-            <a:r>
-              <a:t>• Nút thắt truy xuất bộ nhớ: Tốc độ truy xuất dữ liệu từ bộ nhớ chính là yếu tố chi phối trực tiếp đến hiệu năng thực tế của các ứng dụng tính toán song song.</a:t>
-            </a:r>
-          </a:p>
-          <a:p>
-            <a:pPr>
-              <a:spcAft>
-                <a:spcPts val="400"/>
-              </a:spcAft>
-              <a:defRPr sz="1250">
-                <a:solidFill>
-                  <a:srgbClr val="1C1C1C"/>
-                </a:solidFill>
-                <a:latin typeface="Arial"/>
-              </a:defRPr>
-            </a:pPr>
-            <a:r>
-              <a:t>• Hiện tượng chia sẻ sai: Xảy ra khi các nhân vi xử lý khác nhau cập nhật các biến độc lập nhưng vô tình nằm chung trên một dòng bộ đệm ẩn (Cache Line 64 byte), làm vô hiệu hóa bộ đệm liên tục.</a:t>
-            </a:r>
-          </a:p>
-          <a:p>
-            <a:pPr>
-              <a:spcAft>
-                <a:spcPts val="400"/>
-              </a:spcAft>
-              <a:defRPr sz="1250">
-                <a:solidFill>
-                  <a:srgbClr val="1C1C1C"/>
-                </a:solidFill>
-                <a:latin typeface="Arial"/>
-              </a:defRPr>
-            </a:pPr>
-            <a:r>
-              <a:t>• Hậu quả: Tăng quá nhiều đơn vị thực thi vượt ngưỡng dung nạp sẽ làm suy giảm hiệu năng do tắc nghẽn đường truyền bộ nhớ.</a:t>
-            </a:r>
-          </a:p>
-        </p:txBody>
-      </p:sp>
-      <p:graphicFrame>
-        <p:nvGraphicFramePr>
-          <p:cNvPr id="7" name="Table 6"/>
-          <p:cNvGraphicFramePr>
-            <a:graphicFrameLocks noGrp="1"/>
-          </p:cNvGraphicFramePr>
-          <p:nvPr/>
-        </p:nvGraphicFramePr>
-        <p:xfrm>
-          <a:off x="365760" y="3383280"/>
-          <a:ext cx="8412480" cy="2377440"/>
-        </p:xfrm>
-        <a:graphic>
-          <a:graphicData uri="http://schemas.openxmlformats.org/drawingml/2006/table">
-            <a:tbl>
-              <a:tblPr firstRow="1" bandRow="1">
-                <a:tableStyleId>{5C22544A-7EE6-4342-B048-85BDC9FD1C3A}</a:tableStyleId>
-              </a:tblPr>
-              <a:tblGrid>
-                <a:gridCol w="2926080"/>
-                <a:gridCol w="2286000"/>
-                <a:gridCol w="3200400"/>
-              </a:tblGrid>
-              <a:tr h="475488">
-                <a:tc>
-                  <a:txBody>
-                    <a:bodyPr/>
-                    <a:lstStyle/>
-                    <a:p>
-                      <a:pPr>
-                        <a:defRPr sz="1300" b="1">
-                          <a:solidFill>
-                            <a:srgbClr val="FFFFFF"/>
-                          </a:solidFill>
-                          <a:latin typeface="Arial"/>
-                        </a:defRPr>
-                      </a:pPr>
-                      <a:r>
-                        <a:t>Cấp bậc Bộ nhớ</a:t>
-                      </a:r>
-                    </a:p>
-                  </a:txBody>
-                  <a:tcPr>
-                    <a:solidFill>
-                      <a:srgbClr val="E74C3C"/>
-                    </a:solidFill>
-                  </a:tcPr>
-                </a:tc>
-                <a:tc>
-                  <a:txBody>
-                    <a:bodyPr/>
-                    <a:lstStyle/>
-                    <a:p>
-                      <a:pPr>
-                        <a:defRPr sz="1300" b="1">
-                          <a:solidFill>
-                            <a:srgbClr val="FFFFFF"/>
-                          </a:solidFill>
-                          <a:latin typeface="Arial"/>
-                        </a:defRPr>
-                      </a:pPr>
-                      <a:r>
-                        <a:t>Độ trễ Chu kỳ Vi xử lý</a:t>
-                      </a:r>
-                    </a:p>
-                  </a:txBody>
-                  <a:tcPr>
-                    <a:solidFill>
-                      <a:srgbClr val="E74C3C"/>
-                    </a:solidFill>
-                  </a:tcPr>
-                </a:tc>
-                <a:tc>
-                  <a:txBody>
-                    <a:bodyPr/>
-                    <a:lstStyle/>
-                    <a:p>
-                      <a:pPr>
-                        <a:defRPr sz="1300" b="1">
-                          <a:solidFill>
-                            <a:srgbClr val="FFFFFF"/>
-                          </a:solidFill>
-                          <a:latin typeface="Arial"/>
-                        </a:defRPr>
-                      </a:pPr>
-                      <a:r>
-                        <a:t>Băng thông Dữ liệu</a:t>
-                      </a:r>
-                    </a:p>
-                  </a:txBody>
-                  <a:tcPr>
-                    <a:solidFill>
-                      <a:srgbClr val="E74C3C"/>
-                    </a:solidFill>
-                  </a:tcPr>
-                </a:tc>
-              </a:tr>
-              <a:tr h="475488">
-                <a:tc>
-                  <a:txBody>
-                    <a:bodyPr/>
-                    <a:lstStyle/>
-                    <a:p>
-                      <a:pPr>
-                        <a:defRPr sz="1200">
-                          <a:solidFill>
-                            <a:srgbClr val="1C1C1C"/>
-                          </a:solidFill>
-                          <a:latin typeface="Arial"/>
-                        </a:defRPr>
-                      </a:pPr>
-                      <a:r>
-                        <a:t>Bộ đệm Cấp 1 (L1 Cache)</a:t>
-                      </a:r>
-                    </a:p>
-                  </a:txBody>
-                  <a:tcPr/>
-                </a:tc>
-                <a:tc>
-                  <a:txBody>
-                    <a:bodyPr/>
-                    <a:lstStyle/>
-                    <a:p>
-                      <a:pPr>
-                        <a:defRPr sz="1200">
-                          <a:solidFill>
-                            <a:srgbClr val="1C1C1C"/>
-                          </a:solidFill>
-                          <a:latin typeface="Arial"/>
-                        </a:defRPr>
-                      </a:pPr>
-                      <a:r>
-                        <a:t>3 - 4 chu kỳ (~1 ns)</a:t>
-                      </a:r>
-                    </a:p>
-                  </a:txBody>
-                  <a:tcPr/>
-                </a:tc>
-                <a:tc>
-                  <a:txBody>
-                    <a:bodyPr/>
-                    <a:lstStyle/>
-                    <a:p>
-                      <a:pPr>
-                        <a:defRPr sz="1200">
-                          <a:solidFill>
-                            <a:srgbClr val="1C1C1C"/>
-                          </a:solidFill>
-                          <a:latin typeface="Arial"/>
-                        </a:defRPr>
-                      </a:pPr>
-                      <a:r>
-                        <a:t>~1.000 GB/giây (Siêu tốc độ)</a:t>
-                      </a:r>
-                    </a:p>
-                  </a:txBody>
-                  <a:tcPr/>
-                </a:tc>
-              </a:tr>
-              <a:tr h="475488">
-                <a:tc>
-                  <a:txBody>
-                    <a:bodyPr/>
-                    <a:lstStyle/>
-                    <a:p>
-                      <a:pPr>
-                        <a:defRPr sz="1200">
-                          <a:solidFill>
-                            <a:srgbClr val="1C1C1C"/>
-                          </a:solidFill>
-                          <a:latin typeface="Arial"/>
-                        </a:defRPr>
-                      </a:pPr>
-                      <a:r>
-                        <a:t>Bộ đệm Cấp 2 (L2 Cache)</a:t>
-                      </a:r>
-                    </a:p>
-                  </a:txBody>
-                  <a:tcPr/>
-                </a:tc>
-                <a:tc>
-                  <a:txBody>
-                    <a:bodyPr/>
-                    <a:lstStyle/>
-                    <a:p>
-                      <a:pPr>
-                        <a:defRPr sz="1200">
-                          <a:solidFill>
-                            <a:srgbClr val="1C1C1C"/>
-                          </a:solidFill>
-                          <a:latin typeface="Arial"/>
-                        </a:defRPr>
-                      </a:pPr>
-                      <a:r>
-                        <a:t>10 - 12 chu kỳ (~3 ns)</a:t>
-                      </a:r>
-                    </a:p>
-                  </a:txBody>
-                  <a:tcPr/>
-                </a:tc>
-                <a:tc>
-                  <a:txBody>
-                    <a:bodyPr/>
-                    <a:lstStyle/>
-                    <a:p>
-                      <a:pPr>
-                        <a:defRPr sz="1200">
-                          <a:solidFill>
-                            <a:srgbClr val="1C1C1C"/>
-                          </a:solidFill>
-                          <a:latin typeface="Arial"/>
-                        </a:defRPr>
-                      </a:pPr>
-                      <a:r>
-                        <a:t>~500 GB/giây</a:t>
-                      </a:r>
-                    </a:p>
-                  </a:txBody>
-                  <a:tcPr/>
-                </a:tc>
-              </a:tr>
-              <a:tr h="475488">
-                <a:tc>
-                  <a:txBody>
-                    <a:bodyPr/>
-                    <a:lstStyle/>
-                    <a:p>
-                      <a:pPr>
-                        <a:defRPr sz="1200">
-                          <a:solidFill>
-                            <a:srgbClr val="1C1C1C"/>
-                          </a:solidFill>
-                          <a:latin typeface="Arial"/>
-                        </a:defRPr>
-                      </a:pPr>
-                      <a:r>
-                        <a:t>Bộ đệm Dùng chung Cấp 3 (L3 Cache)</a:t>
-                      </a:r>
-                    </a:p>
-                  </a:txBody>
-                  <a:tcPr/>
-                </a:tc>
-                <a:tc>
-                  <a:txBody>
-                    <a:bodyPr/>
-                    <a:lstStyle/>
-                    <a:p>
-                      <a:pPr>
-                        <a:defRPr sz="1200">
-                          <a:solidFill>
-                            <a:srgbClr val="1C1C1C"/>
-                          </a:solidFill>
-                          <a:latin typeface="Arial"/>
-                        </a:defRPr>
-                      </a:pPr>
-                      <a:r>
-                        <a:t>30 - 40 chu kỳ (~12 ns)</a:t>
-                      </a:r>
-                    </a:p>
-                  </a:txBody>
-                  <a:tcPr/>
-                </a:tc>
-                <a:tc>
-                  <a:txBody>
-                    <a:bodyPr/>
-                    <a:lstStyle/>
-                    <a:p>
-                      <a:pPr>
-                        <a:defRPr sz="1200">
-                          <a:solidFill>
-                            <a:srgbClr val="1C1C1C"/>
-                          </a:solidFill>
-                          <a:latin typeface="Arial"/>
-                        </a:defRPr>
-                      </a:pPr>
-                      <a:r>
-                        <a:t>~200 GB/giây</a:t>
-                      </a:r>
-                    </a:p>
-                  </a:txBody>
-                  <a:tcPr/>
-                </a:tc>
-              </a:tr>
-              <a:tr h="475488">
-                <a:tc>
-                  <a:txBody>
-                    <a:bodyPr/>
-                    <a:lstStyle/>
-                    <a:p>
-                      <a:pPr>
-                        <a:defRPr sz="1200">
-                          <a:solidFill>
-                            <a:srgbClr val="1C1C1C"/>
-                          </a:solidFill>
-                          <a:latin typeface="Arial"/>
-                        </a:defRPr>
-                      </a:pPr>
-                      <a:r>
-                        <a:t>Bộ nhớ Chính (Main DRAM)</a:t>
-                      </a:r>
-                    </a:p>
-                  </a:txBody>
-                  <a:tcPr/>
-                </a:tc>
-                <a:tc>
-                  <a:txBody>
-                    <a:bodyPr/>
-                    <a:lstStyle/>
-                    <a:p>
-                      <a:pPr>
-                        <a:defRPr sz="1200">
-                          <a:solidFill>
-                            <a:srgbClr val="1C1C1C"/>
-                          </a:solidFill>
-                          <a:latin typeface="Arial"/>
-                        </a:defRPr>
-                      </a:pPr>
-                      <a:r>
-                        <a:t>150 - 250 chu kỳ (~70 ns)</a:t>
-                      </a:r>
-                    </a:p>
-                  </a:txBody>
-                  <a:tcPr/>
-                </a:tc>
-                <a:tc>
-                  <a:txBody>
-                    <a:bodyPr/>
-                    <a:lstStyle/>
-                    <a:p>
-                      <a:pPr>
-                        <a:defRPr sz="1200">
-                          <a:solidFill>
-                            <a:srgbClr val="1C1C1C"/>
-                          </a:solidFill>
-                          <a:latin typeface="Arial"/>
-                        </a:defRPr>
-                      </a:pPr>
-                      <a:r>
-                        <a:t>~30 - 50 GB/giây (Nút thắt cổ chai)</a:t>
-                      </a:r>
-                    </a:p>
-                  </a:txBody>
-                  <a:tcPr/>
-                </a:tc>
-              </a:tr>
-            </a:tbl>
-          </a:graphicData>
-        </a:graphic>
-      </p:graphicFrame>
-    </p:spTree>
-  </p:cSld>
-  <p:clrMapOvr>
-    <a:masterClrMapping/>
-  </p:clrMapOvr>
-</p:sld>
-</file>
-
-<file path=ppt/slides/slide15.xml><?xml version="1.0" encoding="utf-8"?>
-<p:sld xmlns:a="http://schemas.openxmlformats.org/drawingml/2006/main" xmlns:p="http://schemas.openxmlformats.org/presentationml/2006/main" xmlns:r="http://schemas.openxmlformats.org/officeDocument/2006/relationships">
-  <p:cSld>
-    <p:spTree>
-      <p:nvGrpSpPr>
-        <p:cNvPr id="1" name=""/>
-        <p:cNvGrpSpPr/>
-        <p:nvPr/>
-      </p:nvGrpSpPr>
-      <p:grpSpPr/>
-      <p:pic>
-        <p:nvPicPr>
-          <p:cNvPr id="2" name="Picture 1" descr="master_template_clean.png"/>
-          <p:cNvPicPr>
-            <a:picLocks noChangeAspect="1"/>
-          </p:cNvPicPr>
-          <p:nvPr/>
-        </p:nvPicPr>
-        <p:blipFill>
-          <a:blip r:embed="rId2"/>
-          <a:stretch>
-            <a:fillRect/>
-          </a:stretch>
-        </p:blipFill>
-        <p:spPr>
-          <a:xfrm>
-            <a:off x="0" y="0"/>
-            <a:ext cx="9144000" cy="6858000"/>
-          </a:xfrm>
-          <a:prstGeom prst="rect">
-            <a:avLst/>
-          </a:prstGeom>
-        </p:spPr>
-      </p:pic>
-      <p:sp>
-        <p:nvSpPr>
-          <p:cNvPr id="3" name="TextBox 2"/>
-          <p:cNvSpPr txBox="1"/>
-          <p:nvPr/>
-        </p:nvSpPr>
-        <p:spPr>
-          <a:xfrm>
-            <a:off x="182880" y="182880"/>
-            <a:ext cx="731520" cy="548640"/>
-          </a:xfrm>
-          <a:prstGeom prst="rect">
-            <a:avLst/>
-          </a:prstGeom>
-          <a:noFill/>
-        </p:spPr>
-        <p:txBody>
-          <a:bodyPr wrap="square">
-            <a:spAutoFit/>
-          </a:bodyPr>
-          <a:lstStyle/>
-          <a:p>
-            <a:pPr>
-              <a:defRPr sz="1800" b="1">
-                <a:solidFill>
-                  <a:srgbClr val="FFFFFF"/>
-                </a:solidFill>
-                <a:latin typeface="Arial"/>
-              </a:defRPr>
-            </a:pPr>
-            <a:r>
-              <a:t>15</a:t>
-            </a:r>
-          </a:p>
-        </p:txBody>
-      </p:sp>
-      <p:sp>
-        <p:nvSpPr>
-          <p:cNvPr id="4" name="TextBox 3"/>
-          <p:cNvSpPr txBox="1"/>
-          <p:nvPr/>
-        </p:nvSpPr>
-        <p:spPr>
-          <a:xfrm>
-            <a:off x="960120" y="6217920"/>
-            <a:ext cx="6858000" cy="457200"/>
-          </a:xfrm>
-          <a:prstGeom prst="rect">
-            <a:avLst/>
-          </a:prstGeom>
-          <a:noFill/>
-        </p:spPr>
-        <p:txBody>
-          <a:bodyPr wrap="square">
-            <a:spAutoFit/>
-          </a:bodyPr>
-          <a:lstStyle/>
-          <a:p>
-            <a:pPr>
-              <a:defRPr sz="1400" b="1">
-                <a:solidFill>
-                  <a:srgbClr val="1C1C1C"/>
-                </a:solidFill>
-                <a:latin typeface="Arial"/>
-              </a:defRPr>
-            </a:pPr>
-            <a:r>
-              <a:t>Mô hình hóa Trạng thái — Thuộc tính An toàn và Hoạt tính</a:t>
-            </a:r>
-          </a:p>
-        </p:txBody>
-      </p:sp>
-      <p:sp>
-        <p:nvSpPr>
-          <p:cNvPr id="5" name="TextBox 4"/>
-          <p:cNvSpPr txBox="1"/>
-          <p:nvPr/>
-        </p:nvSpPr>
-        <p:spPr>
-          <a:xfrm>
-            <a:off x="365760" y="1234440"/>
-            <a:ext cx="8412480" cy="502920"/>
-          </a:xfrm>
-          <a:prstGeom prst="rect">
-            <a:avLst/>
-          </a:prstGeom>
-          <a:noFill/>
-        </p:spPr>
-        <p:txBody>
-          <a:bodyPr wrap="square" tIns="0" bIns="0">
-            <a:spAutoFit/>
-          </a:bodyPr>
-          <a:lstStyle/>
-          <a:p>
-            <a:pPr>
-              <a:defRPr sz="1850" b="1">
-                <a:solidFill>
-                  <a:srgbClr val="1C1C1C"/>
-                </a:solidFill>
-                <a:latin typeface="Arial"/>
-              </a:defRPr>
-            </a:pPr>
-            <a:r>
-              <a:t>Mô hình hóa Trạng thái: Thuộc tính An toàn và Thuộc tính Hoạt tính</a:t>
-            </a:r>
-          </a:p>
-        </p:txBody>
-      </p:sp>
-      <p:sp>
-        <p:nvSpPr>
-          <p:cNvPr id="6" name="TextBox 5"/>
-          <p:cNvSpPr txBox="1"/>
-          <p:nvPr/>
-        </p:nvSpPr>
-        <p:spPr>
-          <a:xfrm>
-            <a:off x="365760" y="1828800"/>
-            <a:ext cx="4846320" cy="4114800"/>
-          </a:xfrm>
-          <a:prstGeom prst="rect">
-            <a:avLst/>
-          </a:prstGeom>
-          <a:noFill/>
-        </p:spPr>
-        <p:txBody>
-          <a:bodyPr wrap="square">
-            <a:spAutoFit/>
-          </a:bodyPr>
-          <a:lstStyle/>
-          <a:p>
-            <a:pPr>
-              <a:spcAft>
-                <a:spcPts val="600"/>
-              </a:spcAft>
-              <a:defRPr sz="1300" b="1">
-                <a:solidFill>
-                  <a:srgbClr val="1C1C1C"/>
-                </a:solidFill>
-                <a:latin typeface="Arial"/>
-              </a:defRPr>
-            </a:pPr>
-            <a:r>
-              <a:t>• Bản chất của mô hình đồng thời: Quản lý và kiểm soát sự tương tác phức tạp giữa các luồng thực thi độc lập diễn ra trong cùng một không gian trạng thái.</a:t>
-            </a:r>
-          </a:p>
-          <a:p>
-            <a:pPr>
-              <a:spcAft>
-                <a:spcPts val="800"/>
-              </a:spcAft>
-              <a:defRPr sz="1250">
-                <a:solidFill>
-                  <a:srgbClr val="1C1C1C"/>
-                </a:solidFill>
-                <a:latin typeface="Arial"/>
-              </a:defRPr>
-            </a:pPr>
-            <a:r>
-              <a:t>• Thuộc tính An toàn (Safety): Đảm bảo không có trạng thái sai lệch nào xảy ra trong suốt quá trình vận hành; bảo vệ hệ thống khỏi bế tắc tài nguyên (Deadlock) hay sai lệch dữ liệu.</a:t>
-            </a:r>
-          </a:p>
-          <a:p>
-            <a:pPr>
-              <a:spcAft>
-                <a:spcPts val="800"/>
-              </a:spcAft>
-              <a:defRPr sz="1250">
-                <a:solidFill>
-                  <a:srgbClr val="1C1C1C"/>
-                </a:solidFill>
-                <a:latin typeface="Arial"/>
-              </a:defRPr>
-            </a:pPr>
-            <a:r>
-              <a:t>• Thuộc tính Hoạt tính (Liveness): Đảm bảo các trạng thái mong muốn cuối cùng sẽ diễn ra; ngăn chặn hiện tượng một tiến trình bị bỏ đói tài nguyên vĩnh viễn (Starvation).</a:t>
-            </a:r>
-          </a:p>
-          <a:p>
-            <a:pPr>
-              <a:spcAft>
-                <a:spcPts val="800"/>
-              </a:spcAft>
-              <a:defRPr sz="1250">
-                <a:solidFill>
-                  <a:srgbClr val="1C1C1C"/>
-                </a:solidFill>
-                <a:latin typeface="Arial"/>
-              </a:defRPr>
-            </a:pPr>
-            <a:r>
-              <a:t>• Giá trị học thuật: Thiết lập cơ sở lý thuyết toán học vững chắc để thẩm định và chứng minh tính đúng đắn của các giải thuật đồng thời và phân tán.</a:t>
-            </a:r>
-          </a:p>
-        </p:txBody>
-      </p:sp>
-      <p:pic>
-        <p:nvPicPr>
-          <p:cNvPr id="7" name="Picture 6" descr="Process_states.png"/>
-          <p:cNvPicPr>
-            <a:picLocks noChangeAspect="1"/>
-          </p:cNvPicPr>
-          <p:nvPr/>
-        </p:nvPicPr>
-        <p:blipFill>
-          <a:blip r:embed="rId3"/>
-          <a:stretch>
-            <a:fillRect/>
-          </a:stretch>
-        </p:blipFill>
-        <p:spPr>
-          <a:xfrm>
-            <a:off x="5394960" y="1828800"/>
-            <a:ext cx="3383280" cy="4114800"/>
-          </a:xfrm>
-          <a:prstGeom prst="rect">
-            <a:avLst/>
-          </a:prstGeom>
-        </p:spPr>
-      </p:pic>
-    </p:spTree>
-  </p:cSld>
-  <p:clrMapOvr>
-    <a:masterClrMapping/>
-  </p:clrMapOvr>
-</p:sld>
-</file>
-
-<file path=ppt/slides/slide16.xml><?xml version="1.0" encoding="utf-8"?>
-<p:sld xmlns:a="http://schemas.openxmlformats.org/drawingml/2006/main" xmlns:p="http://schemas.openxmlformats.org/presentationml/2006/main" xmlns:r="http://schemas.openxmlformats.org/officeDocument/2006/relationships">
-  <p:cSld>
-    <p:spTree>
-      <p:nvGrpSpPr>
-        <p:cNvPr id="1" name=""/>
-        <p:cNvGrpSpPr/>
-        <p:nvPr/>
-      </p:nvGrpSpPr>
-      <p:grpSpPr/>
-      <p:pic>
-        <p:nvPicPr>
-          <p:cNvPr id="2" name="Picture 1" descr="master_template_clean.png"/>
-          <p:cNvPicPr>
-            <a:picLocks noChangeAspect="1"/>
-          </p:cNvPicPr>
-          <p:nvPr/>
-        </p:nvPicPr>
-        <p:blipFill>
-          <a:blip r:embed="rId2"/>
-          <a:stretch>
-            <a:fillRect/>
-          </a:stretch>
-        </p:blipFill>
-        <p:spPr>
-          <a:xfrm>
-            <a:off x="0" y="0"/>
-            <a:ext cx="9144000" cy="6858000"/>
-          </a:xfrm>
-          <a:prstGeom prst="rect">
-            <a:avLst/>
-          </a:prstGeom>
-        </p:spPr>
-      </p:pic>
-      <p:sp>
-        <p:nvSpPr>
-          <p:cNvPr id="3" name="TextBox 2"/>
-          <p:cNvSpPr txBox="1"/>
-          <p:nvPr/>
-        </p:nvSpPr>
-        <p:spPr>
-          <a:xfrm>
-            <a:off x="182880" y="182880"/>
-            <a:ext cx="731520" cy="548640"/>
-          </a:xfrm>
-          <a:prstGeom prst="rect">
-            <a:avLst/>
-          </a:prstGeom>
-          <a:noFill/>
-        </p:spPr>
-        <p:txBody>
-          <a:bodyPr wrap="square">
-            <a:spAutoFit/>
-          </a:bodyPr>
-          <a:lstStyle/>
-          <a:p>
-            <a:pPr>
-              <a:defRPr sz="1800" b="1">
-                <a:solidFill>
-                  <a:srgbClr val="FFFFFF"/>
-                </a:solidFill>
-                <a:latin typeface="Arial"/>
-              </a:defRPr>
-            </a:pPr>
-            <a:r>
-              <a:t>16</a:t>
-            </a:r>
-          </a:p>
-        </p:txBody>
-      </p:sp>
-      <p:sp>
-        <p:nvSpPr>
-          <p:cNvPr id="4" name="TextBox 3"/>
-          <p:cNvSpPr txBox="1"/>
-          <p:nvPr/>
-        </p:nvSpPr>
-        <p:spPr>
-          <a:xfrm>
-            <a:off x="960120" y="6217920"/>
-            <a:ext cx="6858000" cy="457200"/>
-          </a:xfrm>
-          <a:prstGeom prst="rect">
-            <a:avLst/>
-          </a:prstGeom>
-          <a:noFill/>
-        </p:spPr>
-        <p:txBody>
-          <a:bodyPr wrap="square">
-            <a:spAutoFit/>
-          </a:bodyPr>
-          <a:lstStyle/>
-          <a:p>
-            <a:pPr>
-              <a:defRPr sz="1400" b="1">
-                <a:solidFill>
-                  <a:srgbClr val="1C1C1C"/>
-                </a:solidFill>
-                <a:latin typeface="Arial"/>
-              </a:defRPr>
-            </a:pPr>
-            <a:r>
-              <a:t>So sánh Đơn vị Thực thi — Tiến trình, Luồng và Hàm đồng quy</a:t>
-            </a:r>
-          </a:p>
-        </p:txBody>
-      </p:sp>
-      <p:sp>
-        <p:nvSpPr>
-          <p:cNvPr id="5" name="TextBox 4"/>
-          <p:cNvSpPr txBox="1"/>
-          <p:nvPr/>
-        </p:nvSpPr>
-        <p:spPr>
-          <a:xfrm>
-            <a:off x="365760" y="1234440"/>
-            <a:ext cx="8412480" cy="502920"/>
-          </a:xfrm>
-          <a:prstGeom prst="rect">
-            <a:avLst/>
-          </a:prstGeom>
-          <a:noFill/>
-        </p:spPr>
-        <p:txBody>
-          <a:bodyPr wrap="square" tIns="0" bIns="0">
-            <a:spAutoFit/>
-          </a:bodyPr>
-          <a:lstStyle/>
-          <a:p>
-            <a:pPr>
-              <a:defRPr sz="1750" b="1">
-                <a:solidFill>
-                  <a:srgbClr val="1C1C1C"/>
-                </a:solidFill>
-                <a:latin typeface="Arial"/>
-              </a:defRPr>
-            </a:pPr>
-            <a:r>
-              <a:t>Bảng Đối chiếu Đặc tính Kỹ thuật: Tiến trình • Luồng • Hàm đồng quy</a:t>
+              <a:t>➢ Ma trận đối chiếu 4 mô hình tính toán nền tảng</a:t>
             </a:r>
           </a:p>
         </p:txBody>
@@ -5265,1103 +3726,7 @@
         </p:nvGraphicFramePr>
         <p:xfrm>
           <a:off x="365760" y="1874519"/>
-          <a:ext cx="8412480" cy="4114800"/>
-        </p:xfrm>
-        <a:graphic>
-          <a:graphicData uri="http://schemas.openxmlformats.org/drawingml/2006/table">
-            <a:tbl>
-              <a:tblPr firstRow="1" bandRow="1">
-                <a:tableStyleId>{5C22544A-7EE6-4342-B048-85BDC9FD1C3A}</a:tableStyleId>
-              </a:tblPr>
-              <a:tblGrid>
-                <a:gridCol w="1645920"/>
-                <a:gridCol w="2194560"/>
-                <a:gridCol w="2194560"/>
-                <a:gridCol w="2377440"/>
-              </a:tblGrid>
-              <a:tr h="374072">
-                <a:tc>
-                  <a:txBody>
-                    <a:bodyPr/>
-                    <a:lstStyle/>
-                    <a:p>
-                      <a:pPr>
-                        <a:defRPr sz="1100" b="1">
-                          <a:solidFill>
-                            <a:srgbClr val="FFFFFF"/>
-                          </a:solidFill>
-                          <a:latin typeface="Arial"/>
-                        </a:defRPr>
-                      </a:pPr>
-                      <a:r>
-                        <a:t>Tiêu chí Đối chiếu</a:t>
-                      </a:r>
-                    </a:p>
-                  </a:txBody>
-                  <a:tcPr>
-                    <a:solidFill>
-                      <a:srgbClr val="E74C3C"/>
-                    </a:solidFill>
-                  </a:tcPr>
-                </a:tc>
-                <a:tc>
-                  <a:txBody>
-                    <a:bodyPr/>
-                    <a:lstStyle/>
-                    <a:p>
-                      <a:pPr>
-                        <a:defRPr sz="1100" b="1">
-                          <a:solidFill>
-                            <a:srgbClr val="FFFFFF"/>
-                          </a:solidFill>
-                          <a:latin typeface="Arial"/>
-                        </a:defRPr>
-                      </a:pPr>
-                      <a:r>
-                        <a:t>Tiến trình (Process)</a:t>
-                      </a:r>
-                    </a:p>
-                  </a:txBody>
-                  <a:tcPr>
-                    <a:solidFill>
-                      <a:srgbClr val="E74C3C"/>
-                    </a:solidFill>
-                  </a:tcPr>
-                </a:tc>
-                <a:tc>
-                  <a:txBody>
-                    <a:bodyPr/>
-                    <a:lstStyle/>
-                    <a:p>
-                      <a:pPr>
-                        <a:defRPr sz="1100" b="1">
-                          <a:solidFill>
-                            <a:srgbClr val="FFFFFF"/>
-                          </a:solidFill>
-                          <a:latin typeface="Arial"/>
-                        </a:defRPr>
-                      </a:pPr>
-                      <a:r>
-                        <a:t>Luồng (Thread)</a:t>
-                      </a:r>
-                    </a:p>
-                  </a:txBody>
-                  <a:tcPr>
-                    <a:solidFill>
-                      <a:srgbClr val="E74C3C"/>
-                    </a:solidFill>
-                  </a:tcPr>
-                </a:tc>
-                <a:tc>
-                  <a:txBody>
-                    <a:bodyPr/>
-                    <a:lstStyle/>
-                    <a:p>
-                      <a:pPr>
-                        <a:defRPr sz="1100" b="1">
-                          <a:solidFill>
-                            <a:srgbClr val="FFFFFF"/>
-                          </a:solidFill>
-                          <a:latin typeface="Arial"/>
-                        </a:defRPr>
-                      </a:pPr>
-                      <a:r>
-                        <a:t>Hàm đồng quy (Coroutine)</a:t>
-                      </a:r>
-                    </a:p>
-                  </a:txBody>
-                  <a:tcPr>
-                    <a:solidFill>
-                      <a:srgbClr val="E74C3C"/>
-                    </a:solidFill>
-                  </a:tcPr>
-                </a:tc>
-              </a:tr>
-              <a:tr h="374072">
-                <a:tc>
-                  <a:txBody>
-                    <a:bodyPr/>
-                    <a:lstStyle/>
-                    <a:p>
-                      <a:pPr>
-                        <a:defRPr sz="950" b="1">
-                          <a:solidFill>
-                            <a:srgbClr val="1C1C1C"/>
-                          </a:solidFill>
-                          <a:latin typeface="Arial"/>
-                        </a:defRPr>
-                      </a:pPr>
-                      <a:r>
-                        <a:t>Tầng quản lý</a:t>
-                      </a:r>
-                    </a:p>
-                  </a:txBody>
-                  <a:tcPr/>
-                </a:tc>
-                <a:tc>
-                  <a:txBody>
-                    <a:bodyPr/>
-                    <a:lstStyle/>
-                    <a:p>
-                      <a:pPr>
-                        <a:defRPr sz="950">
-                          <a:solidFill>
-                            <a:srgbClr val="1C1C1C"/>
-                          </a:solidFill>
-                          <a:latin typeface="Arial"/>
-                        </a:defRPr>
-                      </a:pPr>
-                      <a:r>
-                        <a:t>Nhân hệ điều hành (Kernel)</a:t>
-                      </a:r>
-                    </a:p>
-                  </a:txBody>
-                  <a:tcPr/>
-                </a:tc>
-                <a:tc>
-                  <a:txBody>
-                    <a:bodyPr/>
-                    <a:lstStyle/>
-                    <a:p>
-                      <a:pPr>
-                        <a:defRPr sz="950">
-                          <a:solidFill>
-                            <a:srgbClr val="1C1C1C"/>
-                          </a:solidFill>
-                          <a:latin typeface="Arial"/>
-                        </a:defRPr>
-                      </a:pPr>
-                      <a:r>
-                        <a:t>Nhân hệ điều hành (Kernel)</a:t>
-                      </a:r>
-                    </a:p>
-                  </a:txBody>
-                  <a:tcPr/>
-                </a:tc>
-                <a:tc>
-                  <a:txBody>
-                    <a:bodyPr/>
-                    <a:lstStyle/>
-                    <a:p>
-                      <a:pPr>
-                        <a:defRPr sz="950">
-                          <a:solidFill>
-                            <a:srgbClr val="1C1C1C"/>
-                          </a:solidFill>
-                          <a:latin typeface="Arial"/>
-                        </a:defRPr>
-                      </a:pPr>
-                      <a:r>
-                        <a:t>Không gian người dùng (User-space)</a:t>
-                      </a:r>
-                    </a:p>
-                  </a:txBody>
-                  <a:tcPr/>
-                </a:tc>
-              </a:tr>
-              <a:tr h="374072">
-                <a:tc>
-                  <a:txBody>
-                    <a:bodyPr/>
-                    <a:lstStyle/>
-                    <a:p>
-                      <a:pPr>
-                        <a:defRPr sz="950" b="1">
-                          <a:solidFill>
-                            <a:srgbClr val="1C1C1C"/>
-                          </a:solidFill>
-                          <a:latin typeface="Arial"/>
-                        </a:defRPr>
-                      </a:pPr>
-                      <a:r>
-                        <a:t>Cơ chế Lập lịch</a:t>
-                      </a:r>
-                    </a:p>
-                  </a:txBody>
-                  <a:tcPr/>
-                </a:tc>
-                <a:tc>
-                  <a:txBody>
-                    <a:bodyPr/>
-                    <a:lstStyle/>
-                    <a:p>
-                      <a:pPr>
-                        <a:defRPr sz="950">
-                          <a:solidFill>
-                            <a:srgbClr val="1C1C1C"/>
-                          </a:solidFill>
-                          <a:latin typeface="Arial"/>
-                        </a:defRPr>
-                      </a:pPr>
-                      <a:r>
-                        <a:t>Tranh đoạt ưu tiên (Preemptive)</a:t>
-                      </a:r>
-                    </a:p>
-                  </a:txBody>
-                  <a:tcPr/>
-                </a:tc>
-                <a:tc>
-                  <a:txBody>
-                    <a:bodyPr/>
-                    <a:lstStyle/>
-                    <a:p>
-                      <a:pPr>
-                        <a:defRPr sz="950">
-                          <a:solidFill>
-                            <a:srgbClr val="1C1C1C"/>
-                          </a:solidFill>
-                          <a:latin typeface="Arial"/>
-                        </a:defRPr>
-                      </a:pPr>
-                      <a:r>
-                        <a:t>Tranh đoạt ưu tiên (Preemptive)</a:t>
-                      </a:r>
-                    </a:p>
-                  </a:txBody>
-                  <a:tcPr/>
-                </a:tc>
-                <a:tc>
-                  <a:txBody>
-                    <a:bodyPr/>
-                    <a:lstStyle/>
-                    <a:p>
-                      <a:pPr>
-                        <a:defRPr sz="950">
-                          <a:solidFill>
-                            <a:srgbClr val="1C1C1C"/>
-                          </a:solidFill>
-                          <a:latin typeface="Arial"/>
-                        </a:defRPr>
-                      </a:pPr>
-                      <a:r>
-                        <a:t>Hợp tác tự nguyện (Cooperative)</a:t>
-                      </a:r>
-                    </a:p>
-                  </a:txBody>
-                  <a:tcPr/>
-                </a:tc>
-              </a:tr>
-              <a:tr h="374072">
-                <a:tc>
-                  <a:txBody>
-                    <a:bodyPr/>
-                    <a:lstStyle/>
-                    <a:p>
-                      <a:pPr>
-                        <a:defRPr sz="950" b="1">
-                          <a:solidFill>
-                            <a:srgbClr val="1C1C1C"/>
-                          </a:solidFill>
-                          <a:latin typeface="Arial"/>
-                        </a:defRPr>
-                      </a:pPr>
-                      <a:r>
-                        <a:t>Không gian bộ nhớ</a:t>
-                      </a:r>
-                    </a:p>
-                  </a:txBody>
-                  <a:tcPr/>
-                </a:tc>
-                <a:tc>
-                  <a:txBody>
-                    <a:bodyPr/>
-                    <a:lstStyle/>
-                    <a:p>
-                      <a:pPr>
-                        <a:defRPr sz="950">
-                          <a:solidFill>
-                            <a:srgbClr val="1C1C1C"/>
-                          </a:solidFill>
-                          <a:latin typeface="Arial"/>
-                        </a:defRPr>
-                      </a:pPr>
-                      <a:r>
-                        <a:t>Cô lập hoàn toàn (Private)</a:t>
-                      </a:r>
-                    </a:p>
-                  </a:txBody>
-                  <a:tcPr/>
-                </a:tc>
-                <a:tc>
-                  <a:txBody>
-                    <a:bodyPr/>
-                    <a:lstStyle/>
-                    <a:p>
-                      <a:pPr>
-                        <a:defRPr sz="950">
-                          <a:solidFill>
-                            <a:srgbClr val="1C1C1C"/>
-                          </a:solidFill>
-                          <a:latin typeface="Arial"/>
-                        </a:defRPr>
-                      </a:pPr>
-                      <a:r>
-                        <a:t>Chia sẻ chung Vùng nhớ tĩnh/Động</a:t>
-                      </a:r>
-                    </a:p>
-                  </a:txBody>
-                  <a:tcPr/>
-                </a:tc>
-                <a:tc>
-                  <a:txBody>
-                    <a:bodyPr/>
-                    <a:lstStyle/>
-                    <a:p>
-                      <a:pPr>
-                        <a:defRPr sz="950">
-                          <a:solidFill>
-                            <a:srgbClr val="1C1C1C"/>
-                          </a:solidFill>
-                          <a:latin typeface="Arial"/>
-                        </a:defRPr>
-                      </a:pPr>
-                      <a:r>
-                        <a:t>Chia sẻ chung bộ nhớ Luồng sở tại</a:t>
-                      </a:r>
-                    </a:p>
-                  </a:txBody>
-                  <a:tcPr/>
-                </a:tc>
-              </a:tr>
-              <a:tr h="374072">
-                <a:tc>
-                  <a:txBody>
-                    <a:bodyPr/>
-                    <a:lstStyle/>
-                    <a:p>
-                      <a:pPr>
-                        <a:defRPr sz="950" b="1">
-                          <a:solidFill>
-                            <a:srgbClr val="1C1C1C"/>
-                          </a:solidFill>
-                          <a:latin typeface="Arial"/>
-                        </a:defRPr>
-                      </a:pPr>
-                      <a:r>
-                        <a:t>Bộ nhớ RAM</a:t>
-                      </a:r>
-                    </a:p>
-                  </a:txBody>
-                  <a:tcPr/>
-                </a:tc>
-                <a:tc>
-                  <a:txBody>
-                    <a:bodyPr/>
-                    <a:lstStyle/>
-                    <a:p>
-                      <a:pPr>
-                        <a:defRPr sz="950">
-                          <a:solidFill>
-                            <a:srgbClr val="1C1C1C"/>
-                          </a:solidFill>
-                          <a:latin typeface="Arial"/>
-                        </a:defRPr>
-                      </a:pPr>
-                      <a:r>
-                        <a:t>~15–30 MB / tiến trình</a:t>
-                      </a:r>
-                    </a:p>
-                  </a:txBody>
-                  <a:tcPr/>
-                </a:tc>
-                <a:tc>
-                  <a:txBody>
-                    <a:bodyPr/>
-                    <a:lstStyle/>
-                    <a:p>
-                      <a:pPr>
-                        <a:defRPr sz="950">
-                          <a:solidFill>
-                            <a:srgbClr val="1C1C1C"/>
-                          </a:solidFill>
-                          <a:latin typeface="Arial"/>
-                        </a:defRPr>
-                      </a:pPr>
-                      <a:r>
-                        <a:t>~8 MB ngăn xếp ảo, ~100KB thực</a:t>
-                      </a:r>
-                    </a:p>
-                  </a:txBody>
-                  <a:tcPr/>
-                </a:tc>
-                <a:tc>
-                  <a:txBody>
-                    <a:bodyPr/>
-                    <a:lstStyle/>
-                    <a:p>
-                      <a:pPr>
-                        <a:defRPr sz="950">
-                          <a:solidFill>
-                            <a:srgbClr val="1C1C1C"/>
-                          </a:solidFill>
-                          <a:latin typeface="Arial"/>
-                        </a:defRPr>
-                      </a:pPr>
-                      <a:r>
-                        <a:t>~1–2 KB / hàm đồng quy siêu nhẹ</a:t>
-                      </a:r>
-                    </a:p>
-                  </a:txBody>
-                  <a:tcPr/>
-                </a:tc>
-              </a:tr>
-              <a:tr h="374072">
-                <a:tc>
-                  <a:txBody>
-                    <a:bodyPr/>
-                    <a:lstStyle/>
-                    <a:p>
-                      <a:pPr>
-                        <a:defRPr sz="950" b="1">
-                          <a:solidFill>
-                            <a:srgbClr val="1C1C1C"/>
-                          </a:solidFill>
-                          <a:latin typeface="Arial"/>
-                        </a:defRPr>
-                      </a:pPr>
-                      <a:r>
-                        <a:t>Thời gian tạo mới</a:t>
-                      </a:r>
-                    </a:p>
-                  </a:txBody>
-                  <a:tcPr/>
-                </a:tc>
-                <a:tc>
-                  <a:txBody>
-                    <a:bodyPr/>
-                    <a:lstStyle/>
-                    <a:p>
-                      <a:pPr>
-                        <a:defRPr sz="950">
-                          <a:solidFill>
-                            <a:srgbClr val="1C1C1C"/>
-                          </a:solidFill>
-                          <a:latin typeface="Arial"/>
-                        </a:defRPr>
-                      </a:pPr>
-                      <a:r>
-                        <a:t>~10–50 mili-giây (Rất nặng)</a:t>
-                      </a:r>
-                    </a:p>
-                  </a:txBody>
-                  <a:tcPr/>
-                </a:tc>
-                <a:tc>
-                  <a:txBody>
-                    <a:bodyPr/>
-                    <a:lstStyle/>
-                    <a:p>
-                      <a:pPr>
-                        <a:defRPr sz="950">
-                          <a:solidFill>
-                            <a:srgbClr val="1C1C1C"/>
-                          </a:solidFill>
-                          <a:latin typeface="Arial"/>
-                        </a:defRPr>
-                      </a:pPr>
-                      <a:r>
-                        <a:t>~50–200 micro-giây</a:t>
-                      </a:r>
-                    </a:p>
-                  </a:txBody>
-                  <a:tcPr/>
-                </a:tc>
-                <a:tc>
-                  <a:txBody>
-                    <a:bodyPr/>
-                    <a:lstStyle/>
-                    <a:p>
-                      <a:pPr>
-                        <a:defRPr sz="950">
-                          <a:solidFill>
-                            <a:srgbClr val="1C1C1C"/>
-                          </a:solidFill>
-                          <a:latin typeface="Arial"/>
-                        </a:defRPr>
-                      </a:pPr>
-                      <a:r>
-                        <a:t>&lt; 1 micro-giây (Siêu tốc độ)</a:t>
-                      </a:r>
-                    </a:p>
-                  </a:txBody>
-                  <a:tcPr/>
-                </a:tc>
-              </a:tr>
-              <a:tr h="374072">
-                <a:tc>
-                  <a:txBody>
-                    <a:bodyPr/>
-                    <a:lstStyle/>
-                    <a:p>
-                      <a:pPr>
-                        <a:defRPr sz="950" b="1">
-                          <a:solidFill>
-                            <a:srgbClr val="1C1C1C"/>
-                          </a:solidFill>
-                          <a:latin typeface="Arial"/>
-                        </a:defRPr>
-                      </a:pPr>
-                      <a:r>
-                        <a:t>Chuyển ngữ cảnh</a:t>
-                      </a:r>
-                    </a:p>
-                  </a:txBody>
-                  <a:tcPr/>
-                </a:tc>
-                <a:tc>
-                  <a:txBody>
-                    <a:bodyPr/>
-                    <a:lstStyle/>
-                    <a:p>
-                      <a:pPr>
-                        <a:defRPr sz="950">
-                          <a:solidFill>
-                            <a:srgbClr val="1C1C1C"/>
-                          </a:solidFill>
-                          <a:latin typeface="Arial"/>
-                        </a:defRPr>
-                      </a:pPr>
-                      <a:r>
-                        <a:t>~5–15 micro-giây (Xóa TLB)</a:t>
-                      </a:r>
-                    </a:p>
-                  </a:txBody>
-                  <a:tcPr/>
-                </a:tc>
-                <a:tc>
-                  <a:txBody>
-                    <a:bodyPr/>
-                    <a:lstStyle/>
-                    <a:p>
-                      <a:pPr>
-                        <a:defRPr sz="950">
-                          <a:solidFill>
-                            <a:srgbClr val="1C1C1C"/>
-                          </a:solidFill>
-                          <a:latin typeface="Arial"/>
-                        </a:defRPr>
-                      </a:pPr>
-                      <a:r>
-                        <a:t>~1–3 micro-giây (Lưu thanh ghi)</a:t>
-                      </a:r>
-                    </a:p>
-                  </a:txBody>
-                  <a:tcPr/>
-                </a:tc>
-                <a:tc>
-                  <a:txBody>
-                    <a:bodyPr/>
-                    <a:lstStyle/>
-                    <a:p>
-                      <a:pPr>
-                        <a:defRPr sz="950">
-                          <a:solidFill>
-                            <a:srgbClr val="1C1C1C"/>
-                          </a:solidFill>
-                          <a:latin typeface="Arial"/>
-                        </a:defRPr>
-                      </a:pPr>
-                      <a:r>
-                        <a:t>~20–50 nano-giây (Đổi con trỏ)</a:t>
-                      </a:r>
-                    </a:p>
-                  </a:txBody>
-                  <a:tcPr/>
-                </a:tc>
-              </a:tr>
-              <a:tr h="374072">
-                <a:tc>
-                  <a:txBody>
-                    <a:bodyPr/>
-                    <a:lstStyle/>
-                    <a:p>
-                      <a:pPr>
-                        <a:defRPr sz="950" b="1">
-                          <a:solidFill>
-                            <a:srgbClr val="1C1C1C"/>
-                          </a:solidFill>
-                          <a:latin typeface="Arial"/>
-                        </a:defRPr>
-                      </a:pPr>
-                      <a:r>
-                        <a:t>Khai thác Đa lõi</a:t>
-                      </a:r>
-                    </a:p>
-                  </a:txBody>
-                  <a:tcPr/>
-                </a:tc>
-                <a:tc>
-                  <a:txBody>
-                    <a:bodyPr/>
-                    <a:lstStyle/>
-                    <a:p>
-                      <a:pPr>
-                        <a:defRPr sz="950">
-                          <a:solidFill>
-                            <a:srgbClr val="1C1C1C"/>
-                          </a:solidFill>
-                          <a:latin typeface="Arial"/>
-                        </a:defRPr>
-                      </a:pPr>
-                      <a:r>
-                        <a:t>Tuyệt đối (Mỗi tiến trình 1 core)</a:t>
-                      </a:r>
-                    </a:p>
-                  </a:txBody>
-                  <a:tcPr/>
-                </a:tc>
-                <a:tc>
-                  <a:txBody>
-                    <a:bodyPr/>
-                    <a:lstStyle/>
-                    <a:p>
-                      <a:pPr>
-                        <a:defRPr sz="950">
-                          <a:solidFill>
-                            <a:srgbClr val="1C1C1C"/>
-                          </a:solidFill>
-                          <a:latin typeface="Arial"/>
-                        </a:defRPr>
-                      </a:pPr>
-                      <a:r>
-                        <a:t>Bị hạn chế bởi khóa GIL CPython</a:t>
-                      </a:r>
-                    </a:p>
-                  </a:txBody>
-                  <a:tcPr/>
-                </a:tc>
-                <a:tc>
-                  <a:txBody>
-                    <a:bodyPr/>
-                    <a:lstStyle/>
-                    <a:p>
-                      <a:pPr>
-                        <a:defRPr sz="950">
-                          <a:solidFill>
-                            <a:srgbClr val="1C1C1C"/>
-                          </a:solidFill>
-                          <a:latin typeface="Arial"/>
-                        </a:defRPr>
-                      </a:pPr>
-                      <a:r>
-                        <a:t>Chạy trên 1 core (Vòng lặp đơn)</a:t>
-                      </a:r>
-                    </a:p>
-                  </a:txBody>
-                  <a:tcPr/>
-                </a:tc>
-              </a:tr>
-              <a:tr h="374072">
-                <a:tc>
-                  <a:txBody>
-                    <a:bodyPr/>
-                    <a:lstStyle/>
-                    <a:p>
-                      <a:pPr>
-                        <a:defRPr sz="950" b="1">
-                          <a:solidFill>
-                            <a:srgbClr val="1C1C1C"/>
-                          </a:solidFill>
-                          <a:latin typeface="Arial"/>
-                        </a:defRPr>
-                      </a:pPr>
-                      <a:r>
-                        <a:t>Kênh giao tiếp</a:t>
-                      </a:r>
-                    </a:p>
-                  </a:txBody>
-                  <a:tcPr/>
-                </a:tc>
-                <a:tc>
-                  <a:txBody>
-                    <a:bodyPr/>
-                    <a:lstStyle/>
-                    <a:p>
-                      <a:pPr>
-                        <a:defRPr sz="950">
-                          <a:solidFill>
-                            <a:srgbClr val="1C1C1C"/>
-                          </a:solidFill>
-                          <a:latin typeface="Arial"/>
-                        </a:defRPr>
-                      </a:pPr>
-                      <a:r>
-                        <a:t>Truyền thông liên tiến trình (IPC)</a:t>
-                      </a:r>
-                    </a:p>
-                  </a:txBody>
-                  <a:tcPr/>
-                </a:tc>
-                <a:tc>
-                  <a:txBody>
-                    <a:bodyPr/>
-                    <a:lstStyle/>
-                    <a:p>
-                      <a:pPr>
-                        <a:defRPr sz="950">
-                          <a:solidFill>
-                            <a:srgbClr val="1C1C1C"/>
-                          </a:solidFill>
-                          <a:latin typeface="Arial"/>
-                        </a:defRPr>
-                      </a:pPr>
-                      <a:r>
-                        <a:t>Truy xuất bộ nhớ chung trực tiếp</a:t>
-                      </a:r>
-                    </a:p>
-                  </a:txBody>
-                  <a:tcPr/>
-                </a:tc>
-                <a:tc>
-                  <a:txBody>
-                    <a:bodyPr/>
-                    <a:lstStyle/>
-                    <a:p>
-                      <a:pPr>
-                        <a:defRPr sz="950">
-                          <a:solidFill>
-                            <a:srgbClr val="1C1C1C"/>
-                          </a:solidFill>
-                          <a:latin typeface="Arial"/>
-                        </a:defRPr>
-                      </a:pPr>
-                      <a:r>
-                        <a:t>Biến trực tiếp / Hàng đợi bất đồng bộ</a:t>
-                      </a:r>
-                    </a:p>
-                  </a:txBody>
-                  <a:tcPr/>
-                </a:tc>
-              </a:tr>
-              <a:tr h="374072">
-                <a:tc>
-                  <a:txBody>
-                    <a:bodyPr/>
-                    <a:lstStyle/>
-                    <a:p>
-                      <a:pPr>
-                        <a:defRPr sz="950" b="1">
-                          <a:solidFill>
-                            <a:srgbClr val="1C1C1C"/>
-                          </a:solidFill>
-                          <a:latin typeface="Arial"/>
-                        </a:defRPr>
-                      </a:pPr>
-                      <a:r>
-                        <a:t>Rủi ro tiềm ẩn</a:t>
-                      </a:r>
-                    </a:p>
-                  </a:txBody>
-                  <a:tcPr/>
-                </a:tc>
-                <a:tc>
-                  <a:txBody>
-                    <a:bodyPr/>
-                    <a:lstStyle/>
-                    <a:p>
-                      <a:pPr>
-                        <a:defRPr sz="950">
-                          <a:solidFill>
-                            <a:srgbClr val="1C1C1C"/>
-                          </a:solidFill>
-                          <a:latin typeface="Arial"/>
-                        </a:defRPr>
-                      </a:pPr>
-                      <a:r>
-                        <a:t>Bế tắc giao tiếp, cạn kiệt RAM</a:t>
-                      </a:r>
-                    </a:p>
-                  </a:txBody>
-                  <a:tcPr/>
-                </a:tc>
-                <a:tc>
-                  <a:txBody>
-                    <a:bodyPr/>
-                    <a:lstStyle/>
-                    <a:p>
-                      <a:pPr>
-                        <a:defRPr sz="950">
-                          <a:solidFill>
-                            <a:srgbClr val="1C1C1C"/>
-                          </a:solidFill>
-                          <a:latin typeface="Arial"/>
-                        </a:defRPr>
-                      </a:pPr>
-                      <a:r>
-                        <a:t>Tranh chấp dữ liệu, Bế tắc khóa</a:t>
-                      </a:r>
-                    </a:p>
-                  </a:txBody>
-                  <a:tcPr/>
-                </a:tc>
-                <a:tc>
-                  <a:txBody>
-                    <a:bodyPr/>
-                    <a:lstStyle/>
-                    <a:p>
-                      <a:pPr>
-                        <a:defRPr sz="950">
-                          <a:solidFill>
-                            <a:srgbClr val="1C1C1C"/>
-                          </a:solidFill>
-                          <a:latin typeface="Arial"/>
-                        </a:defRPr>
-                      </a:pPr>
-                      <a:r>
-                        <a:t>Đóng băng vòng lặp nếu gọi hàm chặn</a:t>
-                      </a:r>
-                    </a:p>
-                  </a:txBody>
-                  <a:tcPr/>
-                </a:tc>
-              </a:tr>
-              <a:tr h="374080">
-                <a:tc>
-                  <a:txBody>
-                    <a:bodyPr/>
-                    <a:lstStyle/>
-                    <a:p>
-                      <a:pPr>
-                        <a:defRPr sz="950" b="1">
-                          <a:solidFill>
-                            <a:srgbClr val="1C1C1C"/>
-                          </a:solidFill>
-                          <a:latin typeface="Arial"/>
-                        </a:defRPr>
-                      </a:pPr>
-                      <a:r>
-                        <a:t>Miền tối ưu nhất</a:t>
-                      </a:r>
-                    </a:p>
-                  </a:txBody>
-                  <a:tcPr/>
-                </a:tc>
-                <a:tc>
-                  <a:txBody>
-                    <a:bodyPr/>
-                    <a:lstStyle/>
-                    <a:p>
-                      <a:pPr>
-                        <a:defRPr sz="950">
-                          <a:solidFill>
-                            <a:srgbClr val="1C1C1C"/>
-                          </a:solidFill>
-                          <a:latin typeface="Arial"/>
-                        </a:defRPr>
-                      </a:pPr>
-                      <a:r>
-                        <a:t>Tính toán nặng CPU thuần Python</a:t>
-                      </a:r>
-                    </a:p>
-                  </a:txBody>
-                  <a:tcPr/>
-                </a:tc>
-                <a:tc>
-                  <a:txBody>
-                    <a:bodyPr/>
-                    <a:lstStyle/>
-                    <a:p>
-                      <a:pPr>
-                        <a:defRPr sz="950">
-                          <a:solidFill>
-                            <a:srgbClr val="1C1C1C"/>
-                          </a:solidFill>
-                          <a:latin typeface="Arial"/>
-                        </a:defRPr>
-                      </a:pPr>
-                      <a:r>
-                        <a:t>Chờ Vào/Ra khi thư viện chặn</a:t>
-                      </a:r>
-                    </a:p>
-                  </a:txBody>
-                  <a:tcPr/>
-                </a:tc>
-                <a:tc>
-                  <a:txBody>
-                    <a:bodyPr/>
-                    <a:lstStyle/>
-                    <a:p>
-                      <a:pPr>
-                        <a:defRPr sz="950">
-                          <a:solidFill>
-                            <a:srgbClr val="1C1C1C"/>
-                          </a:solidFill>
-                          <a:latin typeface="Arial"/>
-                        </a:defRPr>
-                      </a:pPr>
-                      <a:r>
-                        <a:t>Vào/Ra quy mô lớn (Hàng vạn kết nối)</a:t>
-                      </a:r>
-                    </a:p>
-                  </a:txBody>
-                  <a:tcPr/>
-                </a:tc>
-              </a:tr>
-            </a:tbl>
-          </a:graphicData>
-        </a:graphic>
-      </p:graphicFrame>
-    </p:spTree>
-  </p:cSld>
-  <p:clrMapOvr>
-    <a:masterClrMapping/>
-  </p:clrMapOvr>
-</p:sld>
-</file>
-
-<file path=ppt/slides/slide17.xml><?xml version="1.0" encoding="utf-8"?>
-<p:sld xmlns:a="http://schemas.openxmlformats.org/drawingml/2006/main" xmlns:p="http://schemas.openxmlformats.org/presentationml/2006/main" xmlns:r="http://schemas.openxmlformats.org/officeDocument/2006/relationships">
-  <p:cSld>
-    <p:spTree>
-      <p:nvGrpSpPr>
-        <p:cNvPr id="1" name=""/>
-        <p:cNvGrpSpPr/>
-        <p:nvPr/>
-      </p:nvGrpSpPr>
-      <p:grpSpPr/>
-      <p:pic>
-        <p:nvPicPr>
-          <p:cNvPr id="2" name="Picture 1" descr="master_template_clean.png"/>
-          <p:cNvPicPr>
-            <a:picLocks noChangeAspect="1"/>
-          </p:cNvPicPr>
-          <p:nvPr/>
-        </p:nvPicPr>
-        <p:blipFill>
-          <a:blip r:embed="rId2"/>
-          <a:stretch>
-            <a:fillRect/>
-          </a:stretch>
-        </p:blipFill>
-        <p:spPr>
-          <a:xfrm>
-            <a:off x="0" y="0"/>
-            <a:ext cx="9144000" cy="6858000"/>
-          </a:xfrm>
-          <a:prstGeom prst="rect">
-            <a:avLst/>
-          </a:prstGeom>
-        </p:spPr>
-      </p:pic>
-      <p:sp>
-        <p:nvSpPr>
-          <p:cNvPr id="3" name="TextBox 2"/>
-          <p:cNvSpPr txBox="1"/>
-          <p:nvPr/>
-        </p:nvSpPr>
-        <p:spPr>
-          <a:xfrm>
-            <a:off x="182880" y="182880"/>
-            <a:ext cx="731520" cy="548640"/>
-          </a:xfrm>
-          <a:prstGeom prst="rect">
-            <a:avLst/>
-          </a:prstGeom>
-          <a:noFill/>
-        </p:spPr>
-        <p:txBody>
-          <a:bodyPr wrap="square">
-            <a:spAutoFit/>
-          </a:bodyPr>
-          <a:lstStyle/>
-          <a:p>
-            <a:pPr>
-              <a:defRPr sz="1800" b="1">
-                <a:solidFill>
-                  <a:srgbClr val="FFFFFF"/>
-                </a:solidFill>
-                <a:latin typeface="Arial"/>
-              </a:defRPr>
-            </a:pPr>
-            <a:r>
-              <a:t>17</a:t>
-            </a:r>
-          </a:p>
-        </p:txBody>
-      </p:sp>
-      <p:sp>
-        <p:nvSpPr>
-          <p:cNvPr id="4" name="TextBox 3"/>
-          <p:cNvSpPr txBox="1"/>
-          <p:nvPr/>
-        </p:nvSpPr>
-        <p:spPr>
-          <a:xfrm>
-            <a:off x="960120" y="6217920"/>
-            <a:ext cx="6858000" cy="457200"/>
-          </a:xfrm>
-          <a:prstGeom prst="rect">
-            <a:avLst/>
-          </a:prstGeom>
-          <a:noFill/>
-        </p:spPr>
-        <p:txBody>
-          <a:bodyPr wrap="square">
-            <a:spAutoFit/>
-          </a:bodyPr>
-          <a:lstStyle/>
-          <a:p>
-            <a:pPr>
-              <a:defRPr sz="1400" b="1">
-                <a:solidFill>
-                  <a:srgbClr val="1C1C1C"/>
-                </a:solidFill>
-                <a:latin typeface="Arial"/>
-              </a:defRPr>
-            </a:pPr>
-            <a:r>
-              <a:t>Kiến trúc Vào/Ra — Ma trận Phân loại Hai Chiều</a:t>
-            </a:r>
-          </a:p>
-        </p:txBody>
-      </p:sp>
-      <p:sp>
-        <p:nvSpPr>
-          <p:cNvPr id="5" name="TextBox 4"/>
-          <p:cNvSpPr txBox="1"/>
-          <p:nvPr/>
-        </p:nvSpPr>
-        <p:spPr>
-          <a:xfrm>
-            <a:off x="365760" y="1234440"/>
-            <a:ext cx="8412480" cy="502920"/>
-          </a:xfrm>
-          <a:prstGeom prst="rect">
-            <a:avLst/>
-          </a:prstGeom>
-          <a:noFill/>
-        </p:spPr>
-        <p:txBody>
-          <a:bodyPr wrap="square" tIns="0" bIns="0">
-            <a:spAutoFit/>
-          </a:bodyPr>
-          <a:lstStyle/>
-          <a:p>
-            <a:pPr>
-              <a:defRPr sz="1850" b="1">
-                <a:solidFill>
-                  <a:srgbClr val="1C1C1C"/>
-                </a:solidFill>
-                <a:latin typeface="Arial"/>
-              </a:defRPr>
-            </a:pPr>
-            <a:r>
-              <a:t>Ma trận Phân loại Kiến trúc Vào/Ra: Đồng bộ vs Bất đồng bộ</a:t>
-            </a:r>
-          </a:p>
-        </p:txBody>
-      </p:sp>
-      <p:graphicFrame>
-        <p:nvGraphicFramePr>
-          <p:cNvPr id="6" name="Table 5"/>
-          <p:cNvGraphicFramePr>
-            <a:graphicFrameLocks noGrp="1"/>
-          </p:cNvGraphicFramePr>
-          <p:nvPr/>
-        </p:nvGraphicFramePr>
-        <p:xfrm>
-          <a:off x="365760" y="1874519"/>
-          <a:ext cx="8412480" cy="4114800"/>
+          <a:ext cx="8412480" cy="3931920"/>
         </p:xfrm>
         <a:graphic>
           <a:graphicData uri="http://schemas.openxmlformats.org/drawingml/2006/table">
@@ -6371,18 +3736,19 @@
               </a:tblPr>
               <a:tblGrid>
                 <a:gridCol w="1828800"/>
-                <a:gridCol w="2194560"/>
-                <a:gridCol w="2194560"/>
-                <a:gridCol w="2194560"/>
+                <a:gridCol w="1554480"/>
+                <a:gridCol w="1645920"/>
+                <a:gridCol w="1691640"/>
+                <a:gridCol w="1691640"/>
               </a:tblGrid>
-              <a:tr h="822960">
+              <a:tr h="786384">
                 <a:tc>
                   <a:txBody>
                     <a:bodyPr/>
                     <a:lstStyle/>
                     <a:p>
-                      <a:pPr>
-                        <a:defRPr sz="1100" b="1">
+                      <a:pPr algn="ctr">
+                        <a:defRPr sz="1200" b="1">
                           <a:solidFill>
                             <a:srgbClr val="FFFFFF"/>
                           </a:solidFill>
@@ -6390,13 +3756,13 @@
                         </a:defRPr>
                       </a:pPr>
                       <a:r>
-                        <a:t>Mô hình Kết hợp</a:t>
+                        <a:t>Tiêu chí đối chiếu</a:t>
                       </a:r>
                     </a:p>
                   </a:txBody>
                   <a:tcPr>
                     <a:solidFill>
-                      <a:srgbClr val="E74C3C"/>
+                      <a:srgbClr val="E04B3B"/>
                     </a:solidFill>
                   </a:tcPr>
                 </a:tc>
@@ -6405,8 +3771,8 @@
                     <a:bodyPr/>
                     <a:lstStyle/>
                     <a:p>
-                      <a:pPr>
-                        <a:defRPr sz="1100" b="1">
+                      <a:pPr algn="ctr">
+                        <a:defRPr sz="1200" b="1">
                           <a:solidFill>
                             <a:srgbClr val="FFFFFF"/>
                           </a:solidFill>
@@ -6414,13 +3780,17 @@
                         </a:defRPr>
                       </a:pPr>
                       <a:r>
-                        <a:t>Cơ chế Hoạt động</a:t>
+                        <a:t>Tuần tự</a:t>
+                      </a:r>
+                      <a:br/>
+                      <a:r>
+                        <a:t>(Sequential)</a:t>
                       </a:r>
                     </a:p>
                   </a:txBody>
                   <a:tcPr>
                     <a:solidFill>
-                      <a:srgbClr val="E74C3C"/>
+                      <a:srgbClr val="E04B3B"/>
                     </a:solidFill>
                   </a:tcPr>
                 </a:tc>
@@ -6429,8 +3799,8 @@
                     <a:bodyPr/>
                     <a:lstStyle/>
                     <a:p>
-                      <a:pPr>
-                        <a:defRPr sz="1100" b="1">
+                      <a:pPr algn="ctr">
+                        <a:defRPr sz="1200" b="1">
                           <a:solidFill>
                             <a:srgbClr val="FFFFFF"/>
                           </a:solidFill>
@@ -6438,13 +3808,17 @@
                         </a:defRPr>
                       </a:pPr>
                       <a:r>
-                        <a:t>Tác động Hiệu năng</a:t>
+                        <a:t>Đồng thời</a:t>
+                      </a:r>
+                      <a:br/>
+                      <a:r>
+                        <a:t>(Concurrency)</a:t>
                       </a:r>
                     </a:p>
                   </a:txBody>
                   <a:tcPr>
                     <a:solidFill>
-                      <a:srgbClr val="E74C3C"/>
+                      <a:srgbClr val="E04B3B"/>
                     </a:solidFill>
                   </a:tcPr>
                 </a:tc>
@@ -6453,8 +3827,8 @@
                     <a:bodyPr/>
                     <a:lstStyle/>
                     <a:p>
-                      <a:pPr>
-                        <a:defRPr sz="1100" b="1">
+                      <a:pPr algn="ctr">
+                        <a:defRPr sz="1200" b="1">
                           <a:solidFill>
                             <a:srgbClr val="FFFFFF"/>
                           </a:solidFill>
@@ -6462,596 +3836,17 @@
                         </a:defRPr>
                       </a:pPr>
                       <a:r>
-                        <a:t>Minh họa Cú pháp Python</a:t>
+                        <a:t>Song song</a:t>
+                      </a:r>
+                      <a:br/>
+                      <a:r>
+                        <a:t>(Parallelism)</a:t>
                       </a:r>
                     </a:p>
                   </a:txBody>
                   <a:tcPr>
                     <a:solidFill>
-                      <a:srgbClr val="E74C3C"/>
-                    </a:solidFill>
-                  </a:tcPr>
-                </a:tc>
-              </a:tr>
-              <a:tr h="822960">
-                <a:tc>
-                  <a:txBody>
-                    <a:bodyPr/>
-                    <a:lstStyle/>
-                    <a:p>
-                      <a:pPr>
-                        <a:defRPr sz="1000" b="1">
-                          <a:solidFill>
-                            <a:srgbClr val="1C1C1C"/>
-                          </a:solidFill>
-                          <a:latin typeface="Arial"/>
-                        </a:defRPr>
-                      </a:pPr>
-                      <a:r>
-                        <a:t>1. Đồng bộ + Phong tỏa</a:t>
-                      </a:r>
-                      <a:br/>
-                      <a:r>
-                        <a:t>(Sync Blocking)</a:t>
-                      </a:r>
-                    </a:p>
-                  </a:txBody>
-                  <a:tcPr/>
-                </a:tc>
-                <a:tc>
-                  <a:txBody>
-                    <a:bodyPr/>
-                    <a:lstStyle/>
-                    <a:p>
-                      <a:pPr>
-                        <a:defRPr sz="1000">
-                          <a:solidFill>
-                            <a:srgbClr val="1C1C1C"/>
-                          </a:solidFill>
-                          <a:latin typeface="Arial"/>
-                        </a:defRPr>
-                      </a:pPr>
-                      <a:r>
-                        <a:t>Bên gọi chờ kết quả; luồng bị hệ điều hành đưa vào trạng thái ngủ.</a:t>
-                      </a:r>
-                    </a:p>
-                  </a:txBody>
-                  <a:tcPr/>
-                </a:tc>
-                <a:tc>
-                  <a:txBody>
-                    <a:bodyPr/>
-                    <a:lstStyle/>
-                    <a:p>
-                      <a:pPr>
-                        <a:defRPr sz="1000">
-                          <a:solidFill>
-                            <a:srgbClr val="1C1C1C"/>
-                          </a:solidFill>
-                          <a:latin typeface="Arial"/>
-                        </a:defRPr>
-                      </a:pPr>
-                      <a:r>
-                        <a:t>Đơn giản nhưng lãng phí nghiêm trọng chu kỳ vi xử lý khi có trễ Vào/Ra.</a:t>
-                      </a:r>
-                    </a:p>
-                  </a:txBody>
-                  <a:tcPr/>
-                </a:tc>
-                <a:tc>
-                  <a:txBody>
-                    <a:bodyPr/>
-                    <a:lstStyle/>
-                    <a:p>
-                      <a:pPr>
-                        <a:defRPr sz="950">
-                          <a:solidFill>
-                            <a:srgbClr val="1C1C1C"/>
-                          </a:solidFill>
-                          <a:latin typeface="Consolas"/>
-                        </a:defRPr>
-                      </a:pPr>
-                      <a:r>
-                        <a:t>import requests</a:t>
-                      </a:r>
-                      <a:br/>
-                      <a:r>
-                        <a:t>resp = requests.get(url)</a:t>
-                      </a:r>
-                      <a:br/>
-                      <a:r>
-                        <a:t># Chặn cứng luồng thực thi</a:t>
-                      </a:r>
-                    </a:p>
-                  </a:txBody>
-                  <a:tcPr/>
-                </a:tc>
-              </a:tr>
-              <a:tr h="822960">
-                <a:tc>
-                  <a:txBody>
-                    <a:bodyPr/>
-                    <a:lstStyle/>
-                    <a:p>
-                      <a:pPr>
-                        <a:defRPr sz="1000" b="1">
-                          <a:solidFill>
-                            <a:srgbClr val="1C1C1C"/>
-                          </a:solidFill>
-                          <a:latin typeface="Arial"/>
-                        </a:defRPr>
-                      </a:pPr>
-                      <a:r>
-                        <a:t>2. Đồng bộ + Phi phong tỏa</a:t>
-                      </a:r>
-                      <a:br/>
-                      <a:r>
-                        <a:t>(Sync Non-blocking)</a:t>
-                      </a:r>
-                    </a:p>
-                  </a:txBody>
-                  <a:tcPr/>
-                </a:tc>
-                <a:tc>
-                  <a:txBody>
-                    <a:bodyPr/>
-                    <a:lstStyle/>
-                    <a:p>
-                      <a:pPr>
-                        <a:defRPr sz="1000">
-                          <a:solidFill>
-                            <a:srgbClr val="1C1C1C"/>
-                          </a:solidFill>
-                          <a:latin typeface="Arial"/>
-                        </a:defRPr>
-                      </a:pPr>
-                      <a:r>
-                        <a:t>Bên gọi nhận tín hiệu ngay; lặp lại việc thăm dò trạng thái liên tục.</a:t>
-                      </a:r>
-                    </a:p>
-                  </a:txBody>
-                  <a:tcPr/>
-                </a:tc>
-                <a:tc>
-                  <a:txBody>
-                    <a:bodyPr/>
-                    <a:lstStyle/>
-                    <a:p>
-                      <a:pPr>
-                        <a:defRPr sz="1000">
-                          <a:solidFill>
-                            <a:srgbClr val="1C1C1C"/>
-                          </a:solidFill>
-                          <a:latin typeface="Arial"/>
-                        </a:defRPr>
-                      </a:pPr>
-                      <a:r>
-                        <a:t>Tạo tải ảo, làm vi xử lý tăng 100% chỉ để thăm dò kết quả sẵn sàng.</a:t>
-                      </a:r>
-                    </a:p>
-                  </a:txBody>
-                  <a:tcPr/>
-                </a:tc>
-                <a:tc>
-                  <a:txBody>
-                    <a:bodyPr/>
-                    <a:lstStyle/>
-                    <a:p>
-                      <a:pPr>
-                        <a:defRPr sz="950">
-                          <a:solidFill>
-                            <a:srgbClr val="1C1C1C"/>
-                          </a:solidFill>
-                          <a:latin typeface="Consolas"/>
-                        </a:defRPr>
-                      </a:pPr>
-                      <a:r>
-                        <a:t>sock.setblocking(False)</a:t>
-                      </a:r>
-                      <a:br/>
-                      <a:r>
-                        <a:t>while True:</a:t>
-                      </a:r>
-                      <a:br/>
-                      <a:r>
-                        <a:t>  try: data=recv(); break</a:t>
-                      </a:r>
-                      <a:br/>
-                      <a:r>
-                        <a:t>  except: pass</a:t>
-                      </a:r>
-                    </a:p>
-                  </a:txBody>
-                  <a:tcPr/>
-                </a:tc>
-              </a:tr>
-              <a:tr h="822960">
-                <a:tc>
-                  <a:txBody>
-                    <a:bodyPr/>
-                    <a:lstStyle/>
-                    <a:p>
-                      <a:pPr>
-                        <a:defRPr sz="1000" b="1">
-                          <a:solidFill>
-                            <a:srgbClr val="B91C1C"/>
-                          </a:solidFill>
-                          <a:latin typeface="Arial"/>
-                        </a:defRPr>
-                      </a:pPr>
-                      <a:r>
-                        <a:t>3. Bất đồng bộ + Phong tỏa</a:t>
-                      </a:r>
-                      <a:br/>
-                      <a:r>
-                        <a:t>(Phản mẫu Thiết kế)</a:t>
-                      </a:r>
-                    </a:p>
-                  </a:txBody>
-                  <a:tcPr/>
-                </a:tc>
-                <a:tc>
-                  <a:txBody>
-                    <a:bodyPr/>
-                    <a:lstStyle/>
-                    <a:p>
-                      <a:pPr>
-                        <a:defRPr sz="1000">
-                          <a:solidFill>
-                            <a:srgbClr val="1C1C1C"/>
-                          </a:solidFill>
-                          <a:latin typeface="Arial"/>
-                        </a:defRPr>
-                      </a:pPr>
-                      <a:r>
-                        <a:t>Khai báo hàm async nhưng bên trong gọi lời gọi hàm phong tỏa.</a:t>
-                      </a:r>
-                    </a:p>
-                  </a:txBody>
-                  <a:tcPr/>
-                </a:tc>
-                <a:tc>
-                  <a:txBody>
-                    <a:bodyPr/>
-                    <a:lstStyle/>
-                    <a:p>
-                      <a:pPr>
-                        <a:defRPr sz="1000">
-                          <a:solidFill>
-                            <a:srgbClr val="1C1C1C"/>
-                          </a:solidFill>
-                          <a:latin typeface="Arial"/>
-                        </a:defRPr>
-                      </a:pPr>
-                      <a:r>
-                        <a:t>LỖI CHÍ MẠNG: Đóng băng toàn bộ Vòng lặp Sự kiện, tê liệt hệ thống!</a:t>
-                      </a:r>
-                    </a:p>
-                  </a:txBody>
-                  <a:tcPr/>
-                </a:tc>
-                <a:tc>
-                  <a:txBody>
-                    <a:bodyPr/>
-                    <a:lstStyle/>
-                    <a:p>
-                      <a:pPr>
-                        <a:defRPr sz="950">
-                          <a:solidFill>
-                            <a:srgbClr val="1C1C1C"/>
-                          </a:solidFill>
-                          <a:latin typeface="Consolas"/>
-                        </a:defRPr>
-                      </a:pPr>
-                      <a:r>
-                        <a:t>async def get():</a:t>
-                      </a:r>
-                      <a:br/>
-                      <a:r>
-                        <a:t>  time.sleep(2) # ĐÓNG BĂNG!</a:t>
-                      </a:r>
-                      <a:br/>
-                      <a:r>
-                        <a:t>  return 'ok'</a:t>
-                      </a:r>
-                    </a:p>
-                  </a:txBody>
-                  <a:tcPr/>
-                </a:tc>
-              </a:tr>
-              <a:tr h="822960">
-                <a:tc>
-                  <a:txBody>
-                    <a:bodyPr/>
-                    <a:lstStyle/>
-                    <a:p>
-                      <a:pPr>
-                        <a:defRPr sz="1000" b="1">
-                          <a:solidFill>
-                            <a:srgbClr val="1C1C1C"/>
-                          </a:solidFill>
-                          <a:latin typeface="Arial"/>
-                        </a:defRPr>
-                      </a:pPr>
-                      <a:r>
-                        <a:t>4. Bất đồng bộ + Phi phong tỏa</a:t>
-                      </a:r>
-                      <a:br/>
-                      <a:r>
-                        <a:t>(Kiến trúc Chuẩn mực)</a:t>
-                      </a:r>
-                    </a:p>
-                  </a:txBody>
-                  <a:tcPr/>
-                </a:tc>
-                <a:tc>
-                  <a:txBody>
-                    <a:bodyPr/>
-                    <a:lstStyle/>
-                    <a:p>
-                      <a:pPr>
-                        <a:defRPr sz="1000">
-                          <a:solidFill>
-                            <a:srgbClr val="1C1C1C"/>
-                          </a:solidFill>
-                          <a:latin typeface="Arial"/>
-                        </a:defRPr>
-                      </a:pPr>
-                      <a:r>
-                        <a:t>Bên gọi nhận đối tượng tương lai ngay; luồng tự do phục vụ tiếp.</a:t>
-                      </a:r>
-                    </a:p>
-                  </a:txBody>
-                  <a:tcPr/>
-                </a:tc>
-                <a:tc>
-                  <a:txBody>
-                    <a:bodyPr/>
-                    <a:lstStyle/>
-                    <a:p>
-                      <a:pPr>
-                        <a:defRPr sz="1000">
-                          <a:solidFill>
-                            <a:srgbClr val="1C1C1C"/>
-                          </a:solidFill>
-                          <a:latin typeface="Arial"/>
-                        </a:defRPr>
-                      </a:pPr>
-                      <a:r>
-                        <a:t>Hiệu năng tối đa: 1 luồng phục vụ hàng vạn kết nối đồng thời mượt mà.</a:t>
-                      </a:r>
-                    </a:p>
-                  </a:txBody>
-                  <a:tcPr/>
-                </a:tc>
-                <a:tc>
-                  <a:txBody>
-                    <a:bodyPr/>
-                    <a:lstStyle/>
-                    <a:p>
-                      <a:pPr>
-                        <a:defRPr sz="950">
-                          <a:solidFill>
-                            <a:srgbClr val="1C1C1C"/>
-                          </a:solidFill>
-                          <a:latin typeface="Consolas"/>
-                        </a:defRPr>
-                      </a:pPr>
-                      <a:r>
-                        <a:t>async def get():</a:t>
-                      </a:r>
-                      <a:br/>
-                      <a:r>
-                        <a:t>  await asyncio.sleep(2)</a:t>
-                      </a:r>
-                      <a:br/>
-                      <a:r>
-                        <a:t>  return 'ok'</a:t>
-                      </a:r>
-                    </a:p>
-                  </a:txBody>
-                  <a:tcPr/>
-                </a:tc>
-              </a:tr>
-            </a:tbl>
-          </a:graphicData>
-        </a:graphic>
-      </p:graphicFrame>
-    </p:spTree>
-  </p:cSld>
-  <p:clrMapOvr>
-    <a:masterClrMapping/>
-  </p:clrMapOvr>
-</p:sld>
-</file>
-
-<file path=ppt/slides/slide18.xml><?xml version="1.0" encoding="utf-8"?>
-<p:sld xmlns:a="http://schemas.openxmlformats.org/drawingml/2006/main" xmlns:p="http://schemas.openxmlformats.org/presentationml/2006/main" xmlns:r="http://schemas.openxmlformats.org/officeDocument/2006/relationships">
-  <p:cSld>
-    <p:spTree>
-      <p:nvGrpSpPr>
-        <p:cNvPr id="1" name=""/>
-        <p:cNvGrpSpPr/>
-        <p:nvPr/>
-      </p:nvGrpSpPr>
-      <p:grpSpPr/>
-      <p:pic>
-        <p:nvPicPr>
-          <p:cNvPr id="2" name="Picture 1" descr="master_template_clean.png"/>
-          <p:cNvPicPr>
-            <a:picLocks noChangeAspect="1"/>
-          </p:cNvPicPr>
-          <p:nvPr/>
-        </p:nvPicPr>
-        <p:blipFill>
-          <a:blip r:embed="rId2"/>
-          <a:stretch>
-            <a:fillRect/>
-          </a:stretch>
-        </p:blipFill>
-        <p:spPr>
-          <a:xfrm>
-            <a:off x="0" y="0"/>
-            <a:ext cx="9144000" cy="6858000"/>
-          </a:xfrm>
-          <a:prstGeom prst="rect">
-            <a:avLst/>
-          </a:prstGeom>
-        </p:spPr>
-      </p:pic>
-      <p:sp>
-        <p:nvSpPr>
-          <p:cNvPr id="3" name="TextBox 2"/>
-          <p:cNvSpPr txBox="1"/>
-          <p:nvPr/>
-        </p:nvSpPr>
-        <p:spPr>
-          <a:xfrm>
-            <a:off x="182880" y="182880"/>
-            <a:ext cx="731520" cy="548640"/>
-          </a:xfrm>
-          <a:prstGeom prst="rect">
-            <a:avLst/>
-          </a:prstGeom>
-          <a:noFill/>
-        </p:spPr>
-        <p:txBody>
-          <a:bodyPr wrap="square">
-            <a:spAutoFit/>
-          </a:bodyPr>
-          <a:lstStyle/>
-          <a:p>
-            <a:pPr>
-              <a:defRPr sz="1800" b="1">
-                <a:solidFill>
-                  <a:srgbClr val="FFFFFF"/>
-                </a:solidFill>
-                <a:latin typeface="Arial"/>
-              </a:defRPr>
-            </a:pPr>
-            <a:r>
-              <a:t>18</a:t>
-            </a:r>
-          </a:p>
-        </p:txBody>
-      </p:sp>
-      <p:sp>
-        <p:nvSpPr>
-          <p:cNvPr id="4" name="TextBox 3"/>
-          <p:cNvSpPr txBox="1"/>
-          <p:nvPr/>
-        </p:nvSpPr>
-        <p:spPr>
-          <a:xfrm>
-            <a:off x="960120" y="6217920"/>
-            <a:ext cx="6858000" cy="457200"/>
-          </a:xfrm>
-          <a:prstGeom prst="rect">
-            <a:avLst/>
-          </a:prstGeom>
-          <a:noFill/>
-        </p:spPr>
-        <p:txBody>
-          <a:bodyPr wrap="square">
-            <a:spAutoFit/>
-          </a:bodyPr>
-          <a:lstStyle/>
-          <a:p>
-            <a:pPr>
-              <a:defRPr sz="1400" b="1">
-                <a:solidFill>
-                  <a:srgbClr val="1C1C1C"/>
-                </a:solidFill>
-                <a:latin typeface="Arial"/>
-              </a:defRPr>
-            </a:pPr>
-            <a:r>
-              <a:t>Lý thuyết Thực thi — Bốn Ngộ nhận Phổ biến</a:t>
-            </a:r>
-          </a:p>
-        </p:txBody>
-      </p:sp>
-      <p:sp>
-        <p:nvSpPr>
-          <p:cNvPr id="5" name="TextBox 4"/>
-          <p:cNvSpPr txBox="1"/>
-          <p:nvPr/>
-        </p:nvSpPr>
-        <p:spPr>
-          <a:xfrm>
-            <a:off x="365760" y="1234440"/>
-            <a:ext cx="8412480" cy="502920"/>
-          </a:xfrm>
-          <a:prstGeom prst="rect">
-            <a:avLst/>
-          </a:prstGeom>
-          <a:noFill/>
-        </p:spPr>
-        <p:txBody>
-          <a:bodyPr wrap="square" tIns="0" bIns="0">
-            <a:spAutoFit/>
-          </a:bodyPr>
-          <a:lstStyle/>
-          <a:p>
-            <a:pPr>
-              <a:defRPr sz="1850" b="1">
-                <a:solidFill>
-                  <a:srgbClr val="1C1C1C"/>
-                </a:solidFill>
-                <a:latin typeface="Arial"/>
-              </a:defRPr>
-            </a:pPr>
-            <a:r>
-              <a:t>Bốn Ngộ nhận Phổ biến trong Lập trình Đồng thời và Bất đồng bộ</a:t>
-            </a:r>
-          </a:p>
-        </p:txBody>
-      </p:sp>
-      <p:graphicFrame>
-        <p:nvGraphicFramePr>
-          <p:cNvPr id="6" name="Table 5"/>
-          <p:cNvGraphicFramePr>
-            <a:graphicFrameLocks noGrp="1"/>
-          </p:cNvGraphicFramePr>
-          <p:nvPr/>
-        </p:nvGraphicFramePr>
-        <p:xfrm>
-          <a:off x="365760" y="1874519"/>
-          <a:ext cx="8412480" cy="4114800"/>
-        </p:xfrm>
-        <a:graphic>
-          <a:graphicData uri="http://schemas.openxmlformats.org/drawingml/2006/table">
-            <a:tbl>
-              <a:tblPr firstRow="1" bandRow="1">
-                <a:tableStyleId>{5C22544A-7EE6-4342-B048-85BDC9FD1C3A}</a:tableStyleId>
-              </a:tblPr>
-              <a:tblGrid>
-                <a:gridCol w="2560320"/>
-                <a:gridCol w="2926080"/>
-                <a:gridCol w="2926080"/>
-              </a:tblGrid>
-              <a:tr h="822960">
-                <a:tc>
-                  <a:txBody>
-                    <a:bodyPr/>
-                    <a:lstStyle/>
-                    <a:p>
-                      <a:pPr>
-                        <a:defRPr sz="1100" b="1">
-                          <a:solidFill>
-                            <a:srgbClr val="FFFFFF"/>
-                          </a:solidFill>
-                          <a:latin typeface="Arial"/>
-                        </a:defRPr>
-                      </a:pPr>
-                      <a:r>
-                        <a:t>Ngộ nhận Phổ biến</a:t>
-                      </a:r>
-                    </a:p>
-                  </a:txBody>
-                  <a:tcPr>
-                    <a:solidFill>
-                      <a:srgbClr val="E74C3C"/>
+                      <a:srgbClr val="E04B3B"/>
                     </a:solidFill>
                   </a:tcPr>
                 </a:tc>
@@ -7060,8 +3855,8 @@
                     <a:bodyPr/>
                     <a:lstStyle/>
                     <a:p>
-                      <a:pPr>
-                        <a:defRPr sz="1100" b="1">
+                      <a:pPr algn="ctr">
+                        <a:defRPr sz="1200" b="1">
                           <a:solidFill>
                             <a:srgbClr val="FFFFFF"/>
                           </a:solidFill>
@@ -7069,13 +3864,43 @@
                         </a:defRPr>
                       </a:pPr>
                       <a:r>
-                        <a:t>Sự thật Kỹ thuật</a:t>
+                        <a:t>Bất đồng bộ</a:t>
+                      </a:r>
+                      <a:br/>
+                      <a:r>
+                        <a:t>(Asynchronous)</a:t>
                       </a:r>
                     </a:p>
                   </a:txBody>
                   <a:tcPr>
                     <a:solidFill>
-                      <a:srgbClr val="E74C3C"/>
+                      <a:srgbClr val="E04B3B"/>
+                    </a:solidFill>
+                  </a:tcPr>
+                </a:tc>
+              </a:tr>
+              <a:tr h="786384">
+                <a:tc>
+                  <a:txBody>
+                    <a:bodyPr/>
+                    <a:lstStyle/>
+                    <a:p>
+                      <a:pPr algn="l">
+                        <a:defRPr sz="1100" b="1">
+                          <a:solidFill>
+                            <a:srgbClr val="1C1C1C"/>
+                          </a:solidFill>
+                          <a:latin typeface="Arial"/>
+                        </a:defRPr>
+                      </a:pPr>
+                      <a:r>
+                        <a:t>Đơn vị điều phối</a:t>
+                      </a:r>
+                    </a:p>
+                  </a:txBody>
+                  <a:tcPr>
+                    <a:solidFill>
+                      <a:srgbClr val="FFFFFF"/>
                     </a:solidFill>
                   </a:tcPr>
                 </a:tc>
@@ -7084,34 +3909,8 @@
                     <a:bodyPr/>
                     <a:lstStyle/>
                     <a:p>
-                      <a:pPr>
-                        <a:defRPr sz="1100" b="1">
-                          <a:solidFill>
-                            <a:srgbClr val="FFFFFF"/>
-                          </a:solidFill>
-                          <a:latin typeface="Arial"/>
-                        </a:defRPr>
-                      </a:pPr>
-                      <a:r>
-                        <a:t>Bản chất Cơ chế</a:t>
-                      </a:r>
-                    </a:p>
-                  </a:txBody>
-                  <a:tcPr>
-                    <a:solidFill>
-                      <a:srgbClr val="E74C3C"/>
-                    </a:solidFill>
-                  </a:tcPr>
-                </a:tc>
-              </a:tr>
-              <a:tr h="822960">
-                <a:tc>
-                  <a:txBody>
-                    <a:bodyPr/>
-                    <a:lstStyle/>
-                    <a:p>
-                      <a:pPr>
-                        <a:defRPr sz="1000" b="1">
+                      <a:pPr algn="ctr">
+                        <a:defRPr sz="1100" b="0">
                           <a:solidFill>
                             <a:srgbClr val="1C1C1C"/>
                           </a:solidFill>
@@ -7119,19 +3918,23 @@
                         </a:defRPr>
                       </a:pPr>
                       <a:r>
-                        <a:t>Ngộ nhận 1: Chuyển sang bất đồng bộ chắc chắn giúp chương trình tính toán nhanh hơn.</a:t>
+                        <a:t>Chỉ thị lệnh (Instruction)</a:t>
                       </a:r>
                     </a:p>
                   </a:txBody>
-                  <a:tcPr/>
+                  <a:tcPr>
+                    <a:solidFill>
+                      <a:srgbClr val="FFFFFF"/>
+                    </a:solidFill>
+                  </a:tcPr>
                 </a:tc>
                 <a:tc>
                   <a:txBody>
                     <a:bodyPr/>
                     <a:lstStyle/>
                     <a:p>
-                      <a:pPr>
-                        <a:defRPr sz="1000">
+                      <a:pPr algn="ctr">
+                        <a:defRPr sz="1100" b="0">
                           <a:solidFill>
                             <a:srgbClr val="1C1C1C"/>
                           </a:solidFill>
@@ -7139,19 +3942,23 @@
                         </a:defRPr>
                       </a:pPr>
                       <a:r>
-                        <a:t>SAI. Bất đồng bộ không làm một phép tính nhanh hơn; chỉ giải phóng thời gian chờ Vào/Ra.</a:t>
+                        <a:t>Process / Thread</a:t>
                       </a:r>
                     </a:p>
                   </a:txBody>
-                  <a:tcPr/>
+                  <a:tcPr>
+                    <a:solidFill>
+                      <a:srgbClr val="FFFFFF"/>
+                    </a:solidFill>
+                  </a:tcPr>
                 </a:tc>
                 <a:tc>
                   <a:txBody>
                     <a:bodyPr/>
                     <a:lstStyle/>
                     <a:p>
-                      <a:pPr>
-                        <a:defRPr sz="1000">
+                      <a:pPr algn="ctr">
+                        <a:defRPr sz="1100" b="0">
                           <a:solidFill>
                             <a:srgbClr val="1C1C1C"/>
                           </a:solidFill>
@@ -7159,21 +3966,23 @@
                         </a:defRPr>
                       </a:pPr>
                       <a:r>
-                        <a:t>Với tác vụ nặng tính toán (CPU-bound), chi phí điều phối của vòng lặp sự kiện làm chậm hơn tuần tự.</a:t>
+                        <a:t>CPU Core vật lý</a:t>
                       </a:r>
                     </a:p>
                   </a:txBody>
-                  <a:tcPr/>
+                  <a:tcPr>
+                    <a:solidFill>
+                      <a:srgbClr val="FFFFFF"/>
+                    </a:solidFill>
+                  </a:tcPr>
                 </a:tc>
-              </a:tr>
-              <a:tr h="822960">
                 <a:tc>
                   <a:txBody>
                     <a:bodyPr/>
                     <a:lstStyle/>
                     <a:p>
-                      <a:pPr>
-                        <a:defRPr sz="1000" b="1">
+                      <a:pPr algn="ctr">
+                        <a:defRPr sz="1100" b="0">
                           <a:solidFill>
                             <a:srgbClr val="1C1C1C"/>
                           </a:solidFill>
@@ -7181,19 +3990,25 @@
                         </a:defRPr>
                       </a:pPr>
                       <a:r>
-                        <a:t>Ngộ nhận 2: Càng tăng nhiều đơn vị thực thi trong nhóm luồng thì tốc độ càng tăng.</a:t>
+                        <a:t>Coroutine / Task</a:t>
                       </a:r>
                     </a:p>
                   </a:txBody>
-                  <a:tcPr/>
+                  <a:tcPr>
+                    <a:solidFill>
+                      <a:srgbClr val="FFFFFF"/>
+                    </a:solidFill>
+                  </a:tcPr>
                 </a:tc>
+              </a:tr>
+              <a:tr h="786384">
                 <a:tc>
                   <a:txBody>
                     <a:bodyPr/>
                     <a:lstStyle/>
                     <a:p>
-                      <a:pPr>
-                        <a:defRPr sz="1000">
+                      <a:pPr algn="l">
+                        <a:defRPr sz="1100" b="1">
                           <a:solidFill>
                             <a:srgbClr val="1C1C1C"/>
                           </a:solidFill>
@@ -7201,19 +4016,23 @@
                         </a:defRPr>
                       </a:pPr>
                       <a:r>
-                        <a:t>SAI. Vượt quá số nhân vật lý của vi xử lý sẽ gây suy thoái hiệu năng nghiêm trọng.</a:t>
+                        <a:t>Yêu cầu phần cứng</a:t>
                       </a:r>
                     </a:p>
                   </a:txBody>
-                  <a:tcPr/>
+                  <a:tcPr>
+                    <a:solidFill>
+                      <a:srgbClr val="F5F7FA"/>
+                    </a:solidFill>
+                  </a:tcPr>
                 </a:tc>
                 <a:tc>
                   <a:txBody>
                     <a:bodyPr/>
                     <a:lstStyle/>
                     <a:p>
-                      <a:pPr>
-                        <a:defRPr sz="1000">
+                      <a:pPr algn="ctr">
+                        <a:defRPr sz="1100" b="0">
                           <a:solidFill>
                             <a:srgbClr val="1C1C1C"/>
                           </a:solidFill>
@@ -7221,21 +4040,23 @@
                         </a:defRPr>
                       </a:pPr>
                       <a:r>
-                        <a:t>Hiện tượng cấp phát vượt ngưỡng: Hệ điều hành mất phần lớn thời gian cho việc hoán đổi ngữ cảnh.</a:t>
+                        <a:t>≥ 1 Core bất kỳ</a:t>
                       </a:r>
                     </a:p>
                   </a:txBody>
-                  <a:tcPr/>
+                  <a:tcPr>
+                    <a:solidFill>
+                      <a:srgbClr val="F5F7FA"/>
+                    </a:solidFill>
+                  </a:tcPr>
                 </a:tc>
-              </a:tr>
-              <a:tr h="822960">
                 <a:tc>
                   <a:txBody>
                     <a:bodyPr/>
                     <a:lstStyle/>
                     <a:p>
-                      <a:pPr>
-                        <a:defRPr sz="1000" b="1">
+                      <a:pPr algn="ctr">
+                        <a:defRPr sz="1100" b="0">
                           <a:solidFill>
                             <a:srgbClr val="1C1C1C"/>
                           </a:solidFill>
@@ -7243,19 +4064,23 @@
                         </a:defRPr>
                       </a:pPr>
                       <a:r>
-                        <a:t>Ngộ nhận 3: Bất đồng bộ chạy trên một luồng nên hoàn toàn không xảy ra tranh chấp dữ liệu.</a:t>
+                        <a:t>≥ 1 Core (Time-slicing)</a:t>
                       </a:r>
                     </a:p>
                   </a:txBody>
-                  <a:tcPr/>
+                  <a:tcPr>
+                    <a:solidFill>
+                      <a:srgbClr val="F5F7FA"/>
+                    </a:solidFill>
+                  </a:tcPr>
                 </a:tc>
                 <a:tc>
                   <a:txBody>
                     <a:bodyPr/>
                     <a:lstStyle/>
                     <a:p>
-                      <a:pPr>
-                        <a:defRPr sz="1000">
+                      <a:pPr algn="ctr">
+                        <a:defRPr sz="1100" b="0">
                           <a:solidFill>
                             <a:srgbClr val="1C1C1C"/>
                           </a:solidFill>
@@ -7263,19 +4088,23 @@
                         </a:defRPr>
                       </a:pPr>
                       <a:r>
-                        <a:t>SAI HOÀN TOÀN. Hiện tượng tranh chấp dữ liệu vẫn xảy ra ở tầng ứng dụng tại các điểm await.</a:t>
+                        <a:t>Đa nhân (Multi-core &gt; 1)</a:t>
                       </a:r>
                     </a:p>
                   </a:txBody>
-                  <a:tcPr/>
+                  <a:tcPr>
+                    <a:solidFill>
+                      <a:srgbClr val="F5F7FA"/>
+                    </a:solidFill>
+                  </a:tcPr>
                 </a:tc>
                 <a:tc>
                   <a:txBody>
                     <a:bodyPr/>
                     <a:lstStyle/>
                     <a:p>
-                      <a:pPr>
-                        <a:defRPr sz="1000">
+                      <a:pPr algn="ctr">
+                        <a:defRPr sz="1100" b="0">
                           <a:solidFill>
                             <a:srgbClr val="1C1C1C"/>
                           </a:solidFill>
@@ -7283,21 +4112,25 @@
                         </a:defRPr>
                       </a:pPr>
                       <a:r>
-                        <a:t>Hai hàm đồng quy cùng đọc trạng thái, cùng nhường quyền tại await và cùng ghi đè làm sai lệch dữ liệu.</a:t>
+                        <a:t>≥ 1 Core (Single-thread)</a:t>
                       </a:r>
                     </a:p>
                   </a:txBody>
-                  <a:tcPr/>
+                  <a:tcPr>
+                    <a:solidFill>
+                      <a:srgbClr val="F5F7FA"/>
+                    </a:solidFill>
+                  </a:tcPr>
                 </a:tc>
               </a:tr>
-              <a:tr h="822960">
+              <a:tr h="786384">
                 <a:tc>
                   <a:txBody>
                     <a:bodyPr/>
                     <a:lstStyle/>
                     <a:p>
-                      <a:pPr>
-                        <a:defRPr sz="1000" b="1">
+                      <a:pPr algn="l">
+                        <a:defRPr sz="1100" b="1">
                           <a:solidFill>
                             <a:srgbClr val="1C1C1C"/>
                           </a:solidFill>
@@ -7305,19 +4138,23 @@
                         </a:defRPr>
                       </a:pPr>
                       <a:r>
-                        <a:t>Ngộ nhận 4: Bất đồng bộ trên một máy tính tương đương với một hệ thống phân tán.</a:t>
+                        <a:t>Khi gặp I/O chờ</a:t>
                       </a:r>
                     </a:p>
                   </a:txBody>
-                  <a:tcPr/>
+                  <a:tcPr>
+                    <a:solidFill>
+                      <a:srgbClr val="FFFFFF"/>
+                    </a:solidFill>
+                  </a:tcPr>
                 </a:tc>
                 <a:tc>
                   <a:txBody>
                     <a:bodyPr/>
                     <a:lstStyle/>
                     <a:p>
-                      <a:pPr>
-                        <a:defRPr sz="1000">
+                      <a:pPr algn="ctr">
+                        <a:defRPr sz="1100" b="0">
                           <a:solidFill>
                             <a:srgbClr val="1C1C1C"/>
                           </a:solidFill>
@@ -7325,19 +4162,23 @@
                         </a:defRPr>
                       </a:pPr>
                       <a:r>
-                        <a:t>SAI VỀ BẢN CHẤT KIẾN TRÚC. Đây là hai mô hình tính toán hoàn toàn khác biệt.</a:t>
+                        <a:t>Nghẽn hoàn toàn (Block)</a:t>
                       </a:r>
                     </a:p>
                   </a:txBody>
-                  <a:tcPr/>
+                  <a:tcPr>
+                    <a:solidFill>
+                      <a:srgbClr val="FFFFFF"/>
+                    </a:solidFill>
+                  </a:tcPr>
                 </a:tc>
                 <a:tc>
                   <a:txBody>
                     <a:bodyPr/>
                     <a:lstStyle/>
                     <a:p>
-                      <a:pPr>
-                        <a:defRPr sz="1000">
+                      <a:pPr algn="ctr">
+                        <a:defRPr sz="1100" b="0">
                           <a:solidFill>
                             <a:srgbClr val="1C1C1C"/>
                           </a:solidFill>
@@ -7345,270 +4186,191 @@
                         </a:defRPr>
                       </a:pPr>
                       <a:r>
-                        <a:t>Trên một máy tính luôn dùng chung một không gian bộ nhớ vật lý, không có độ trễ phân mảnh đường truyền mạng.</a:t>
+                        <a:t>HĐH chuyển ngữ cảnh</a:t>
                       </a:r>
                     </a:p>
                   </a:txBody>
-                  <a:tcPr/>
+                  <a:tcPr>
+                    <a:solidFill>
+                      <a:srgbClr val="FFFFFF"/>
+                    </a:solidFill>
+                  </a:tcPr>
+                </a:tc>
+                <a:tc>
+                  <a:txBody>
+                    <a:bodyPr/>
+                    <a:lstStyle/>
+                    <a:p>
+                      <a:pPr algn="ctr">
+                        <a:defRPr sz="1100" b="0">
+                          <a:solidFill>
+                            <a:srgbClr val="1C1C1C"/>
+                          </a:solidFill>
+                          <a:latin typeface="Arial"/>
+                        </a:defRPr>
+                      </a:pPr>
+                      <a:r>
+                        <a:t>Core khác vẫn chạy</a:t>
+                      </a:r>
+                    </a:p>
+                  </a:txBody>
+                  <a:tcPr>
+                    <a:solidFill>
+                      <a:srgbClr val="FFFFFF"/>
+                    </a:solidFill>
+                  </a:tcPr>
+                </a:tc>
+                <a:tc>
+                  <a:txBody>
+                    <a:bodyPr/>
+                    <a:lstStyle/>
+                    <a:p>
+                      <a:pPr algn="ctr">
+                        <a:defRPr sz="1100" b="0">
+                          <a:solidFill>
+                            <a:srgbClr val="1C1C1C"/>
+                          </a:solidFill>
+                          <a:latin typeface="Arial"/>
+                        </a:defRPr>
+                      </a:pPr>
+                      <a:r>
+                        <a:t>Tạm nhường quyền (Yield)</a:t>
+                      </a:r>
+                    </a:p>
+                  </a:txBody>
+                  <a:tcPr>
+                    <a:solidFill>
+                      <a:srgbClr val="FFFFFF"/>
+                    </a:solidFill>
+                  </a:tcPr>
+                </a:tc>
+              </a:tr>
+              <a:tr h="786384">
+                <a:tc>
+                  <a:txBody>
+                    <a:bodyPr/>
+                    <a:lstStyle/>
+                    <a:p>
+                      <a:pPr algn="l">
+                        <a:defRPr sz="1100" b="1">
+                          <a:solidFill>
+                            <a:srgbClr val="1C1C1C"/>
+                          </a:solidFill>
+                          <a:latin typeface="Arial"/>
+                        </a:defRPr>
+                      </a:pPr>
+                      <a:r>
+                        <a:t>Phù hợp bài toán</a:t>
+                      </a:r>
+                    </a:p>
+                  </a:txBody>
+                  <a:tcPr>
+                    <a:solidFill>
+                      <a:srgbClr val="F5F7FA"/>
+                    </a:solidFill>
+                  </a:tcPr>
+                </a:tc>
+                <a:tc>
+                  <a:txBody>
+                    <a:bodyPr/>
+                    <a:lstStyle/>
+                    <a:p>
+                      <a:pPr algn="ctr">
+                        <a:defRPr sz="1100" b="0">
+                          <a:solidFill>
+                            <a:srgbClr val="1C1C1C"/>
+                          </a:solidFill>
+                          <a:latin typeface="Arial"/>
+                        </a:defRPr>
+                      </a:pPr>
+                      <a:r>
+                        <a:t>Tuần tự, đơn giản</a:t>
+                      </a:r>
+                    </a:p>
+                  </a:txBody>
+                  <a:tcPr>
+                    <a:solidFill>
+                      <a:srgbClr val="F5F7FA"/>
+                    </a:solidFill>
+                  </a:tcPr>
+                </a:tc>
+                <a:tc>
+                  <a:txBody>
+                    <a:bodyPr/>
+                    <a:lstStyle/>
+                    <a:p>
+                      <a:pPr algn="ctr">
+                        <a:defRPr sz="1100" b="0">
+                          <a:solidFill>
+                            <a:srgbClr val="1C1C1C"/>
+                          </a:solidFill>
+                          <a:latin typeface="Arial"/>
+                        </a:defRPr>
+                      </a:pPr>
+                      <a:r>
+                        <a:t>I/O blocking đa luồng</a:t>
+                      </a:r>
+                    </a:p>
+                  </a:txBody>
+                  <a:tcPr>
+                    <a:solidFill>
+                      <a:srgbClr val="F5F7FA"/>
+                    </a:solidFill>
+                  </a:tcPr>
+                </a:tc>
+                <a:tc>
+                  <a:txBody>
+                    <a:bodyPr/>
+                    <a:lstStyle/>
+                    <a:p>
+                      <a:pPr algn="ctr">
+                        <a:defRPr sz="1100" b="0">
+                          <a:solidFill>
+                            <a:srgbClr val="1C1C1C"/>
+                          </a:solidFill>
+                          <a:latin typeface="Arial"/>
+                        </a:defRPr>
+                      </a:pPr>
+                      <a:r>
+                        <a:t>CPU-bound nặng</a:t>
+                      </a:r>
+                    </a:p>
+                  </a:txBody>
+                  <a:tcPr>
+                    <a:solidFill>
+                      <a:srgbClr val="F5F7FA"/>
+                    </a:solidFill>
+                  </a:tcPr>
+                </a:tc>
+                <a:tc>
+                  <a:txBody>
+                    <a:bodyPr/>
+                    <a:lstStyle/>
+                    <a:p>
+                      <a:pPr algn="ctr">
+                        <a:defRPr sz="1100" b="0">
+                          <a:solidFill>
+                            <a:srgbClr val="1C1C1C"/>
+                          </a:solidFill>
+                          <a:latin typeface="Arial"/>
+                        </a:defRPr>
+                      </a:pPr>
+                      <a:r>
+                        <a:t>I/O-bound nhiều kết nối</a:t>
+                      </a:r>
+                    </a:p>
+                  </a:txBody>
+                  <a:tcPr>
+                    <a:solidFill>
+                      <a:srgbClr val="F5F7FA"/>
+                    </a:solidFill>
+                  </a:tcPr>
                 </a:tc>
               </a:tr>
             </a:tbl>
           </a:graphicData>
         </a:graphic>
       </p:graphicFrame>
-    </p:spTree>
-  </p:cSld>
-  <p:clrMapOvr>
-    <a:masterClrMapping/>
-  </p:clrMapOvr>
-</p:sld>
-</file>
-
-<file path=ppt/slides/slide19.xml><?xml version="1.0" encoding="utf-8"?>
-<p:sld xmlns:a="http://schemas.openxmlformats.org/drawingml/2006/main" xmlns:p="http://schemas.openxmlformats.org/presentationml/2006/main" xmlns:r="http://schemas.openxmlformats.org/officeDocument/2006/relationships">
-  <p:cSld>
-    <p:spTree>
-      <p:nvGrpSpPr>
-        <p:cNvPr id="1" name=""/>
-        <p:cNvGrpSpPr/>
-        <p:nvPr/>
-      </p:nvGrpSpPr>
-      <p:grpSpPr/>
-      <p:pic>
-        <p:nvPicPr>
-          <p:cNvPr id="2" name="Picture 1" descr="master_template_clean.png"/>
-          <p:cNvPicPr>
-            <a:picLocks noChangeAspect="1"/>
-          </p:cNvPicPr>
-          <p:nvPr/>
-        </p:nvPicPr>
-        <p:blipFill>
-          <a:blip r:embed="rId2"/>
-          <a:stretch>
-            <a:fillRect/>
-          </a:stretch>
-        </p:blipFill>
-        <p:spPr>
-          <a:xfrm>
-            <a:off x="0" y="0"/>
-            <a:ext cx="9144000" cy="6858000"/>
-          </a:xfrm>
-          <a:prstGeom prst="rect">
-            <a:avLst/>
-          </a:prstGeom>
-        </p:spPr>
-      </p:pic>
-      <p:sp>
-        <p:nvSpPr>
-          <p:cNvPr id="3" name="TextBox 2"/>
-          <p:cNvSpPr txBox="1"/>
-          <p:nvPr/>
-        </p:nvSpPr>
-        <p:spPr>
-          <a:xfrm>
-            <a:off x="182880" y="182880"/>
-            <a:ext cx="731520" cy="548640"/>
-          </a:xfrm>
-          <a:prstGeom prst="rect">
-            <a:avLst/>
-          </a:prstGeom>
-          <a:noFill/>
-        </p:spPr>
-        <p:txBody>
-          <a:bodyPr wrap="square">
-            <a:spAutoFit/>
-          </a:bodyPr>
-          <a:lstStyle/>
-          <a:p>
-            <a:pPr>
-              <a:defRPr sz="1800" b="1">
-                <a:solidFill>
-                  <a:srgbClr val="FFFFFF"/>
-                </a:solidFill>
-                <a:latin typeface="Arial"/>
-              </a:defRPr>
-            </a:pPr>
-            <a:r>
-              <a:t>19</a:t>
-            </a:r>
-          </a:p>
-        </p:txBody>
-      </p:sp>
-      <p:sp>
-        <p:nvSpPr>
-          <p:cNvPr id="4" name="TextBox 3"/>
-          <p:cNvSpPr txBox="1"/>
-          <p:nvPr/>
-        </p:nvSpPr>
-        <p:spPr>
-          <a:xfrm>
-            <a:off x="960120" y="6217920"/>
-            <a:ext cx="6858000" cy="457200"/>
-          </a:xfrm>
-          <a:prstGeom prst="rect">
-            <a:avLst/>
-          </a:prstGeom>
-          <a:noFill/>
-        </p:spPr>
-        <p:txBody>
-          <a:bodyPr wrap="square">
-            <a:spAutoFit/>
-          </a:bodyPr>
-          <a:lstStyle/>
-          <a:p>
-            <a:pPr>
-              <a:defRPr sz="1400" b="1">
-                <a:solidFill>
-                  <a:srgbClr val="1C1C1C"/>
-                </a:solidFill>
-                <a:latin typeface="Arial"/>
-              </a:defRPr>
-            </a:pPr>
-            <a:r>
-              <a:t>Tổng kết Lý thuyết &amp; Định hướng Thực hành với Python</a:t>
-            </a:r>
-          </a:p>
-        </p:txBody>
-      </p:sp>
-      <p:sp>
-        <p:nvSpPr>
-          <p:cNvPr id="5" name="TextBox 4"/>
-          <p:cNvSpPr txBox="1"/>
-          <p:nvPr/>
-        </p:nvSpPr>
-        <p:spPr>
-          <a:xfrm>
-            <a:off x="365760" y="1234440"/>
-            <a:ext cx="8412480" cy="502920"/>
-          </a:xfrm>
-          <a:prstGeom prst="rect">
-            <a:avLst/>
-          </a:prstGeom>
-          <a:noFill/>
-        </p:spPr>
-        <p:txBody>
-          <a:bodyPr wrap="square" tIns="0" bIns="0">
-            <a:spAutoFit/>
-          </a:bodyPr>
-          <a:lstStyle/>
-          <a:p>
-            <a:pPr>
-              <a:defRPr sz="1850" b="1">
-                <a:solidFill>
-                  <a:srgbClr val="1C1C1C"/>
-                </a:solidFill>
-                <a:latin typeface="Arial"/>
-              </a:defRPr>
-            </a:pPr>
-            <a:r>
-              <a:t>Tổng kết Khung Kiến trúc Tính toán &amp; Cầu nối Thực hành Python</a:t>
-            </a:r>
-          </a:p>
-        </p:txBody>
-      </p:sp>
-      <p:sp>
-        <p:nvSpPr>
-          <p:cNvPr id="6" name="TextBox 5"/>
-          <p:cNvSpPr txBox="1"/>
-          <p:nvPr/>
-        </p:nvSpPr>
-        <p:spPr>
-          <a:xfrm>
-            <a:off x="365760" y="1874519"/>
-            <a:ext cx="8412480" cy="4114800"/>
-          </a:xfrm>
-          <a:prstGeom prst="rect">
-            <a:avLst/>
-          </a:prstGeom>
-          <a:noFill/>
-        </p:spPr>
-        <p:txBody>
-          <a:bodyPr wrap="square">
-            <a:spAutoFit/>
-          </a:bodyPr>
-          <a:lstStyle/>
-          <a:p>
-            <a:pPr>
-              <a:spcAft>
-                <a:spcPts val="600"/>
-              </a:spcAft>
-              <a:defRPr sz="1400" b="1">
-                <a:solidFill>
-                  <a:srgbClr val="E74C3C"/>
-                </a:solidFill>
-                <a:latin typeface="Arial"/>
-              </a:defRPr>
-            </a:pPr>
-            <a:r>
-              <a:t>• Khái quát Khung Lý thuyết &amp; Kim chỉ nam Thiết kế Hệ thống:</a:t>
-            </a:r>
-          </a:p>
-          <a:p>
-            <a:pPr>
-              <a:spcAft>
-                <a:spcPts val="1000"/>
-              </a:spcAft>
-              <a:defRPr sz="1300">
-                <a:solidFill>
-                  <a:srgbClr val="1C1C1C"/>
-                </a:solidFill>
-                <a:latin typeface="Arial"/>
-              </a:defRPr>
-            </a:pPr>
-            <a:r>
-              <a:t>• Phân định rõ ràng bốn mô hình: Tuần tự (đơn tuyến tính), Đồng thời (phân chia lát cắt thời gian), Song song (đa nhân vật lý thực thụ) và Bất đồng bộ (hướng sự kiện phi phong tỏa).</a:t>
-            </a:r>
-          </a:p>
-          <a:p>
-            <a:pPr>
-              <a:spcAft>
-                <a:spcPts val="1000"/>
-              </a:spcAft>
-              <a:defRPr sz="1300">
-                <a:solidFill>
-                  <a:srgbClr val="1C1C1C"/>
-                </a:solidFill>
-                <a:latin typeface="Arial"/>
-              </a:defRPr>
-            </a:pPr>
-            <a:r>
-              <a:t>• Xác định đúng trọng tâm bài toán kỹ thuật: Tác vụ nghẽn vi xử lý (CPU-bound) cần giải phóng qua Đa tiến trình (Multiprocessing); Tác vụ nghẽn đường truyền mạng hoặc ổ đĩa (I/O-bound) cần tối ưu qua Hàm đồng quy và Vòng lặp sự kiện (Asyncio).</a:t>
-            </a:r>
-          </a:p>
-          <a:p>
-            <a:pPr>
-              <a:spcAft>
-                <a:spcPts val="1000"/>
-              </a:spcAft>
-              <a:defRPr sz="1300">
-                <a:solidFill>
-                  <a:srgbClr val="1C1C1C"/>
-                </a:solidFill>
-                <a:latin typeface="Arial"/>
-              </a:defRPr>
-            </a:pPr>
-            <a:r>
-              <a:t>• Phân biệt tầng kiến trúc: Ranh giới bản chất giữa Lập lịch ưu tiên của Nhân hệ điều hành (Kernel Preemption) và Lập lịch hợp tác ở Không gian người dùng (User-space Cooperative Scheduling).</a:t>
-            </a:r>
-          </a:p>
-          <a:p>
-            <a:pPr>
-              <a:spcAft>
-                <a:spcPts val="1000"/>
-              </a:spcAft>
-              <a:defRPr sz="1300">
-                <a:solidFill>
-                  <a:srgbClr val="1C1C1C"/>
-                </a:solidFill>
-                <a:latin typeface="Arial"/>
-              </a:defRPr>
-            </a:pPr>
-            <a:r>
-              <a:t>• Cầu nối sang kỹ thuật thực thi: Nền tảng lý thuyết này mở đường trực tiếp sang triển khai thực tế trên Python thông qua module concurrent.futures (ThreadPoolExecutor, ProcessPoolExecutor) và thư viện chuẩn asyncio.</a:t>
-            </a:r>
-          </a:p>
-        </p:txBody>
-      </p:sp>
     </p:spTree>
   </p:cSld>
   <p:clrMapOvr>
@@ -7659,8 +4421,8 @@
         </p:nvSpPr>
         <p:spPr>
           <a:xfrm>
-            <a:off x="182880" y="182880"/>
-            <a:ext cx="731520" cy="548640"/>
+            <a:off x="164592" y="6217920"/>
+            <a:ext cx="484632" cy="484632"/>
           </a:xfrm>
           <a:prstGeom prst="rect">
             <a:avLst/>
@@ -7668,12 +4430,12 @@
           <a:noFill/>
         </p:spPr>
         <p:txBody>
-          <a:bodyPr wrap="square">
+          <a:bodyPr wrap="none" lIns="0" rIns="0" tIns="73152" bIns="0">
             <a:spAutoFit/>
           </a:bodyPr>
           <a:lstStyle/>
           <a:p>
-            <a:pPr>
+            <a:pPr algn="ctr">
               <a:defRPr sz="1800" b="1">
                 <a:solidFill>
                   <a:srgbClr val="FFFFFF"/>
@@ -7696,7 +4458,7 @@
         <p:spPr>
           <a:xfrm>
             <a:off x="960120" y="6217920"/>
-            <a:ext cx="6858000" cy="457200"/>
+            <a:ext cx="5669280" cy="457200"/>
           </a:xfrm>
           <a:prstGeom prst="rect">
             <a:avLst/>
@@ -7704,13 +4466,13 @@
           <a:noFill/>
         </p:spPr>
         <p:txBody>
-          <a:bodyPr wrap="square">
+          <a:bodyPr wrap="none" lIns="0" tIns="73152">
             <a:spAutoFit/>
           </a:bodyPr>
           <a:lstStyle/>
           <a:p>
             <a:pPr>
-              <a:defRPr sz="1400" b="1">
+              <a:defRPr sz="1600" b="1">
                 <a:solidFill>
                   <a:srgbClr val="1C1C1C"/>
                 </a:solidFill>
@@ -7718,7 +4480,7 @@
               </a:defRPr>
             </a:pPr>
             <a:r>
-              <a:t>Nguyên lý Phân định: Xử lý Đồng thời và Xử lý Song song</a:t>
+              <a:t>Sequential - Tuần tự</a:t>
             </a:r>
           </a:p>
         </p:txBody>
@@ -7731,8 +4493,8 @@
         </p:nvSpPr>
         <p:spPr>
           <a:xfrm>
-            <a:off x="365760" y="1234440"/>
-            <a:ext cx="8412480" cy="502920"/>
+            <a:off x="365760" y="1463040"/>
+            <a:ext cx="8412480" cy="1828800"/>
           </a:xfrm>
           <a:prstGeom prst="rect">
             <a:avLst/>
@@ -7740,68 +4502,48 @@
           <a:noFill/>
         </p:spPr>
         <p:txBody>
-          <a:bodyPr wrap="square" tIns="0" bIns="0">
-            <a:spAutoFit/>
-          </a:bodyPr>
-          <a:lstStyle/>
-          <a:p>
-            <a:pPr>
-              <a:defRPr sz="1850" b="1">
-                <a:solidFill>
-                  <a:srgbClr val="1C1C1C"/>
-                </a:solidFill>
-                <a:latin typeface="Arial"/>
-              </a:defRPr>
-            </a:pPr>
-            <a:r>
-              <a:t>Phân định Bản chất: Xử lý Đồng thời khác biệt với Xử lý Song song</a:t>
-            </a:r>
-          </a:p>
-        </p:txBody>
-      </p:sp>
-      <p:sp>
-        <p:nvSpPr>
-          <p:cNvPr id="6" name="TextBox 5"/>
-          <p:cNvSpPr txBox="1"/>
-          <p:nvPr/>
-        </p:nvSpPr>
-        <p:spPr>
-          <a:xfrm>
-            <a:off x="365760" y="1783080"/>
-            <a:ext cx="8412480" cy="1737360"/>
-          </a:xfrm>
-          <a:prstGeom prst="rect">
-            <a:avLst/>
-          </a:prstGeom>
-          <a:noFill/>
-        </p:spPr>
-        <p:txBody>
           <a:bodyPr wrap="square">
             <a:spAutoFit/>
           </a:bodyPr>
           <a:lstStyle/>
+          <a:p>
+            <a:pPr>
+              <a:spcAft>
+                <a:spcPts val="800"/>
+              </a:spcAft>
+              <a:defRPr sz="2100" b="1">
+                <a:solidFill>
+                  <a:srgbClr val="1C1C1C"/>
+                </a:solidFill>
+                <a:latin typeface="Arial"/>
+              </a:defRPr>
+            </a:pPr>
+            <a:r>
+              <a:t>➢ Xử lý tuần tự</a:t>
+            </a:r>
+          </a:p>
           <a:p>
             <a:pPr>
               <a:spcAft>
                 <a:spcPts val="600"/>
               </a:spcAft>
-              <a:defRPr sz="1350" b="1">
-                <a:solidFill>
-                  <a:srgbClr val="E74C3C"/>
+              <a:defRPr sz="1700">
+                <a:solidFill>
+                  <a:srgbClr val="1C1C1C"/>
                 </a:solidFill>
                 <a:latin typeface="Arial"/>
               </a:defRPr>
             </a:pPr>
             <a:r>
-              <a:t>• Luận điểm kinh điển (Rob Pike, 2012): "Đồng thời là giải quyết nhiều việc cùng lúc; Song song là thực hiện nhiều việc tại cùng một thời điểm."</a:t>
+              <a:t>□ Xử lý 1 tác vụ (task) trong một khoảng thời gian;</a:t>
             </a:r>
           </a:p>
           <a:p>
             <a:pPr>
               <a:spcAft>
-                <a:spcPts val="400"/>
+                <a:spcPts val="600"/>
               </a:spcAft>
-              <a:defRPr sz="1300">
+              <a:defRPr sz="1700">
                 <a:solidFill>
                   <a:srgbClr val="1C1C1C"/>
                 </a:solidFill>
@@ -7809,15 +4551,12 @@
               </a:defRPr>
             </a:pPr>
             <a:r>
-              <a:t>• Đồng thời là về CẤU TRÚC: Phân rã bài toán thành các phân hệ độc lập có thể điều phối và tiến triển đan xen.</a:t>
+              <a:t>□ Các task sẽ được thực thi theo thứ tự (nối tiếp nhau);</a:t>
             </a:r>
           </a:p>
           <a:p>
             <a:pPr>
-              <a:spcAft>
-                <a:spcPts val="400"/>
-              </a:spcAft>
-              <a:defRPr sz="1300">
+              <a:defRPr sz="1700">
                 <a:solidFill>
                   <a:srgbClr val="1C1C1C"/>
                 </a:solidFill>
@@ -7825,30 +4564,14 @@
               </a:defRPr>
             </a:pPr>
             <a:r>
-              <a:t>• Song song là về THỰC THI: Vận hành đồng thời nhiều phép tính trên các mạch phần cứng vật lý độc lập.</a:t>
-            </a:r>
-          </a:p>
-          <a:p>
-            <a:pPr>
-              <a:spcAft>
-                <a:spcPts val="400"/>
-              </a:spcAft>
-              <a:defRPr sz="1300">
-                <a:solidFill>
-                  <a:srgbClr val="1C1C1C"/>
-                </a:solidFill>
-                <a:latin typeface="Arial"/>
-              </a:defRPr>
-            </a:pPr>
-            <a:r>
-              <a:t>• Ý nghĩa kiến trúc: Một chương trình có thể đạt tính đồng thời cao trên hệ thống chỉ có một bộ vi xử lý đơn nhân.</a:t>
+              <a:t>□ Các chỉ thị lệnh được thực thi trên cùng 1 CPU; tại một thời điểm chỉ có 1 chỉ thị lệnh được thực thi.</a:t>
             </a:r>
           </a:p>
         </p:txBody>
       </p:sp>
       <p:pic>
         <p:nvPicPr>
-          <p:cNvPr id="7" name="Picture 6" descr="Parallelism_vs_concurrency.png"/>
+          <p:cNvPr id="6" name="Picture 5" descr="slide_2_img_2_31.png"/>
           <p:cNvPicPr>
             <a:picLocks noChangeAspect="1"/>
           </p:cNvPicPr>
@@ -7862,8 +4585,32 @@
         </p:blipFill>
         <p:spPr>
           <a:xfrm>
-            <a:off x="365760" y="3566160"/>
-            <a:ext cx="8412480" cy="2377440"/>
+            <a:off x="365760" y="3931920"/>
+            <a:ext cx="3931920" cy="1920240"/>
+          </a:xfrm>
+          <a:prstGeom prst="rect">
+            <a:avLst/>
+          </a:prstGeom>
+        </p:spPr>
+      </p:pic>
+      <p:pic>
+        <p:nvPicPr>
+          <p:cNvPr id="7" name="Picture 6" descr="slide_2_img_1_30.png"/>
+          <p:cNvPicPr>
+            <a:picLocks noChangeAspect="1"/>
+          </p:cNvPicPr>
+          <p:nvPr/>
+        </p:nvPicPr>
+        <p:blipFill>
+          <a:blip r:embed="rId4"/>
+          <a:stretch>
+            <a:fillRect/>
+          </a:stretch>
+        </p:blipFill>
+        <p:spPr>
+          <a:xfrm>
+            <a:off x="4663440" y="4023360"/>
+            <a:ext cx="4114800" cy="1645920"/>
           </a:xfrm>
           <a:prstGeom prst="rect">
             <a:avLst/>
@@ -7920,8 +4667,8 @@
         </p:nvSpPr>
         <p:spPr>
           <a:xfrm>
-            <a:off x="182880" y="182880"/>
-            <a:ext cx="731520" cy="548640"/>
+            <a:off x="164592" y="6217920"/>
+            <a:ext cx="484632" cy="484632"/>
           </a:xfrm>
           <a:prstGeom prst="rect">
             <a:avLst/>
@@ -7929,12 +4676,12 @@
           <a:noFill/>
         </p:spPr>
         <p:txBody>
-          <a:bodyPr wrap="square">
+          <a:bodyPr wrap="none" lIns="0" rIns="0" tIns="73152" bIns="0">
             <a:spAutoFit/>
           </a:bodyPr>
           <a:lstStyle/>
           <a:p>
-            <a:pPr>
+            <a:pPr algn="ctr">
               <a:defRPr sz="1800" b="1">
                 <a:solidFill>
                   <a:srgbClr val="FFFFFF"/>
@@ -7957,7 +4704,7 @@
         <p:spPr>
           <a:xfrm>
             <a:off x="960120" y="6217920"/>
-            <a:ext cx="6858000" cy="457200"/>
+            <a:ext cx="5669280" cy="457200"/>
           </a:xfrm>
           <a:prstGeom prst="rect">
             <a:avLst/>
@@ -7965,13 +4712,13 @@
           <a:noFill/>
         </p:spPr>
         <p:txBody>
-          <a:bodyPr wrap="square">
+          <a:bodyPr wrap="none" lIns="0" tIns="73152">
             <a:spAutoFit/>
           </a:bodyPr>
           <a:lstStyle/>
           <a:p>
             <a:pPr>
-              <a:defRPr sz="1400" b="1">
+              <a:defRPr sz="1600" b="1">
                 <a:solidFill>
                   <a:srgbClr val="1C1C1C"/>
                 </a:solidFill>
@@ -7979,7 +4726,7 @@
               </a:defRPr>
             </a:pPr>
             <a:r>
-              <a:t>Lý thuyết Hệ điều hành — Khái niệm và Cấu trúc Tiến trình</a:t>
+              <a:t>Concurrency - Đồng thời</a:t>
             </a:r>
           </a:p>
         </p:txBody>
@@ -7992,8 +4739,8 @@
         </p:nvSpPr>
         <p:spPr>
           <a:xfrm>
-            <a:off x="365760" y="1234440"/>
-            <a:ext cx="8412480" cy="502920"/>
+            <a:off x="365760" y="1463040"/>
+            <a:ext cx="8412480" cy="2377440"/>
           </a:xfrm>
           <a:prstGeom prst="rect">
             <a:avLst/>
@@ -8001,52 +4748,32 @@
           <a:noFill/>
         </p:spPr>
         <p:txBody>
-          <a:bodyPr wrap="square" tIns="0" bIns="0">
-            <a:spAutoFit/>
-          </a:bodyPr>
-          <a:lstStyle/>
-          <a:p>
-            <a:pPr>
-              <a:defRPr sz="1850" b="1">
-                <a:solidFill>
-                  <a:srgbClr val="1C1C1C"/>
-                </a:solidFill>
-                <a:latin typeface="Arial"/>
-              </a:defRPr>
-            </a:pPr>
-            <a:r>
-              <a:t>Tiến trình: Đơn vị Cô lập Tài nguyên của Hệ điều hành</a:t>
-            </a:r>
-          </a:p>
-        </p:txBody>
-      </p:sp>
-      <p:sp>
-        <p:nvSpPr>
-          <p:cNvPr id="6" name="TextBox 5"/>
-          <p:cNvSpPr txBox="1"/>
-          <p:nvPr/>
-        </p:nvSpPr>
-        <p:spPr>
-          <a:xfrm>
-            <a:off x="365760" y="1828800"/>
-            <a:ext cx="4846320" cy="4114800"/>
-          </a:xfrm>
-          <a:prstGeom prst="rect">
-            <a:avLst/>
-          </a:prstGeom>
-          <a:noFill/>
-        </p:spPr>
-        <p:txBody>
           <a:bodyPr wrap="square">
             <a:spAutoFit/>
           </a:bodyPr>
           <a:lstStyle/>
+          <a:p>
+            <a:pPr>
+              <a:spcAft>
+                <a:spcPts val="800"/>
+              </a:spcAft>
+              <a:defRPr sz="2100" b="1">
+                <a:solidFill>
+                  <a:srgbClr val="1C1C1C"/>
+                </a:solidFill>
+                <a:latin typeface="Arial"/>
+              </a:defRPr>
+            </a:pPr>
+            <a:r>
+              <a:t>➢ Xử lý đồng thời</a:t>
+            </a:r>
+          </a:p>
           <a:p>
             <a:pPr>
               <a:spcAft>
                 <a:spcPts val="600"/>
               </a:spcAft>
-              <a:defRPr sz="1300" b="1">
+              <a:defRPr sz="1700">
                 <a:solidFill>
                   <a:srgbClr val="1C1C1C"/>
                 </a:solidFill>
@@ -8054,15 +4781,15 @@
               </a:defRPr>
             </a:pPr>
             <a:r>
-              <a:t>• Định nghĩa chuẩn học thuật: Tiến trình là một thể hiện của chương trình đang trong trạng thái thực thi.</a:t>
+              <a:t>□ HĐH quản lý chương trình, mỗi chương trình ~ process (tiến trình) → cấp process id (PID) để HĐH quản lý.</a:t>
             </a:r>
           </a:p>
           <a:p>
             <a:pPr>
               <a:spcAft>
-                <a:spcPts val="800"/>
+                <a:spcPts val="600"/>
               </a:spcAft>
-              <a:defRPr sz="1250">
+              <a:defRPr sz="1700">
                 <a:solidFill>
                   <a:srgbClr val="1C1C1C"/>
                 </a:solidFill>
@@ -8070,15 +4797,12 @@
               </a:defRPr>
             </a:pPr>
             <a:r>
-              <a:t>• Không gian địa chỉ cô lập: Mỗi tiến trình sở hữu mã định danh riêng biệt và bảng trang ảo độc lập, ngăn ngừa can thiệp chéo.</a:t>
+              <a:t>□ CPU core chia các task của process thành các task nhỏ hơn + sắp xếp xen kẽ nhau → tận dụng thời gian rảnh của task này đi thực hiện task khác.</a:t>
             </a:r>
           </a:p>
           <a:p>
             <a:pPr>
-              <a:spcAft>
-                <a:spcPts val="800"/>
-              </a:spcAft>
-              <a:defRPr sz="1250">
+              <a:defRPr sz="1700">
                 <a:solidFill>
                   <a:srgbClr val="1C1C1C"/>
                 </a:solidFill>
@@ -8086,30 +4810,14 @@
               </a:defRPr>
             </a:pPr>
             <a:r>
-              <a:t>• Cấu trúc bốn vùng nhớ: Vùng mã lệnh, vùng biến tĩnh, vùng nhớ cấp phát động và ngăn xếp cục bộ.</a:t>
-            </a:r>
-          </a:p>
-          <a:p>
-            <a:pPr>
-              <a:spcAft>
-                <a:spcPts val="800"/>
-              </a:spcAft>
-              <a:defRPr sz="1250">
-                <a:solidFill>
-                  <a:srgbClr val="1C1C1C"/>
-                </a:solidFill>
-                <a:latin typeface="Arial"/>
-              </a:defRPr>
-            </a:pPr>
-            <a:r>
-              <a:t>• Chi phí chuyển đổi ngữ cảnh: Hệ điều hành phải lưu khối điều khiển tiến trình, nạp lại thanh ghi và xóa sạch bộ đệm chuyển đổi địa chỉ.</a:t>
+              <a:t>□ → Máy tính xử lý nhiều việc cùng lúc tại cùng thời điểm, tuy nhiên, bên dưới CPU core chỉ có thể thực thi một task nhỏ trong task lớn tại thời điểm đó.</a:t>
             </a:r>
           </a:p>
         </p:txBody>
       </p:sp>
       <p:pic>
         <p:nvPicPr>
-          <p:cNvPr id="7" name="Picture 6" descr="Process_states.png"/>
+          <p:cNvPr id="6" name="Picture 5" descr="slide_3_img_1_34.png"/>
           <p:cNvPicPr>
             <a:picLocks noChangeAspect="1"/>
           </p:cNvPicPr>
@@ -8123,8 +4831,8 @@
         </p:blipFill>
         <p:spPr>
           <a:xfrm>
-            <a:off x="5394960" y="1828800"/>
-            <a:ext cx="3383280" cy="4114800"/>
+            <a:off x="457200" y="4114800"/>
+            <a:ext cx="8229600" cy="1645920"/>
           </a:xfrm>
           <a:prstGeom prst="rect">
             <a:avLst/>
@@ -8181,8 +4889,8 @@
         </p:nvSpPr>
         <p:spPr>
           <a:xfrm>
-            <a:off x="182880" y="182880"/>
-            <a:ext cx="731520" cy="548640"/>
+            <a:off x="164592" y="6217920"/>
+            <a:ext cx="484632" cy="484632"/>
           </a:xfrm>
           <a:prstGeom prst="rect">
             <a:avLst/>
@@ -8190,12 +4898,12 @@
           <a:noFill/>
         </p:spPr>
         <p:txBody>
-          <a:bodyPr wrap="square">
+          <a:bodyPr wrap="none" lIns="0" rIns="0" tIns="73152" bIns="0">
             <a:spAutoFit/>
           </a:bodyPr>
           <a:lstStyle/>
           <a:p>
-            <a:pPr>
+            <a:pPr algn="ctr">
               <a:defRPr sz="1800" b="1">
                 <a:solidFill>
                   <a:srgbClr val="FFFFFF"/>
@@ -8218,7 +4926,7 @@
         <p:spPr>
           <a:xfrm>
             <a:off x="960120" y="6217920"/>
-            <a:ext cx="6858000" cy="457200"/>
+            <a:ext cx="5669280" cy="457200"/>
           </a:xfrm>
           <a:prstGeom prst="rect">
             <a:avLst/>
@@ -8226,13 +4934,13 @@
           <a:noFill/>
         </p:spPr>
         <p:txBody>
-          <a:bodyPr wrap="square">
+          <a:bodyPr wrap="none" lIns="0" tIns="73152">
             <a:spAutoFit/>
           </a:bodyPr>
           <a:lstStyle/>
           <a:p>
             <a:pPr>
-              <a:defRPr sz="1400" b="1">
+              <a:defRPr sz="1600" b="1">
                 <a:solidFill>
                   <a:srgbClr val="1C1C1C"/>
                 </a:solidFill>
@@ -8240,7 +4948,7 @@
               </a:defRPr>
             </a:pPr>
             <a:r>
-              <a:t>Lý thuyết Hệ điều hành — Luồng và Mô hình Đa luồng</a:t>
+              <a:t>Concurrency - Đồng thời</a:t>
             </a:r>
           </a:p>
         </p:txBody>
@@ -8253,8 +4961,8 @@
         </p:nvSpPr>
         <p:spPr>
           <a:xfrm>
-            <a:off x="365760" y="1234440"/>
-            <a:ext cx="8412480" cy="502920"/>
+            <a:off x="365760" y="1463040"/>
+            <a:ext cx="8412480" cy="2103120"/>
           </a:xfrm>
           <a:prstGeom prst="rect">
             <a:avLst/>
@@ -8262,52 +4970,32 @@
           <a:noFill/>
         </p:spPr>
         <p:txBody>
-          <a:bodyPr wrap="square" tIns="0" bIns="0">
-            <a:spAutoFit/>
-          </a:bodyPr>
-          <a:lstStyle/>
-          <a:p>
-            <a:pPr>
-              <a:defRPr sz="1850" b="1">
-                <a:solidFill>
-                  <a:srgbClr val="1C1C1C"/>
-                </a:solidFill>
-                <a:latin typeface="Arial"/>
-              </a:defRPr>
-            </a:pPr>
-            <a:r>
-              <a:t>Luồng: Đơn vị Thực thi Nhẹ và Chia sẻ Không gian Bộ nhớ</a:t>
-            </a:r>
-          </a:p>
-        </p:txBody>
-      </p:sp>
-      <p:sp>
-        <p:nvSpPr>
-          <p:cNvPr id="6" name="TextBox 5"/>
-          <p:cNvSpPr txBox="1"/>
-          <p:nvPr/>
-        </p:nvSpPr>
-        <p:spPr>
-          <a:xfrm>
-            <a:off x="365760" y="1828800"/>
-            <a:ext cx="4846320" cy="4114800"/>
-          </a:xfrm>
-          <a:prstGeom prst="rect">
-            <a:avLst/>
-          </a:prstGeom>
-          <a:noFill/>
-        </p:spPr>
-        <p:txBody>
           <a:bodyPr wrap="square">
             <a:spAutoFit/>
           </a:bodyPr>
           <a:lstStyle/>
+          <a:p>
+            <a:pPr>
+              <a:spcAft>
+                <a:spcPts val="800"/>
+              </a:spcAft>
+              <a:defRPr sz="2100" b="1">
+                <a:solidFill>
+                  <a:srgbClr val="1C1C1C"/>
+                </a:solidFill>
+                <a:latin typeface="Arial"/>
+              </a:defRPr>
+            </a:pPr>
+            <a:r>
+              <a:t>➢ Xử lý đồng thời (tiếp theo)</a:t>
+            </a:r>
+          </a:p>
           <a:p>
             <a:pPr>
               <a:spcAft>
                 <a:spcPts val="600"/>
               </a:spcAft>
-              <a:defRPr sz="1300" b="1">
+              <a:defRPr sz="1700">
                 <a:solidFill>
                   <a:srgbClr val="1C1C1C"/>
                 </a:solidFill>
@@ -8315,15 +5003,15 @@
               </a:defRPr>
             </a:pPr>
             <a:r>
-              <a:t>• Định nghĩa chuẩn học thuật: Luồng là đơn vị nhỏ nhất được bộ điều phối của hệ điều hành phân bổ thời gian vi xử lý.</a:t>
+              <a:t>□ Phân chia, điều phối nhiều tác vụ (task) khác nhau trong cùng một khoảng thời gian.</a:t>
             </a:r>
           </a:p>
           <a:p>
             <a:pPr>
               <a:spcAft>
-                <a:spcPts val="800"/>
+                <a:spcPts val="600"/>
               </a:spcAft>
-              <a:defRPr sz="1250">
+              <a:defRPr sz="1700">
                 <a:solidFill>
                   <a:srgbClr val="1C1C1C"/>
                 </a:solidFill>
@@ -8331,15 +5019,12 @@
               </a:defRPr>
             </a:pPr>
             <a:r>
-              <a:t>• Chia sẻ không gian nhớ: Các luồng trong cùng một tiến trình dùng chung vùng mã lệnh, vùng nhớ động và các tài nguyên mở.</a:t>
+              <a:t>□ Tại 1 thời điểm, chỉ xử lý 1 task.</a:t>
             </a:r>
           </a:p>
           <a:p>
             <a:pPr>
-              <a:spcAft>
-                <a:spcPts val="800"/>
-              </a:spcAft>
-              <a:defRPr sz="1250">
+              <a:defRPr sz="1700">
                 <a:solidFill>
                   <a:srgbClr val="1C1C1C"/>
                 </a:solidFill>
@@ -8347,30 +5032,14 @@
               </a:defRPr>
             </a:pPr>
             <a:r>
-              <a:t>• Khởi tạo và hoán đổi tối ưu: Chi phí chuyển ngữ cảnh luồng nhẹ hơn tiến trình từ 10 đến 20 lần do không phải đổi không gian trang nhớ.</a:t>
-            </a:r>
-          </a:p>
-          <a:p>
-            <a:pPr>
-              <a:spcAft>
-                <a:spcPts val="800"/>
-              </a:spcAft>
-              <a:defRPr sz="1250">
-                <a:solidFill>
-                  <a:srgbClr val="1C1C1C"/>
-                </a:solidFill>
-                <a:latin typeface="Arial"/>
-              </a:defRPr>
-            </a:pPr>
-            <a:r>
-              <a:t>• Giới hạn của trình thông dịch CPython: Cơ chế Khóa thông dịch toàn cục (GIL) chỉ cho phép một luồng duy nhất thực thi mã bytecode tại một thời điểm.</a:t>
+              <a:t>□ Tối ưu hóa cấu trúc chương trình, giúp hệ thống luôn phản hồi và không bị treo khi chờ đợi.</a:t>
             </a:r>
           </a:p>
         </p:txBody>
       </p:sp>
       <p:pic>
         <p:nvPicPr>
-          <p:cNvPr id="7" name="Picture 6" descr="Multithreaded_process.png"/>
+          <p:cNvPr id="6" name="Picture 5" descr="diag_s4.png"/>
           <p:cNvPicPr>
             <a:picLocks noChangeAspect="1"/>
           </p:cNvPicPr>
@@ -8384,8 +5053,8 @@
         </p:blipFill>
         <p:spPr>
           <a:xfrm>
-            <a:off x="5394960" y="1828800"/>
-            <a:ext cx="3383280" cy="4114800"/>
+            <a:off x="365760" y="3931920"/>
+            <a:ext cx="8412480" cy="1874519"/>
           </a:xfrm>
           <a:prstGeom prst="rect">
             <a:avLst/>
@@ -8442,8 +5111,8 @@
         </p:nvSpPr>
         <p:spPr>
           <a:xfrm>
-            <a:off x="182880" y="182880"/>
-            <a:ext cx="731520" cy="548640"/>
+            <a:off x="164592" y="6217920"/>
+            <a:ext cx="484632" cy="484632"/>
           </a:xfrm>
           <a:prstGeom prst="rect">
             <a:avLst/>
@@ -8451,12 +5120,12 @@
           <a:noFill/>
         </p:spPr>
         <p:txBody>
-          <a:bodyPr wrap="square">
+          <a:bodyPr wrap="none" lIns="0" rIns="0" tIns="73152" bIns="0">
             <a:spAutoFit/>
           </a:bodyPr>
           <a:lstStyle/>
           <a:p>
-            <a:pPr>
+            <a:pPr algn="ctr">
               <a:defRPr sz="1800" b="1">
                 <a:solidFill>
                   <a:srgbClr val="FFFFFF"/>
@@ -8479,7 +5148,7 @@
         <p:spPr>
           <a:xfrm>
             <a:off x="960120" y="6217920"/>
-            <a:ext cx="6858000" cy="457200"/>
+            <a:ext cx="5669280" cy="457200"/>
           </a:xfrm>
           <a:prstGeom prst="rect">
             <a:avLst/>
@@ -8487,13 +5156,13 @@
           <a:noFill/>
         </p:spPr>
         <p:txBody>
-          <a:bodyPr wrap="square">
+          <a:bodyPr wrap="none" lIns="0" tIns="73152">
             <a:spAutoFit/>
           </a:bodyPr>
           <a:lstStyle/>
           <a:p>
             <a:pPr>
-              <a:defRPr sz="1400" b="1">
+              <a:defRPr sz="1600" b="1">
                 <a:solidFill>
                   <a:srgbClr val="1C1C1C"/>
                 </a:solidFill>
@@ -8501,7 +5170,7 @@
               </a:defRPr>
             </a:pPr>
             <a:r>
-              <a:t>Kiến trúc Máy tính — Nút thắt Phân cấp Bộ nhớ và Vào/Ra Phong tỏa</a:t>
+              <a:t>Parallel - Song song</a:t>
             </a:r>
           </a:p>
         </p:txBody>
@@ -8514,8 +5183,8 @@
         </p:nvSpPr>
         <p:spPr>
           <a:xfrm>
-            <a:off x="365760" y="1234440"/>
-            <a:ext cx="8412480" cy="502920"/>
+            <a:off x="365760" y="1463040"/>
+            <a:ext cx="8412480" cy="1828800"/>
           </a:xfrm>
           <a:prstGeom prst="rect">
             <a:avLst/>
@@ -8523,52 +5192,32 @@
           <a:noFill/>
         </p:spPr>
         <p:txBody>
-          <a:bodyPr wrap="square" tIns="0" bIns="0">
-            <a:spAutoFit/>
-          </a:bodyPr>
-          <a:lstStyle/>
-          <a:p>
-            <a:pPr>
-              <a:defRPr sz="1850" b="1">
-                <a:solidFill>
-                  <a:srgbClr val="1C1C1C"/>
-                </a:solidFill>
-                <a:latin typeface="Arial"/>
-              </a:defRPr>
-            </a:pPr>
-            <a:r>
-              <a:t>Khoảng cách Tốc độ Phần cứng và Sự Lãng phí của Vào/Ra Phong tỏa</a:t>
-            </a:r>
-          </a:p>
-        </p:txBody>
-      </p:sp>
-      <p:sp>
-        <p:nvSpPr>
-          <p:cNvPr id="6" name="TextBox 5"/>
-          <p:cNvSpPr txBox="1"/>
-          <p:nvPr/>
-        </p:nvSpPr>
-        <p:spPr>
-          <a:xfrm>
-            <a:off x="365760" y="1828800"/>
-            <a:ext cx="4846320" cy="4114800"/>
-          </a:xfrm>
-          <a:prstGeom prst="rect">
-            <a:avLst/>
-          </a:prstGeom>
-          <a:noFill/>
-        </p:spPr>
-        <p:txBody>
           <a:bodyPr wrap="square">
             <a:spAutoFit/>
           </a:bodyPr>
           <a:lstStyle/>
+          <a:p>
+            <a:pPr>
+              <a:spcAft>
+                <a:spcPts val="800"/>
+              </a:spcAft>
+              <a:defRPr sz="2100" b="1">
+                <a:solidFill>
+                  <a:srgbClr val="1C1C1C"/>
+                </a:solidFill>
+                <a:latin typeface="Arial"/>
+              </a:defRPr>
+            </a:pPr>
+            <a:r>
+              <a:t>➢ Xử lý song song</a:t>
+            </a:r>
+          </a:p>
           <a:p>
             <a:pPr>
               <a:spcAft>
                 <a:spcPts val="600"/>
               </a:spcAft>
-              <a:defRPr sz="1300" b="1">
+              <a:defRPr sz="1700">
                 <a:solidFill>
                   <a:srgbClr val="1C1C1C"/>
                 </a:solidFill>
@@ -8576,15 +5225,15 @@
               </a:defRPr>
             </a:pPr>
             <a:r>
-              <a:t>• Nút thắt cổ chai Vào/Ra: Tốc độ xử lý của mạch vi xử lý vượt trội hơn hàng triệu lần so với các thiết bị lưu trữ và đường truyền mạng.</a:t>
+              <a:t>□ Nhiều task khác nhau được xử lý trong cùng 1 thời điểm;</a:t>
             </a:r>
           </a:p>
           <a:p>
             <a:pPr>
               <a:spcAft>
-                <a:spcPts val="800"/>
+                <a:spcPts val="600"/>
               </a:spcAft>
-              <a:defRPr sz="1250">
+              <a:defRPr sz="1700">
                 <a:solidFill>
                   <a:srgbClr val="1C1C1C"/>
                 </a:solidFill>
@@ -8592,15 +5241,12 @@
               </a:defRPr>
             </a:pPr>
             <a:r>
-              <a:t>• Tương quan độ trễ: Bộ đệm cấp 1 (L1 Cache) phản hồi trong ~1 nano giây, trong khi một gói tin mạng cần đến ~50.000.000 nano giây.</a:t>
+              <a:t>□ Các task hoàn toàn độc lập nhau.</a:t>
             </a:r>
           </a:p>
           <a:p>
             <a:pPr>
-              <a:spcAft>
-                <a:spcPts val="800"/>
-              </a:spcAft>
-              <a:defRPr sz="1250">
+              <a:defRPr sz="1700">
                 <a:solidFill>
                   <a:srgbClr val="1C1C1C"/>
                 </a:solidFill>
@@ -8608,30 +5254,14 @@
               </a:defRPr>
             </a:pPr>
             <a:r>
-              <a:t>• Thiệt hại do phong tỏa: Lời gọi hàm đồng bộ truyền thống khiến vi xử lý rơi vào trạng thái ngủ đông hàng chục triệu chu kỳ vô ích.</a:t>
-            </a:r>
-          </a:p>
-          <a:p>
-            <a:pPr>
-              <a:spcAft>
-                <a:spcPts val="800"/>
-              </a:spcAft>
-              <a:defRPr sz="1250">
-                <a:solidFill>
-                  <a:srgbClr val="1C1C1C"/>
-                </a:solidFill>
-                <a:latin typeface="Arial"/>
-              </a:defRPr>
-            </a:pPr>
-            <a:r>
-              <a:t>• Mục tiêu của tính toán bất đồng bộ: Thu hồi ngay quyền điều khiển của vi xử lý khi gặp tác vụ chờ dữ liệu để phục vụ yêu cầu tính toán khác.</a:t>
+              <a:t>□ Chỉ có thể thực hiện trên máy có số nhân (core) lớn hơn 1.</a:t>
             </a:r>
           </a:p>
         </p:txBody>
       </p:sp>
       <p:pic>
         <p:nvPicPr>
-          <p:cNvPr id="7" name="Picture 6" descr="Superscalarpipeline_clean.png"/>
+          <p:cNvPr id="6" name="Picture 5" descr="slide_5_img_1_40.png"/>
           <p:cNvPicPr>
             <a:picLocks noChangeAspect="1"/>
           </p:cNvPicPr>
@@ -8645,8 +5275,8 @@
         </p:blipFill>
         <p:spPr>
           <a:xfrm>
-            <a:off x="5394960" y="2011680"/>
-            <a:ext cx="3474720" cy="3474720"/>
+            <a:off x="1645920" y="3931920"/>
+            <a:ext cx="5852160" cy="1828800"/>
           </a:xfrm>
           <a:prstGeom prst="rect">
             <a:avLst/>
@@ -8703,8 +5333,8 @@
         </p:nvSpPr>
         <p:spPr>
           <a:xfrm>
-            <a:off x="182880" y="182880"/>
-            <a:ext cx="731520" cy="548640"/>
+            <a:off x="164592" y="6217920"/>
+            <a:ext cx="484632" cy="484632"/>
           </a:xfrm>
           <a:prstGeom prst="rect">
             <a:avLst/>
@@ -8712,12 +5342,12 @@
           <a:noFill/>
         </p:spPr>
         <p:txBody>
-          <a:bodyPr wrap="square">
+          <a:bodyPr wrap="none" lIns="0" rIns="0" tIns="73152" bIns="0">
             <a:spAutoFit/>
           </a:bodyPr>
           <a:lstStyle/>
           <a:p>
-            <a:pPr>
+            <a:pPr algn="ctr">
               <a:defRPr sz="1800" b="1">
                 <a:solidFill>
                   <a:srgbClr val="FFFFFF"/>
@@ -8740,7 +5370,7 @@
         <p:spPr>
           <a:xfrm>
             <a:off x="960120" y="6217920"/>
-            <a:ext cx="6858000" cy="457200"/>
+            <a:ext cx="5669280" cy="457200"/>
           </a:xfrm>
           <a:prstGeom prst="rect">
             <a:avLst/>
@@ -8748,13 +5378,13 @@
           <a:noFill/>
         </p:spPr>
         <p:txBody>
-          <a:bodyPr wrap="square">
+          <a:bodyPr wrap="none" lIns="0" tIns="73152">
             <a:spAutoFit/>
           </a:bodyPr>
           <a:lstStyle/>
           <a:p>
             <a:pPr>
-              <a:defRPr sz="1400" b="1">
+              <a:defRPr sz="1600" b="1">
                 <a:solidFill>
                   <a:srgbClr val="1C1C1C"/>
                 </a:solidFill>
@@ -8762,7 +5392,7 @@
               </a:defRPr>
             </a:pPr>
             <a:r>
-              <a:t>Kiến trúc Mạng — Bài toán Phục vụ Đồng thời C10K</a:t>
+              <a:t>Parallel - Song song</a:t>
             </a:r>
           </a:p>
         </p:txBody>
@@ -8775,8 +5405,8 @@
         </p:nvSpPr>
         <p:spPr>
           <a:xfrm>
-            <a:off x="365760" y="1234440"/>
-            <a:ext cx="8412480" cy="502920"/>
+            <a:off x="365760" y="1463040"/>
+            <a:ext cx="8412480" cy="2011680"/>
           </a:xfrm>
           <a:prstGeom prst="rect">
             <a:avLst/>
@@ -8784,52 +5414,32 @@
           <a:noFill/>
         </p:spPr>
         <p:txBody>
-          <a:bodyPr wrap="square" tIns="0" bIns="0">
-            <a:spAutoFit/>
-          </a:bodyPr>
-          <a:lstStyle/>
-          <a:p>
-            <a:pPr>
-              <a:defRPr sz="1850" b="1">
-                <a:solidFill>
-                  <a:srgbClr val="1C1C1C"/>
-                </a:solidFill>
-                <a:latin typeface="Arial"/>
-              </a:defRPr>
-            </a:pPr>
-            <a:r>
-              <a:t>Bài toán C10K và Sự Ra đời của Kiến trúc Hướng Sự kiện</a:t>
-            </a:r>
-          </a:p>
-        </p:txBody>
-      </p:sp>
-      <p:sp>
-        <p:nvSpPr>
-          <p:cNvPr id="6" name="TextBox 5"/>
-          <p:cNvSpPr txBox="1"/>
-          <p:nvPr/>
-        </p:nvSpPr>
-        <p:spPr>
-          <a:xfrm>
-            <a:off x="365760" y="1828800"/>
-            <a:ext cx="4846320" cy="4114800"/>
-          </a:xfrm>
-          <a:prstGeom prst="rect">
-            <a:avLst/>
-          </a:prstGeom>
-          <a:noFill/>
-        </p:spPr>
-        <p:txBody>
           <a:bodyPr wrap="square">
             <a:spAutoFit/>
           </a:bodyPr>
           <a:lstStyle/>
+          <a:p>
+            <a:pPr>
+              <a:spcAft>
+                <a:spcPts val="800"/>
+              </a:spcAft>
+              <a:defRPr sz="2100" b="1">
+                <a:solidFill>
+                  <a:srgbClr val="1C1C1C"/>
+                </a:solidFill>
+                <a:latin typeface="Arial"/>
+              </a:defRPr>
+            </a:pPr>
+            <a:r>
+              <a:t>➢ Đồng thời và song song</a:t>
+            </a:r>
+          </a:p>
           <a:p>
             <a:pPr>
               <a:spcAft>
                 <a:spcPts val="600"/>
               </a:spcAft>
-              <a:defRPr sz="1300" b="1">
+              <a:defRPr sz="1700">
                 <a:solidFill>
                   <a:srgbClr val="1C1C1C"/>
                 </a:solidFill>
@@ -8837,15 +5447,15 @@
               </a:defRPr>
             </a:pPr>
             <a:r>
-              <a:t>• Thách thức C10K (Dan Kegel, 1999): Làm thế nào để một máy chủ duy nhất có thể duy trì và phục vụ đồng thời 10.000 kết nối?</a:t>
+              <a:t>□ Trên thực tế, trên mỗi nhân của CPU vẫn xảy ra quá trình xử lý đồng thời, với điều kiện là tại một thời điểm không xảy ra việc xử lý cùng một task trên hai nhân CPU khác nhau.</a:t>
             </a:r>
           </a:p>
           <a:p>
             <a:pPr>
               <a:spcAft>
-                <a:spcPts val="800"/>
+                <a:spcPts val="400"/>
               </a:spcAft>
-              <a:defRPr sz="1250">
+              <a:defRPr sz="1650">
                 <a:solidFill>
                   <a:srgbClr val="1C1C1C"/>
                 </a:solidFill>
@@ -8853,15 +5463,12 @@
               </a:defRPr>
             </a:pPr>
             <a:r>
-              <a:t>• Giới hạn của mô hình mỗi máy trạm một luồng: Cấp phát 10.000 luồng làm cạn kiệt bộ nhớ và gây quá tải nghiêm trọng cho bộ lập lịch của hệ điều hành.</a:t>
+              <a:t>□ Đơn nhân (Single-core): Điều phối xen kẽ thời gian giữa các tác vụ (Concurrency).</a:t>
             </a:r>
           </a:p>
           <a:p>
             <a:pPr>
-              <a:spcAft>
-                <a:spcPts val="800"/>
-              </a:spcAft>
-              <a:defRPr sz="1250">
+              <a:defRPr sz="1650">
                 <a:solidFill>
                   <a:srgbClr val="1C1C1C"/>
                 </a:solidFill>
@@ -8869,30 +5476,14 @@
               </a:defRPr>
             </a:pPr>
             <a:r>
-              <a:t>• Đột phá kỹ thuật dồn kênh Vào/Ra: Hệ điều hành cung cấp cơ chế thông báo sự kiện tập trung (epoll trên Linux, kqueue trên BSD/macOS, IOCP trên Windows).</a:t>
-            </a:r>
-          </a:p>
-          <a:p>
-            <a:pPr>
-              <a:spcAft>
-                <a:spcPts val="800"/>
-              </a:spcAft>
-              <a:defRPr sz="1250">
-                <a:solidFill>
-                  <a:srgbClr val="1C1C1C"/>
-                </a:solidFill>
-                <a:latin typeface="Arial"/>
-              </a:defRPr>
-            </a:pPr>
-            <a:r>
-              <a:t>• Bước chuyển mình kiến trúc: Một luồng đơn duy nhất có thể quản lý hàng vạn kết nối đồng thời với lượng bộ nhớ tiêu thụ tối thiểu.</a:t>
+              <a:t>□ Đa nhân (Multi-core): Thực thi song song thực sự trên các nhân phần cứng độc lập (Parallelism).</a:t>
             </a:r>
           </a:p>
         </p:txBody>
       </p:sp>
       <p:pic>
         <p:nvPicPr>
-          <p:cNvPr id="7" name="Picture 6" descr="Thread_pool.png"/>
+          <p:cNvPr id="6" name="Picture 5" descr="slide_6_img_1_44.png"/>
           <p:cNvPicPr>
             <a:picLocks noChangeAspect="1"/>
           </p:cNvPicPr>
@@ -8906,8 +5497,8 @@
         </p:blipFill>
         <p:spPr>
           <a:xfrm>
-            <a:off x="5394960" y="2011680"/>
-            <a:ext cx="3474720" cy="3474720"/>
+            <a:off x="1645920" y="3931920"/>
+            <a:ext cx="5852160" cy="1828800"/>
           </a:xfrm>
           <a:prstGeom prst="rect">
             <a:avLst/>
@@ -8964,8 +5555,8 @@
         </p:nvSpPr>
         <p:spPr>
           <a:xfrm>
-            <a:off x="182880" y="182880"/>
-            <a:ext cx="731520" cy="548640"/>
+            <a:off x="164592" y="6217920"/>
+            <a:ext cx="484632" cy="484632"/>
           </a:xfrm>
           <a:prstGeom prst="rect">
             <a:avLst/>
@@ -8973,12 +5564,12 @@
           <a:noFill/>
         </p:spPr>
         <p:txBody>
-          <a:bodyPr wrap="square">
+          <a:bodyPr wrap="none" lIns="0" rIns="0" tIns="73152" bIns="0">
             <a:spAutoFit/>
           </a:bodyPr>
           <a:lstStyle/>
           <a:p>
-            <a:pPr>
+            <a:pPr algn="ctr">
               <a:defRPr sz="1800" b="1">
                 <a:solidFill>
                   <a:srgbClr val="FFFFFF"/>
@@ -9001,7 +5592,7 @@
         <p:spPr>
           <a:xfrm>
             <a:off x="960120" y="6217920"/>
-            <a:ext cx="6858000" cy="457200"/>
+            <a:ext cx="5669280" cy="457200"/>
           </a:xfrm>
           <a:prstGeom prst="rect">
             <a:avLst/>
@@ -9009,13 +5600,13 @@
           <a:noFill/>
         </p:spPr>
         <p:txBody>
-          <a:bodyPr wrap="square">
+          <a:bodyPr wrap="none" lIns="0" tIns="73152">
             <a:spAutoFit/>
           </a:bodyPr>
           <a:lstStyle/>
           <a:p>
             <a:pPr>
-              <a:defRPr sz="1400" b="1">
+              <a:defRPr sz="1600" b="1">
                 <a:solidFill>
                   <a:srgbClr val="1C1C1C"/>
                 </a:solidFill>
@@ -9023,7 +5614,7 @@
               </a:defRPr>
             </a:pPr>
             <a:r>
-              <a:t>Lý thuyết Tính toán — Khung Phân loại Bốn Mô hình Nền tảng</a:t>
+              <a:t>Asynchronous - Bất đồng bộ</a:t>
             </a:r>
           </a:p>
         </p:txBody>
@@ -9036,8 +5627,8 @@
         </p:nvSpPr>
         <p:spPr>
           <a:xfrm>
-            <a:off x="365760" y="1234440"/>
-            <a:ext cx="8412480" cy="502920"/>
+            <a:off x="365760" y="1463040"/>
+            <a:ext cx="4389120" cy="4389120"/>
           </a:xfrm>
           <a:prstGeom prst="rect">
             <a:avLst/>
@@ -9045,13 +5636,16 @@
           <a:noFill/>
         </p:spPr>
         <p:txBody>
-          <a:bodyPr wrap="square" tIns="0" bIns="0">
+          <a:bodyPr wrap="square">
             <a:spAutoFit/>
           </a:bodyPr>
           <a:lstStyle/>
           <a:p>
             <a:pPr>
-              <a:defRPr sz="1850" b="1">
+              <a:spcAft>
+                <a:spcPts val="800"/>
+              </a:spcAft>
+              <a:defRPr sz="2100" b="1">
                 <a:solidFill>
                   <a:srgbClr val="1C1C1C"/>
                 </a:solidFill>
@@ -9059,312 +5653,96 @@
               </a:defRPr>
             </a:pPr>
             <a:r>
-              <a:t>Không gian Kiến trúc: Phân loại Bốn Mô hình Tính toán Nền tảng</a:t>
-            </a:r>
-          </a:p>
-        </p:txBody>
-      </p:sp>
-      <p:sp>
-        <p:nvSpPr>
-          <p:cNvPr id="6" name="TextBox 5"/>
-          <p:cNvSpPr txBox="1"/>
+              <a:t>➢ Bất đồng bộ</a:t>
+            </a:r>
+          </a:p>
+          <a:p>
+            <a:pPr>
+              <a:spcAft>
+                <a:spcPts val="800"/>
+              </a:spcAft>
+              <a:defRPr sz="1550">
+                <a:solidFill>
+                  <a:srgbClr val="1C1C1C"/>
+                </a:solidFill>
+                <a:latin typeface="Arial"/>
+              </a:defRPr>
+            </a:pPr>
+            <a:r>
+              <a:t>□ Cho phép các task được xử lý không theo thứ tự (có thể chuyển sang task khác trước khi task trước đó hoàn thành).</a:t>
+            </a:r>
+          </a:p>
+          <a:p>
+            <a:pPr>
+              <a:spcAft>
+                <a:spcPts val="800"/>
+              </a:spcAft>
+              <a:defRPr sz="1550">
+                <a:solidFill>
+                  <a:srgbClr val="1C1C1C"/>
+                </a:solidFill>
+                <a:latin typeface="Arial"/>
+              </a:defRPr>
+            </a:pPr>
+            <a:r>
+              <a:t>□ Có thể giải quyết nhiều yêu cầu đồng thời.</a:t>
+            </a:r>
+          </a:p>
+          <a:p>
+            <a:pPr>
+              <a:spcAft>
+                <a:spcPts val="800"/>
+              </a:spcAft>
+              <a:defRPr sz="1550">
+                <a:solidFill>
+                  <a:srgbClr val="1C1C1C"/>
+                </a:solidFill>
+                <a:latin typeface="Arial"/>
+              </a:defRPr>
+            </a:pPr>
+            <a:r>
+              <a:t>□ Hoàn thành trong khoảng thời gian ngắn hơn.</a:t>
+            </a:r>
+          </a:p>
+          <a:p>
+            <a:pPr>
+              <a:defRPr sz="1550">
+                <a:solidFill>
+                  <a:srgbClr val="1C1C1C"/>
+                </a:solidFill>
+                <a:latin typeface="Arial"/>
+              </a:defRPr>
+            </a:pPr>
+            <a:r>
+              <a:t>□ Ví dụ minh họa trong bài giảng: Đi thi trắc nghiệm, Bãi giữ xe...</a:t>
+            </a:r>
+          </a:p>
+        </p:txBody>
+      </p:sp>
+      <p:pic>
+        <p:nvPicPr>
+          <p:cNvPr id="6" name="Picture 5" descr="slide_7_img_1_48.jpeg"/>
+          <p:cNvPicPr>
+            <a:picLocks noChangeAspect="1"/>
+          </p:cNvPicPr>
           <p:nvPr/>
-        </p:nvSpPr>
-        <p:spPr>
-          <a:xfrm>
-            <a:off x="365760" y="1783080"/>
-            <a:ext cx="8412480" cy="411480"/>
+        </p:nvPicPr>
+        <p:blipFill>
+          <a:blip r:embed="rId3"/>
+          <a:stretch>
+            <a:fillRect/>
+          </a:stretch>
+        </p:blipFill>
+        <p:spPr>
+          <a:xfrm>
+            <a:off x="4846320" y="1645920"/>
+            <a:ext cx="3931920" cy="4114800"/>
           </a:xfrm>
           <a:prstGeom prst="rect">
             <a:avLst/>
           </a:prstGeom>
-          <a:noFill/>
-        </p:spPr>
-        <p:txBody>
-          <a:bodyPr wrap="none">
-            <a:spAutoFit/>
-          </a:bodyPr>
-          <a:lstStyle/>
-          <a:p>
-            <a:pPr>
-              <a:defRPr sz="1200" b="1">
-                <a:solidFill>
-                  <a:srgbClr val="E74C3C"/>
-                </a:solidFill>
-                <a:latin typeface="Arial"/>
-              </a:defRPr>
-            </a:pPr>
-            <a:r>
-              <a:t>• Phân loại hai chiều: Cấu trúc Phần cứng (Đơn nhân / Đa nhân) và Cơ chế Điều phối (Phong tỏa / Phi phong tỏa):</a:t>
-            </a:r>
-          </a:p>
-        </p:txBody>
-      </p:sp>
-      <p:graphicFrame>
-        <p:nvGraphicFramePr>
-          <p:cNvPr id="7" name="Table 6"/>
-          <p:cNvGraphicFramePr>
-            <a:graphicFrameLocks noGrp="1"/>
-          </p:cNvGraphicFramePr>
-          <p:nvPr/>
-        </p:nvGraphicFramePr>
-        <p:xfrm>
-          <a:off x="365760" y="2240280"/>
-          <a:ext cx="8412480" cy="3703320"/>
-        </p:xfrm>
-        <a:graphic>
-          <a:graphicData uri="http://schemas.openxmlformats.org/drawingml/2006/table">
-            <a:tbl>
-              <a:tblPr firstRow="1" bandRow="1">
-                <a:tableStyleId>{5C22544A-7EE6-4342-B048-85BDC9FD1C3A}</a:tableStyleId>
-              </a:tblPr>
-              <a:tblGrid>
-                <a:gridCol w="2011680"/>
-                <a:gridCol w="3200400"/>
-                <a:gridCol w="3200400"/>
-              </a:tblGrid>
-              <a:tr h="502920">
-                <a:tc>
-                  <a:txBody>
-                    <a:bodyPr/>
-                    <a:lstStyle/>
-                    <a:p>
-                      <a:pPr>
-                        <a:defRPr sz="1150" b="1">
-                          <a:solidFill>
-                            <a:srgbClr val="FFFFFF"/>
-                          </a:solidFill>
-                          <a:latin typeface="Arial"/>
-                        </a:defRPr>
-                      </a:pPr>
-                      <a:r>
-                        <a:t>Cấu trúc Phần cứng</a:t>
-                      </a:r>
-                    </a:p>
-                  </a:txBody>
-                  <a:tcPr>
-                    <a:solidFill>
-                      <a:srgbClr val="E74C3C"/>
-                    </a:solidFill>
-                  </a:tcPr>
-                </a:tc>
-                <a:tc>
-                  <a:txBody>
-                    <a:bodyPr/>
-                    <a:lstStyle/>
-                    <a:p>
-                      <a:pPr>
-                        <a:defRPr sz="1150" b="1">
-                          <a:solidFill>
-                            <a:srgbClr val="FFFFFF"/>
-                          </a:solidFill>
-                          <a:latin typeface="Arial"/>
-                        </a:defRPr>
-                      </a:pPr>
-                      <a:r>
-                        <a:t>Cơ chế Phong tỏa (Blocking)</a:t>
-                      </a:r>
-                    </a:p>
-                  </a:txBody>
-                  <a:tcPr>
-                    <a:solidFill>
-                      <a:srgbClr val="E74C3C"/>
-                    </a:solidFill>
-                  </a:tcPr>
-                </a:tc>
-                <a:tc>
-                  <a:txBody>
-                    <a:bodyPr/>
-                    <a:lstStyle/>
-                    <a:p>
-                      <a:pPr>
-                        <a:defRPr sz="1150" b="1">
-                          <a:solidFill>
-                            <a:srgbClr val="FFFFFF"/>
-                          </a:solidFill>
-                          <a:latin typeface="Arial"/>
-                        </a:defRPr>
-                      </a:pPr>
-                      <a:r>
-                        <a:t>Cơ chế Phi phong tỏa (Non-blocking)</a:t>
-                      </a:r>
-                    </a:p>
-                  </a:txBody>
-                  <a:tcPr>
-                    <a:solidFill>
-                      <a:srgbClr val="E74C3C"/>
-                    </a:solidFill>
-                  </a:tcPr>
-                </a:tc>
-              </a:tr>
-              <a:tr h="1600200">
-                <a:tc>
-                  <a:txBody>
-                    <a:bodyPr/>
-                    <a:lstStyle/>
-                    <a:p>
-                      <a:pPr>
-                        <a:defRPr sz="1050" b="1">
-                          <a:solidFill>
-                            <a:srgbClr val="1C1C1C"/>
-                          </a:solidFill>
-                          <a:latin typeface="Arial"/>
-                        </a:defRPr>
-                      </a:pPr>
-                      <a:r>
-                        <a:t>Bộ vi xử lý Đơn nhân</a:t>
-                      </a:r>
-                      <a:br/>
-                      <a:r>
-                        <a:t>(Đơn lõi CPU)</a:t>
-                      </a:r>
-                    </a:p>
-                  </a:txBody>
-                  <a:tcPr/>
-                </a:tc>
-                <a:tc>
-                  <a:txBody>
-                    <a:bodyPr/>
-                    <a:lstStyle/>
-                    <a:p>
-                      <a:pPr>
-                        <a:defRPr sz="1050">
-                          <a:solidFill>
-                            <a:srgbClr val="1C1C1C"/>
-                          </a:solidFill>
-                          <a:latin typeface="Arial"/>
-                        </a:defRPr>
-                      </a:pPr>
-                      <a:r>
-                        <a:t>XỬ LÝ TUẦN TỰ (Sequential)</a:t>
-                      </a:r>
-                      <a:br/>
-                      <a:r>
-                        <a:t>• Thực thi đơn tuyến tuần tự từng chỉ thị lệnh.</a:t>
-                      </a:r>
-                      <a:br/>
-                      <a:r>
-                        <a:t>• Vi xử lý bị đóng băng hoàn toàn khi chờ dữ liệu vào/ra.</a:t>
-                      </a:r>
-                    </a:p>
-                  </a:txBody>
-                  <a:tcPr/>
-                </a:tc>
-                <a:tc>
-                  <a:txBody>
-                    <a:bodyPr/>
-                    <a:lstStyle/>
-                    <a:p>
-                      <a:pPr>
-                        <a:defRPr sz="1050">
-                          <a:solidFill>
-                            <a:srgbClr val="1C1C1C"/>
-                          </a:solidFill>
-                          <a:latin typeface="Arial"/>
-                        </a:defRPr>
-                      </a:pPr>
-                      <a:r>
-                        <a:t>BẤT ĐỒNG BỘ ĐƠN LUỒNG (Asyncio)</a:t>
-                      </a:r>
-                      <a:br/>
-                      <a:r>
-                        <a:t>• 1 Luồng kết hợp Vòng lặp sự kiện (Event Loop).</a:t>
-                      </a:r>
-                      <a:br/>
-                      <a:r>
-                        <a:t>• Giải phóng vi xử lý ngay khi chờ I/O để phục vụ việc khác.</a:t>
-                      </a:r>
-                    </a:p>
-                  </a:txBody>
-                  <a:tcPr/>
-                </a:tc>
-              </a:tr>
-              <a:tr h="1600200">
-                <a:tc>
-                  <a:txBody>
-                    <a:bodyPr/>
-                    <a:lstStyle/>
-                    <a:p>
-                      <a:pPr>
-                        <a:defRPr sz="1050" b="1">
-                          <a:solidFill>
-                            <a:srgbClr val="1C1C1C"/>
-                          </a:solidFill>
-                          <a:latin typeface="Arial"/>
-                        </a:defRPr>
-                      </a:pPr>
-                      <a:r>
-                        <a:t>Bộ vi xử lý Đa nhân</a:t>
-                      </a:r>
-                      <a:br/>
-                      <a:r>
-                        <a:t>(Đa lõi phần cứng)</a:t>
-                      </a:r>
-                    </a:p>
-                  </a:txBody>
-                  <a:tcPr/>
-                </a:tc>
-                <a:tc>
-                  <a:txBody>
-                    <a:bodyPr/>
-                    <a:lstStyle/>
-                    <a:p>
-                      <a:pPr>
-                        <a:defRPr sz="1050">
-                          <a:solidFill>
-                            <a:srgbClr val="1C1C1C"/>
-                          </a:solidFill>
-                          <a:latin typeface="Arial"/>
-                        </a:defRPr>
-                      </a:pPr>
-                      <a:r>
-                        <a:t>XỬ LÝ SONG SONG &amp; ĐA LUỒNG</a:t>
-                      </a:r>
-                      <a:br/>
-                      <a:r>
-                        <a:t>• Nhiều nhân phần cứng thực thi đồng thời thực sự.</a:t>
-                      </a:r>
-                      <a:br/>
-                      <a:r>
-                        <a:t>• Từng luồng vẫn có thể bị phong tỏa nếu chờ Vào/Ra.</a:t>
-                      </a:r>
-                    </a:p>
-                  </a:txBody>
-                  <a:tcPr/>
-                </a:tc>
-                <a:tc>
-                  <a:txBody>
-                    <a:bodyPr/>
-                    <a:lstStyle/>
-                    <a:p>
-                      <a:pPr>
-                        <a:defRPr sz="1050">
-                          <a:solidFill>
-                            <a:srgbClr val="1C1C1C"/>
-                          </a:solidFill>
-                          <a:latin typeface="Arial"/>
-                        </a:defRPr>
-                      </a:pPr>
-                      <a:r>
-                        <a:t>HỆ THỐNG PHÂN TÁN / LAI GHÉP</a:t>
-                      </a:r>
-                      <a:br/>
-                      <a:r>
-                        <a:t>• Mỗi nhân vận hành một Vòng lặp sự kiện riêng biệt.</a:t>
-                      </a:r>
-                      <a:br/>
-                      <a:r>
-                        <a:t>• Tối đa hóa thông lượng phục vụ hàng vạn kết nối đồng thời.</a:t>
-                      </a:r>
-                    </a:p>
-                  </a:txBody>
-                  <a:tcPr/>
-                </a:tc>
-              </a:tr>
-            </a:tbl>
-          </a:graphicData>
-        </a:graphic>
-      </p:graphicFrame>
+        </p:spPr>
+      </p:pic>
     </p:spTree>
   </p:cSld>
   <p:clrMapOvr>
@@ -9415,8 +5793,8 @@
         </p:nvSpPr>
         <p:spPr>
           <a:xfrm>
-            <a:off x="182880" y="182880"/>
-            <a:ext cx="731520" cy="548640"/>
+            <a:off x="164592" y="6217920"/>
+            <a:ext cx="484632" cy="484632"/>
           </a:xfrm>
           <a:prstGeom prst="rect">
             <a:avLst/>
@@ -9424,12 +5802,12 @@
           <a:noFill/>
         </p:spPr>
         <p:txBody>
-          <a:bodyPr wrap="square">
+          <a:bodyPr wrap="none" lIns="0" rIns="0" tIns="73152" bIns="0">
             <a:spAutoFit/>
           </a:bodyPr>
           <a:lstStyle/>
           <a:p>
-            <a:pPr>
+            <a:pPr algn="ctr">
               <a:defRPr sz="1800" b="1">
                 <a:solidFill>
                   <a:srgbClr val="FFFFFF"/>
@@ -9452,7 +5830,7 @@
         <p:spPr>
           <a:xfrm>
             <a:off x="960120" y="6217920"/>
-            <a:ext cx="6858000" cy="457200"/>
+            <a:ext cx="5669280" cy="457200"/>
           </a:xfrm>
           <a:prstGeom prst="rect">
             <a:avLst/>
@@ -9460,13 +5838,13 @@
           <a:noFill/>
         </p:spPr>
         <p:txBody>
-          <a:bodyPr wrap="square">
+          <a:bodyPr wrap="none" lIns="0" tIns="73152">
             <a:spAutoFit/>
           </a:bodyPr>
           <a:lstStyle/>
           <a:p>
             <a:pPr>
-              <a:defRPr sz="1400" b="1">
+              <a:defRPr sz="1600" b="1">
                 <a:solidFill>
                   <a:srgbClr val="1C1C1C"/>
                 </a:solidFill>
@@ -9474,7 +5852,7 @@
               </a:defRPr>
             </a:pPr>
             <a:r>
-              <a:t>Mô phỏng Động học — Đối chiếu Cơ chế và Tốc độ Thực thi</a:t>
+              <a:t>Asynchronous - Bất đồng bộ</a:t>
             </a:r>
           </a:p>
         </p:txBody>
@@ -9487,8 +5865,8 @@
         </p:nvSpPr>
         <p:spPr>
           <a:xfrm>
-            <a:off x="365760" y="1234440"/>
-            <a:ext cx="8412480" cy="502920"/>
+            <a:off x="365760" y="1463040"/>
+            <a:ext cx="8412480" cy="2194560"/>
           </a:xfrm>
           <a:prstGeom prst="rect">
             <a:avLst/>
@@ -9496,13 +5874,16 @@
           <a:noFill/>
         </p:spPr>
         <p:txBody>
-          <a:bodyPr wrap="square" tIns="0" bIns="0">
+          <a:bodyPr wrap="square">
             <a:spAutoFit/>
           </a:bodyPr>
           <a:lstStyle/>
           <a:p>
             <a:pPr>
-              <a:defRPr sz="1850" b="1">
+              <a:spcAft>
+                <a:spcPts val="800"/>
+              </a:spcAft>
+              <a:defRPr sz="2100" b="1">
                 <a:solidFill>
                   <a:srgbClr val="1C1C1C"/>
                 </a:solidFill>
@@ -9510,210 +5891,85 @@
               </a:defRPr>
             </a:pPr>
             <a:r>
-              <a:t>Mô phỏng Động học: Đối chiếu Thời gian Thực thi của Bốn Mô hình</a:t>
+              <a:t>➢ Mô hình bất đồng bộ thực thi đồng thời</a:t>
+            </a:r>
+          </a:p>
+          <a:p>
+            <a:pPr>
+              <a:spcAft>
+                <a:spcPts val="600"/>
+              </a:spcAft>
+              <a:defRPr sz="1650">
+                <a:solidFill>
+                  <a:srgbClr val="1C1C1C"/>
+                </a:solidFill>
+                <a:latin typeface="Arial"/>
+              </a:defRPr>
+            </a:pPr>
+            <a:r>
+              <a:t>□ Trong một khoảng thời gian, các task thực hiện xen kẽ nhau;</a:t>
+            </a:r>
+          </a:p>
+          <a:p>
+            <a:pPr>
+              <a:spcAft>
+                <a:spcPts val="600"/>
+              </a:spcAft>
+              <a:defRPr sz="1650">
+                <a:solidFill>
+                  <a:srgbClr val="1C1C1C"/>
+                </a:solidFill>
+                <a:latin typeface="Arial"/>
+              </a:defRPr>
+            </a:pPr>
+            <a:r>
+              <a:t>□ Nằm trong một luồng điều khiển duy nhất → khi 1 task đang thực thi thì các task khác không thực thi (việc thực thi của 1 task có thể bị tạm dừng và sau đó tiếp tục lại);</a:t>
+            </a:r>
+          </a:p>
+          <a:p>
+            <a:pPr>
+              <a:defRPr sz="1650">
+                <a:solidFill>
+                  <a:srgbClr val="1C1C1C"/>
+                </a:solidFill>
+                <a:latin typeface="Arial"/>
+              </a:defRPr>
+            </a:pPr>
+            <a:r>
+              <a:t>□ Sử dụng một luồng điều khiển chính duy nhất, cả trong hệ thống đơn bộ xử lý (uniprocessor systems) và hệ thống đa bộ xử lý (multiprocessor systems).</a:t>
             </a:r>
           </a:p>
         </p:txBody>
       </p:sp>
       <p:pic>
         <p:nvPicPr>
-          <p:cNvPr id="6" name="video_giai_thich_4_mo_hinh.mp4">
-            <a:hlinkClick r:id="" action="ppaction://media"/>
-          </p:cNvPr>
+          <p:cNvPr id="6" name="Picture 5" descr="slide_8_img_1_51.png"/>
           <p:cNvPicPr>
             <a:picLocks noChangeAspect="1"/>
           </p:cNvPicPr>
-          <p:nvPr>
-            <a:videoFile r:link="rId4"/>
-            <p:extLst>
-              <p:ext uri="{DAA4B4D4-6D71-4841-9C94-3DE7FCFB9230}">
-                <p14:media xmlns:p14="http://schemas.microsoft.com/office/powerpoint/2010/main" r:embed="rId3"/>
-              </p:ext>
-            </p:extLst>
-          </p:nvPr>
+          <p:nvPr/>
         </p:nvPicPr>
         <p:blipFill>
-          <a:blip r:embed="rId5"/>
+          <a:blip r:embed="rId3"/>
           <a:stretch>
             <a:fillRect/>
           </a:stretch>
         </p:blipFill>
         <p:spPr>
           <a:xfrm>
-            <a:off x="365760" y="1783080"/>
-            <a:ext cx="5212080" cy="2926080"/>
+            <a:off x="914400" y="3931920"/>
+            <a:ext cx="7315200" cy="2011680"/>
           </a:xfrm>
           <a:prstGeom prst="rect">
             <a:avLst/>
           </a:prstGeom>
         </p:spPr>
       </p:pic>
-      <p:sp>
-        <p:nvSpPr>
-          <p:cNvPr id="7" name="TextBox 6"/>
-          <p:cNvSpPr txBox="1"/>
-          <p:nvPr/>
-        </p:nvSpPr>
-        <p:spPr>
-          <a:xfrm>
-            <a:off x="5715000" y="1783080"/>
-            <a:ext cx="3063240" cy="3017520"/>
-          </a:xfrm>
-          <a:prstGeom prst="rect">
-            <a:avLst/>
-          </a:prstGeom>
-          <a:noFill/>
-        </p:spPr>
-        <p:txBody>
-          <a:bodyPr wrap="square">
-            <a:spAutoFit/>
-          </a:bodyPr>
-          <a:lstStyle/>
-          <a:p>
-            <a:pPr>
-              <a:spcAft>
-                <a:spcPts val="600"/>
-              </a:spcAft>
-              <a:defRPr sz="1350" b="1">
-                <a:solidFill>
-                  <a:srgbClr val="E74C3C"/>
-                </a:solidFill>
-                <a:latin typeface="Arial"/>
-              </a:defRPr>
-            </a:pPr>
-            <a:r>
-              <a:t>Đặc tính Động học Từng Mô hình:</a:t>
-            </a:r>
-          </a:p>
-          <a:p>
-            <a:pPr>
-              <a:spcAft>
-                <a:spcPts val="500"/>
-              </a:spcAft>
-              <a:defRPr sz="1150">
-                <a:solidFill>
-                  <a:srgbClr val="1C1C1C"/>
-                </a:solidFill>
-                <a:latin typeface="Arial"/>
-              </a:defRPr>
-            </a:pPr>
-            <a:r>
-              <a:t>• Tuần tự: Thực thi nối tiếp từng tác vụ; vi xử lý bị phong tỏa hoàn toàn khi chờ Vào/Ra; tổng thời gian đạt đỉnh (6.0 giây).</a:t>
-            </a:r>
-          </a:p>
-          <a:p>
-            <a:pPr>
-              <a:spcAft>
-                <a:spcPts val="500"/>
-              </a:spcAft>
-              <a:defRPr sz="1150">
-                <a:solidFill>
-                  <a:srgbClr val="1C1C1C"/>
-                </a:solidFill>
-                <a:latin typeface="Arial"/>
-              </a:defRPr>
-            </a:pPr>
-            <a:r>
-              <a:t>• Đồng thời: Một nhân vi xử lý phân chia lát cắt thời gian; chuyển đổi ngữ cảnh linh hoạt giữa các tác vụ đang chờ.</a:t>
-            </a:r>
-          </a:p>
-          <a:p>
-            <a:pPr>
-              <a:spcAft>
-                <a:spcPts val="500"/>
-              </a:spcAft>
-              <a:defRPr sz="1150">
-                <a:solidFill>
-                  <a:srgbClr val="1C1C1C"/>
-                </a:solidFill>
-                <a:latin typeface="Arial"/>
-              </a:defRPr>
-            </a:pPr>
-            <a:r>
-              <a:t>• Song song: Ba nhân vật lý độc lập xử lý cùng lúc ba tác vụ; đạt tốc độ nhanh nhất về mặt tính toán thuần túy (2.0 giây).</a:t>
-            </a:r>
-          </a:p>
-          <a:p>
-            <a:pPr>
-              <a:spcAft>
-                <a:spcPts val="500"/>
-              </a:spcAft>
-              <a:defRPr sz="1150">
-                <a:solidFill>
-                  <a:srgbClr val="1C1C1C"/>
-                </a:solidFill>
-                <a:latin typeface="Arial"/>
-              </a:defRPr>
-            </a:pPr>
-            <a:r>
-              <a:t>• Bất đồng bộ: Một luồng đơn kết hợp vòng lặp sự kiện; giải phóng hoàn toàn vi xử lý trong thời gian chờ dữ liệu (2.4 giây).</a:t>
-            </a:r>
-          </a:p>
-        </p:txBody>
-      </p:sp>
-      <p:sp>
-        <p:nvSpPr>
-          <p:cNvPr id="8" name="TextBox 7"/>
-          <p:cNvSpPr txBox="1"/>
-          <p:nvPr/>
-        </p:nvSpPr>
-        <p:spPr>
-          <a:xfrm>
-            <a:off x="365760" y="4800600"/>
-            <a:ext cx="8412480" cy="1188720"/>
-          </a:xfrm>
-          <a:prstGeom prst="rect">
-            <a:avLst/>
-          </a:prstGeom>
-          <a:noFill/>
-        </p:spPr>
-        <p:txBody>
-          <a:bodyPr wrap="square">
-            <a:spAutoFit/>
-          </a:bodyPr>
-          <a:lstStyle/>
-          <a:p>
-            <a:pPr>
-              <a:defRPr sz="1200" b="1">
-                <a:solidFill>
-                  <a:srgbClr val="1C1C1C"/>
-                </a:solidFill>
-                <a:latin typeface="Arial"/>
-              </a:defRPr>
-            </a:pPr>
-            <a:r>
-              <a:t>• Kết luận học thuật: Mô phỏng trực quan làm rõ ranh giới giữa năng lực tính toán phần cứng và giải thuật điều phối phần mềm — Cung cấp nền tảng tư duy vững chắc trước khi tiếp cận kỹ thuật lập trình.</a:t>
-            </a:r>
-          </a:p>
-        </p:txBody>
-      </p:sp>
     </p:spTree>
   </p:cSld>
   <p:clrMapOvr>
     <a:masterClrMapping/>
   </p:clrMapOvr>
-  <p:timing>
-    <p:tnLst>
-      <p:par>
-        <p:cTn id="1" dur="indefinite" restart="never" nodeType="tmRoot">
-          <p:childTnLst>
-            <p:video>
-              <p:cMediaNode vol="80000">
-                <p:cTn id="2" fill="hold" display="0">
-                  <p:stCondLst>
-                    <p:cond delay="indefinite"/>
-                  </p:stCondLst>
-                </p:cTn>
-                <p:tgtEl>
-                  <p:spTgt spid="6"/>
-                </p:tgtEl>
-              </p:cMediaNode>
-            </p:video>
-          </p:childTnLst>
-        </p:cTn>
-      </p:par>
-    </p:tnLst>
-  </p:timing>
 </p:sld>
 </file>
 
@@ -9759,8 +6015,8 @@
         </p:nvSpPr>
         <p:spPr>
           <a:xfrm>
-            <a:off x="182880" y="182880"/>
-            <a:ext cx="731520" cy="548640"/>
+            <a:off x="164592" y="6217920"/>
+            <a:ext cx="484632" cy="484632"/>
           </a:xfrm>
           <a:prstGeom prst="rect">
             <a:avLst/>
@@ -9768,12 +6024,12 @@
           <a:noFill/>
         </p:spPr>
         <p:txBody>
-          <a:bodyPr wrap="square">
+          <a:bodyPr wrap="none" lIns="0" rIns="0" tIns="73152" bIns="0">
             <a:spAutoFit/>
           </a:bodyPr>
           <a:lstStyle/>
           <a:p>
-            <a:pPr>
+            <a:pPr algn="ctr">
               <a:defRPr sz="1800" b="1">
                 <a:solidFill>
                   <a:srgbClr val="FFFFFF"/>
@@ -9796,7 +6052,7 @@
         <p:spPr>
           <a:xfrm>
             <a:off x="960120" y="6217920"/>
-            <a:ext cx="6858000" cy="457200"/>
+            <a:ext cx="5669280" cy="457200"/>
           </a:xfrm>
           <a:prstGeom prst="rect">
             <a:avLst/>
@@ -9804,13 +6060,13 @@
           <a:noFill/>
         </p:spPr>
         <p:txBody>
-          <a:bodyPr wrap="square">
+          <a:bodyPr wrap="none" lIns="0" tIns="73152">
             <a:spAutoFit/>
           </a:bodyPr>
           <a:lstStyle/>
           <a:p>
             <a:pPr>
-              <a:defRPr sz="1400" b="1">
+              <a:defRPr sz="1600" b="1">
                 <a:solidFill>
                   <a:srgbClr val="1C1C1C"/>
                 </a:solidFill>
@@ -9818,7 +6074,7 @@
               </a:defRPr>
             </a:pPr>
             <a:r>
-              <a:t>Phân tích Hiệu năng — Động học Thực thi và Chi phí Ngữ cảnh</a:t>
+              <a:t>Ví dụ thực tế — Bãi giữ xe &amp; Đi thi</a:t>
             </a:r>
           </a:p>
         </p:txBody>
@@ -9831,8 +6087,8 @@
         </p:nvSpPr>
         <p:spPr>
           <a:xfrm>
-            <a:off x="365760" y="1234440"/>
-            <a:ext cx="8412480" cy="502920"/>
+            <a:off x="365760" y="1280160"/>
+            <a:ext cx="8412480" cy="548640"/>
           </a:xfrm>
           <a:prstGeom prst="rect">
             <a:avLst/>
@@ -9840,13 +6096,13 @@
           <a:noFill/>
         </p:spPr>
         <p:txBody>
-          <a:bodyPr wrap="square" tIns="0" bIns="0">
+          <a:bodyPr wrap="none">
             <a:spAutoFit/>
           </a:bodyPr>
           <a:lstStyle/>
           <a:p>
             <a:pPr>
-              <a:defRPr sz="1800" b="1">
+              <a:defRPr sz="2100" b="1">
                 <a:solidFill>
                   <a:srgbClr val="1C1C1C"/>
                 </a:solidFill>
@@ -9854,43 +6110,64 @@
               </a:defRPr>
             </a:pPr>
             <a:r>
-              <a:t>Phân tích Động học: Chi phí Chuyển đổi Ngữ cảnh &amp; Tác vụ Vào/Ra</a:t>
-            </a:r>
-          </a:p>
-        </p:txBody>
-      </p:sp>
-      <p:sp>
-        <p:nvSpPr>
-          <p:cNvPr id="6" name="TextBox 5"/>
-          <p:cNvSpPr txBox="1"/>
+              <a:t>➢ Phân tích 2 ví dụ thực tế trong bài giảng gốc</a:t>
+            </a:r>
+          </a:p>
+        </p:txBody>
+      </p:sp>
+      <p:sp>
+        <p:nvSpPr>
+          <p:cNvPr id="6" name="Rectangle 5"/>
+          <p:cNvSpPr/>
           <p:nvPr/>
         </p:nvSpPr>
         <p:spPr>
           <a:xfrm>
-            <a:off x="365760" y="1874519"/>
-            <a:ext cx="4114800" cy="4114800"/>
+            <a:off x="365760" y="1920240"/>
+            <a:ext cx="4069080" cy="4023360"/>
           </a:xfrm>
           <a:prstGeom prst="rect">
             <a:avLst/>
           </a:prstGeom>
-          <a:noFill/>
-        </p:spPr>
-        <p:txBody>
-          <a:bodyPr wrap="square">
-            <a:spAutoFit/>
-          </a:bodyPr>
-          <a:lstStyle/>
-          <a:p>
-            <a:pPr>
-              <a:defRPr sz="1350" b="1">
-                <a:solidFill>
-                  <a:srgbClr val="E74C3C"/>
-                </a:solidFill>
-                <a:latin typeface="Arial"/>
-              </a:defRPr>
-            </a:pPr>
-            <a:r>
-              <a:t>1. Cơ chế Tác vụ Nghẽn Vào/Ra (I/O-Bound)</a:t>
+          <a:solidFill>
+            <a:srgbClr val="FFFFFF"/>
+          </a:solidFill>
+          <a:ln w="19050">
+            <a:solidFill>
+              <a:srgbClr val="CBD5E1"/>
+            </a:solidFill>
+          </a:ln>
+        </p:spPr>
+        <p:style>
+          <a:lnRef idx="1">
+            <a:schemeClr val="accent1"/>
+          </a:lnRef>
+          <a:fillRef idx="3">
+            <a:schemeClr val="accent1"/>
+          </a:fillRef>
+          <a:effectRef idx="2">
+            <a:schemeClr val="accent1"/>
+          </a:effectRef>
+          <a:fontRef idx="minor">
+            <a:schemeClr val="lt1"/>
+          </a:fontRef>
+        </p:style>
+        <p:txBody>
+          <a:bodyPr rtlCol="0" anchor="ctr" wrap="square" lIns="228600" rIns="228600" tIns="182880"/>
+          <a:lstStyle/>
+          <a:p>
+            <a:pPr algn="ctr">
+              <a:spcAft>
+                <a:spcPts val="800"/>
+              </a:spcAft>
+              <a:defRPr b="1" sz="1400">
+                <a:solidFill>
+                  <a:srgbClr val="E04B3B"/>
+                </a:solidFill>
+              </a:defRPr>
+            </a:pPr>
+            <a:r>
+              <a:t>🅿️ VÍ DỤ 1: BÃI GIỮ XE THÔNG MINH</a:t>
             </a:r>
           </a:p>
           <a:p>
@@ -9902,11 +6179,25 @@
                 <a:solidFill>
                   <a:srgbClr val="1C1C1C"/>
                 </a:solidFill>
-                <a:latin typeface="Arial"/>
-              </a:defRPr>
-            </a:pPr>
-            <a:r>
-              <a:t>• Thời gian chờ áp đảo: Thời gian chờ đường truyền mạng hoặc ổ đĩa chiếm trên 95% tổng vòng đời tác vụ.</a:t>
+              </a:defRPr>
+            </a:pPr>
+            <a:r>
+              <a:t>• Tuần tự (Blocking): Bảo vệ phát thẻ xe cho Xe 1 → Đứng chờ Xe 1 chạy vào bãi tìm chỗ đỗ xong xuôi → Mới phát thẻ cho Xe 2.</a:t>
+            </a:r>
+          </a:p>
+          <a:p>
+            <a:pPr>
+              <a:spcAft>
+                <a:spcPts val="800"/>
+              </a:spcAft>
+              <a:defRPr sz="1150" i="1">
+                <a:solidFill>
+                  <a:srgbClr val="B4281E"/>
+                </a:solidFill>
+              </a:defRPr>
+            </a:pPr>
+            <a:r>
+              <a:t>→ Hậu quả: Cổng giữ xe bị ùn tắc nghiêm trọng! Thời gian chờ là tổng thời gian tìm chỗ đỗ của từng xe.</a:t>
             </a:r>
           </a:p>
           <a:p>
@@ -9918,11 +6209,79 @@
                 <a:solidFill>
                   <a:srgbClr val="1C1C1C"/>
                 </a:solidFill>
-                <a:latin typeface="Arial"/>
-              </a:defRPr>
-            </a:pPr>
-            <a:r>
-              <a:t>• Khử thời gian nhàn rỗi: Mô hình bất đồng bộ tách rời lời gọi yêu cầu khỏi việc chờ kết quả, triệt tiêu thời gian vi xử lý bị đóng băng.</a:t>
+              </a:defRPr>
+            </a:pPr>
+            <a:r>
+              <a:t>• Bất đồng bộ (Non-blocking): Bảo vệ quẹt thẻ trao vé trong 2 giây → Xe 1 tự vào bãi tìm chỗ (I/O chờ) → Bảo vệ đón ngay Xe 2!</a:t>
+            </a:r>
+          </a:p>
+          <a:p>
+            <a:pPr>
+              <a:defRPr sz="1150" b="1">
+                <a:solidFill>
+                  <a:srgbClr val="10783C"/>
+                </a:solidFill>
+              </a:defRPr>
+            </a:pPr>
+            <a:r>
+              <a:t>→ Bản chất: Luồng bảo vệ không bị chặn. Nhiều người tìm chỗ đỗ đồng thời, cổng ra vào thông suốt liên tục.</a:t>
+            </a:r>
+          </a:p>
+        </p:txBody>
+      </p:sp>
+      <p:sp>
+        <p:nvSpPr>
+          <p:cNvPr id="7" name="Rectangle 6"/>
+          <p:cNvSpPr/>
+          <p:nvPr/>
+        </p:nvSpPr>
+        <p:spPr>
+          <a:xfrm>
+            <a:off x="4709160" y="1920240"/>
+            <a:ext cx="4069080" cy="4023360"/>
+          </a:xfrm>
+          <a:prstGeom prst="rect">
+            <a:avLst/>
+          </a:prstGeom>
+          <a:solidFill>
+            <a:srgbClr val="FFFFFF"/>
+          </a:solidFill>
+          <a:ln w="19050">
+            <a:solidFill>
+              <a:srgbClr val="CBD5E1"/>
+            </a:solidFill>
+          </a:ln>
+        </p:spPr>
+        <p:style>
+          <a:lnRef idx="1">
+            <a:schemeClr val="accent1"/>
+          </a:lnRef>
+          <a:fillRef idx="3">
+            <a:schemeClr val="accent1"/>
+          </a:fillRef>
+          <a:effectRef idx="2">
+            <a:schemeClr val="accent1"/>
+          </a:effectRef>
+          <a:fontRef idx="minor">
+            <a:schemeClr val="lt1"/>
+          </a:fontRef>
+        </p:style>
+        <p:txBody>
+          <a:bodyPr rtlCol="0" anchor="ctr" wrap="square" lIns="228600" rIns="228600" tIns="182880"/>
+          <a:lstStyle/>
+          <a:p>
+            <a:pPr algn="ctr">
+              <a:spcAft>
+                <a:spcPts val="800"/>
+              </a:spcAft>
+              <a:defRPr b="1" sz="1400">
+                <a:solidFill>
+                  <a:srgbClr val="0284C7"/>
+                </a:solidFill>
+              </a:defRPr>
+            </a:pPr>
+            <a:r>
+              <a:t>📝 VÍ DỤ 2: ĐI THI (LÀM BÀI TRẮC NGHIỆM)</a:t>
             </a:r>
           </a:p>
           <a:p>
@@ -9934,47 +6293,25 @@
                 <a:solidFill>
                   <a:srgbClr val="1C1C1C"/>
                 </a:solidFill>
-                <a:latin typeface="Arial"/>
-              </a:defRPr>
-            </a:pPr>
-            <a:r>
-              <a:t>• Cơ chế nhường quyền: Tác vụ chủ động nhường vi xử lý khi phát sinh thao tác chờ và chỉ được nạp lại khi có tín hiệu sẵn sàng.</a:t>
-            </a:r>
-          </a:p>
-        </p:txBody>
-      </p:sp>
-      <p:sp>
-        <p:nvSpPr>
-          <p:cNvPr id="7" name="TextBox 6"/>
-          <p:cNvSpPr txBox="1"/>
-          <p:nvPr/>
-        </p:nvSpPr>
-        <p:spPr>
-          <a:xfrm>
-            <a:off x="4663440" y="1874519"/>
-            <a:ext cx="4114800" cy="4114800"/>
-          </a:xfrm>
-          <a:prstGeom prst="rect">
-            <a:avLst/>
-          </a:prstGeom>
-          <a:noFill/>
-        </p:spPr>
-        <p:txBody>
-          <a:bodyPr wrap="square">
-            <a:spAutoFit/>
-          </a:bodyPr>
-          <a:lstStyle/>
+              </a:defRPr>
+            </a:pPr>
+            <a:r>
+              <a:t>• Tuần tự (Blocking): Thí sinh làm từ Câu 1 → Câu 2 → Gặp Câu 3 quá khó → Ngồi nghĩ 30 phút → Hết giờ mà chưa kịp đọc các câu sau.</a:t>
+            </a:r>
+          </a:p>
           <a:p>
             <a:pPr>
-              <a:defRPr sz="1350" b="1">
-                <a:solidFill>
-                  <a:srgbClr val="E74C3C"/>
-                </a:solidFill>
-                <a:latin typeface="Arial"/>
-              </a:defRPr>
-            </a:pPr>
-            <a:r>
-              <a:t>2. Chi phí Chuyển đổi Ngữ cảnh Thực thi</a:t>
+              <a:spcAft>
+                <a:spcPts val="800"/>
+              </a:spcAft>
+              <a:defRPr sz="1150" i="1">
+                <a:solidFill>
+                  <a:srgbClr val="B4281E"/>
+                </a:solidFill>
+              </a:defRPr>
+            </a:pPr>
+            <a:r>
+              <a:t>→ Hậu quả: Bị nghẽn toàn bộ bài thi! Điểm số thấp vì thời gian bị chôn chân tại câu khó.</a:t>
             </a:r>
           </a:p>
           <a:p>
@@ -9986,43 +6323,22 @@
                 <a:solidFill>
                   <a:srgbClr val="1C1C1C"/>
                 </a:solidFill>
-                <a:latin typeface="Arial"/>
-              </a:defRPr>
-            </a:pPr>
-            <a:r>
-              <a:t>• Ngữ cảnh nhân hệ điều hành: Chuyển đổi giữa các luồng hệ điều hành tiêu tốn hàng nghìn chu kỳ xung nhịp để lưu bảng trạng thái và nạp lại thanh ghi.</a:t>
+              </a:defRPr>
+            </a:pPr>
+            <a:r>
+              <a:t>• Bất đồng bộ (Async): Gặp Câu 3 khó (chờ xử lý) → Đánh dấu tạm gác lại (Yield) → Chuyển sang làm ngay Câu 4, 5, 6 dễ!</a:t>
             </a:r>
           </a:p>
           <a:p>
             <a:pPr>
-              <a:spcAft>
-                <a:spcPts val="600"/>
-              </a:spcAft>
-              <a:defRPr sz="1200">
-                <a:solidFill>
-                  <a:srgbClr val="1C1C1C"/>
-                </a:solidFill>
-                <a:latin typeface="Arial"/>
-              </a:defRPr>
-            </a:pPr>
-            <a:r>
-              <a:t>• Ngữ cảnh không gian người dùng: Chuyển đổi giữa các hàm đồng quy chỉ thay đổi con trỏ khung ngăn xếp, chi phí chỉ vài chục nano giây.</a:t>
-            </a:r>
-          </a:p>
-          <a:p>
-            <a:pPr>
-              <a:spcAft>
-                <a:spcPts val="600"/>
-              </a:spcAft>
-              <a:defRPr sz="1200">
-                <a:solidFill>
-                  <a:srgbClr val="1C1C1C"/>
-                </a:solidFill>
-                <a:latin typeface="Arial"/>
-              </a:defRPr>
-            </a:pPr>
-            <a:r>
-              <a:t>• Tối ưu hóa bộ nhớ: Triệt tiêu sự lãng phí cấp phát ngăn xếp tĩnh của luồng hệ điều hành, cho phép duy trì hàng vạn tác vụ đồng thời.</a:t>
+              <a:defRPr sz="1150" b="1">
+                <a:solidFill>
+                  <a:srgbClr val="10783C"/>
+                </a:solidFill>
+              </a:defRPr>
+            </a:pPr>
+            <a:r>
+              <a:t>→ Bản chất: Không để thời gian chờ làm tắc nghẽn công việc. Khi làm hết câu dễ, quay lại tiếp tục giải câu 3 (Resume).</a:t>
             </a:r>
           </a:p>
         </p:txBody>
